--- a/demo/presentation.pptx
+++ b/demo/presentation.pptx
@@ -3085,8 +3085,16 @@
 </file>
 
 <file path=ppt/slides/slide1.xml><?xml version="1.0" encoding="utf-8"?>
-<p:sld xmlns:a="http://schemas.openxmlformats.org/drawingml/2006/main" xmlns:r="http://schemas.openxmlformats.org/officeDocument/2006/relationships" xmlns:p="http://schemas.openxmlformats.org/presentationml/2006/main">
+<p:sld xmlns:a="http://schemas.openxmlformats.org/drawingml/2006/main" xmlns:p="http://schemas.openxmlformats.org/presentationml/2006/main">
   <p:cSld>
+    <p:bg>
+      <a:bgPr>
+        <a:solidFill>
+          <a:srgbClr val="0B1220"/>
+        </a:solidFill>
+        <a:effectLst/>
+      </a:bgPr>
+    </p:bg>
     <p:spTree>
       <p:nvGrpSpPr>
         <p:cNvPr id="1" name=""/>
@@ -3108,66 +3116,309 @@
             <a:spLocks noGrp="1"/>
           </p:cNvSpPr>
           <p:nvPr>
-            <p:ph type="title"/>
+            <p:ph type="ctrTitle"/>
           </p:nvPr>
         </p:nvSpPr>
-        <p:spPr/>
-        <p:txBody>
-          <a:bodyPr/>
-          <a:lstStyle/>
+        <p:spPr>
+          <a:xfrm>
+            <a:off x="685800" y="1597819"/>
+            <a:ext cx="7772400" cy="1102519"/>
+          </a:xfrm>
+        </p:spPr>
+        <p:txBody>
+          <a:bodyPr wrap="square" anchor="t" lIns="91440" rIns="91440" tIns="45720" bIns="45720"/>
+          <a:lstStyle>
+            <a:lvl1pPr>
+              <a:defRPr sz="3000">
+                <a:latin typeface="Aptos Display"/>
+                <a:solidFill>
+                  <a:srgbClr val="FFFFFF"/>
+                </a:solidFill>
+              </a:defRPr>
+            </a:lvl1pPr>
+            <a:lvl2pPr>
+              <a:defRPr sz="3000">
+                <a:latin typeface="Aptos Display"/>
+                <a:solidFill>
+                  <a:srgbClr val="FFFFFF"/>
+                </a:solidFill>
+              </a:defRPr>
+            </a:lvl2pPr>
+            <a:lvl3pPr>
+              <a:defRPr sz="3000">
+                <a:latin typeface="Aptos Display"/>
+                <a:solidFill>
+                  <a:srgbClr val="FFFFFF"/>
+                </a:solidFill>
+              </a:defRPr>
+            </a:lvl3pPr>
+          </a:lstStyle>
           <a:p>
             <a:pPr lvl="0" indent="0" marL="0">
               <a:buNone/>
             </a:pPr>
             <a:r>
-              <a:rPr/>
-              <a:t>OpsDesk DevSecOps capstone — presentation deck source</a:t>
-            </a:r>
-          </a:p>
-        </p:txBody>
-      </p:sp>
-      <p:sp>
-        <p:nvSpPr>
-          <p:cNvPr id="3" name="Content Placeholder 2"/>
+              <a:rPr sz="3000" b="1">
+                <a:latin typeface="Aptos Display"/>
+                <a:solidFill>
+                  <a:srgbClr val="FFFFFF"/>
+                </a:solidFill>
+              </a:rPr>
+              <a:t>OpsDesk: from code to observable operations</a:t>
+            </a:r>
+          </a:p>
+        </p:txBody>
+      </p:sp>
+      <p:sp>
+        <p:nvSpPr>
+          <p:cNvPr id="3" name="Subtitle 2"/>
           <p:cNvSpPr>
             <a:spLocks noGrp="1"/>
           </p:cNvSpPr>
           <p:nvPr>
-            <p:ph idx="1"/>
+            <p:ph idx="1" type="subTitle"/>
           </p:nvPr>
         </p:nvSpPr>
+        <p:spPr>
+          <a:xfrm>
+            <a:off x="1371600" y="2914650"/>
+            <a:ext cx="6400800" cy="1314450"/>
+          </a:xfrm>
+        </p:spPr>
+        <p:txBody>
+          <a:bodyPr wrap="square" anchor="t" lIns="91440" rIns="91440" tIns="45720" bIns="45720"/>
+          <a:lstStyle>
+            <a:lvl1pPr>
+              <a:defRPr sz="1800">
+                <a:latin typeface="Aptos"/>
+                <a:solidFill>
+                  <a:srgbClr val="06B6D4"/>
+                </a:solidFill>
+              </a:defRPr>
+            </a:lvl1pPr>
+            <a:lvl2pPr>
+              <a:defRPr sz="1800">
+                <a:latin typeface="Aptos"/>
+                <a:solidFill>
+                  <a:srgbClr val="06B6D4"/>
+                </a:solidFill>
+              </a:defRPr>
+            </a:lvl2pPr>
+            <a:lvl3pPr>
+              <a:defRPr sz="1800">
+                <a:latin typeface="Aptos"/>
+                <a:solidFill>
+                  <a:srgbClr val="06B6D4"/>
+                </a:solidFill>
+              </a:defRPr>
+            </a:lvl3pPr>
+          </a:lstStyle>
+          <a:p>
+            <a:pPr lvl="0" indent="0" marL="0">
+              <a:buNone/>
+            </a:pPr>
+            <a:r>
+              <a:rPr sz="1800" b="0">
+                <a:latin typeface="Aptos"/>
+                <a:solidFill>
+                  <a:srgbClr val="06B6D4"/>
+                </a:solidFill>
+              </a:rPr>
+              <a:t>DevSecOps capstone</a:t>
+            </a:r>
+            <a:br/>
+            <a:br/>
+            <a:r>
+              <a:rPr sz="1800" b="0">
+                <a:latin typeface="Aptos"/>
+                <a:solidFill>
+                  <a:srgbClr val="06B6D4"/>
+                </a:solidFill>
+              </a:rPr>
+              <a:t>OpsDesk platform team</a:t>
+            </a:r>
+          </a:p>
+        </p:txBody>
+      </p:sp>
+      <p:sp>
+        <p:nvSpPr>
+          <p:cNvPr id="4" name="Date Placeholder 3"/>
+          <p:cNvSpPr>
+            <a:spLocks noGrp="1"/>
+          </p:cNvSpPr>
+          <p:nvPr>
+            <p:ph idx="10" sz="half" type="dt"/>
+          </p:nvPr>
+        </p:nvSpPr>
         <p:spPr/>
         <p:txBody>
-          <a:bodyPr/>
-          <a:lstStyle/>
+          <a:bodyPr wrap="square" anchor="t" lIns="91440" rIns="91440" tIns="45720" bIns="45720"/>
+          <a:lstStyle>
+            <a:lvl1pPr>
+              <a:defRPr sz="900">
+                <a:latin typeface="Aptos"/>
+                <a:solidFill>
+                  <a:srgbClr val="CBD5E1"/>
+                </a:solidFill>
+              </a:defRPr>
+            </a:lvl1pPr>
+            <a:lvl2pPr>
+              <a:defRPr sz="900">
+                <a:latin typeface="Aptos"/>
+                <a:solidFill>
+                  <a:srgbClr val="CBD5E1"/>
+                </a:solidFill>
+              </a:defRPr>
+            </a:lvl2pPr>
+            <a:lvl3pPr>
+              <a:defRPr sz="900">
+                <a:latin typeface="Aptos"/>
+                <a:solidFill>
+                  <a:srgbClr val="CBD5E1"/>
+                </a:solidFill>
+              </a:defRPr>
+            </a:lvl3pPr>
+          </a:lstStyle>
           <a:p>
             <a:pPr lvl="0" indent="0" marL="0">
               <a:buNone/>
             </a:pPr>
             <a:r>
-              <a:rPr/>
-              <a:t>This Markdown file is the source for the generated </a:t>
-            </a:r>
-            <a:r>
-              <a:rPr>
-                <a:latin typeface="Courier"/>
-              </a:rPr>
-              <a:t>presentation.pptx</a:t>
-            </a:r>
-            <a:r>
-              <a:rPr/>
-              <a:t> deck: a title slide plus 11 content slides. Regenerate it with Pandoc when the source changes, then record the walkthrough separately. Every runtime claim in the slides is phrased as an intended check; replace the evidence placeholders with screenshots or links only after running the commands in </a:t>
-            </a:r>
-            <a:r>
-              <a:rPr>
-                <a:latin typeface="Courier"/>
-              </a:rPr>
-              <a:t>demo/evidence-checklist.md</a:t>
-            </a:r>
-            <a:r>
-              <a:rPr/>
-              <a:t>.</a:t>
-            </a:r>
+              <a:rPr sz="900" b="0">
+                <a:latin typeface="Aptos"/>
+                <a:solidFill>
+                  <a:srgbClr val="CBD5E1"/>
+                </a:solidFill>
+              </a:rPr>
+              <a:t>17 October 2026</a:t>
+            </a:r>
+          </a:p>
+        </p:txBody>
+      </p:sp>
+      <p:sp>
+        <p:nvSpPr>
+          <p:cNvPr id="5" name="Cover accent bar"/>
+          <p:cNvSpPr txBox="0"/>
+          <p:nvPr/>
+        </p:nvSpPr>
+        <p:spPr>
+          <a:xfrm>
+            <a:off x="650000" y="1450000"/>
+            <a:ext cx="90000" cy="1480000"/>
+          </a:xfrm>
+          <a:prstGeom prst="rect">
+            <a:avLst/>
+          </a:prstGeom>
+          <a:solidFill>
+            <a:srgbClr val="06B6D4"/>
+          </a:solidFill>
+          <a:ln w="9525">
+            <a:noFill/>
+          </a:ln>
+        </p:spPr>
+        <p:txBody>
+          <a:bodyPr anchor="ctr" lIns="45720" rIns="45720" tIns="22860" bIns="22860" wrap="square"/>
+          <a:lstStyle/>
+          <a:p>
+            <a:pPr algn="l"/>
+            <a:endParaRPr lang="en-US"/>
+          </a:p>
+        </p:txBody>
+      </p:sp>
+      <p:sp>
+        <p:nvSpPr>
+          <p:cNvPr id="6" name="Cover accent dot"/>
+          <p:cNvSpPr txBox="0"/>
+          <p:nvPr/>
+        </p:nvSpPr>
+        <p:spPr>
+          <a:xfrm>
+            <a:off x="7940000" y="1160000"/>
+            <a:ext cx="220000" cy="220000"/>
+          </a:xfrm>
+          <a:prstGeom prst="ellipse">
+            <a:avLst/>
+          </a:prstGeom>
+          <a:solidFill>
+            <a:srgbClr val="14B8A6"/>
+          </a:solidFill>
+          <a:ln w="9525">
+            <a:noFill/>
+          </a:ln>
+        </p:spPr>
+        <p:txBody>
+          <a:bodyPr anchor="ctr" lIns="45720" rIns="45720" tIns="22860" bIns="22860" wrap="square"/>
+          <a:lstStyle/>
+          <a:p>
+            <a:pPr algn="l"/>
+            <a:endParaRPr lang="en-US"/>
+          </a:p>
+        </p:txBody>
+      </p:sp>
+      <p:sp>
+        <p:nvSpPr>
+          <p:cNvPr id="7" name="Cover accent dot amber"/>
+          <p:cNvSpPr txBox="0"/>
+          <p:nvPr/>
+        </p:nvSpPr>
+        <p:spPr>
+          <a:xfrm>
+            <a:off x="8290000" y="1510000"/>
+            <a:ext cx="140000" cy="140000"/>
+          </a:xfrm>
+          <a:prstGeom prst="ellipse">
+            <a:avLst/>
+          </a:prstGeom>
+          <a:solidFill>
+            <a:srgbClr val="F59E0B"/>
+          </a:solidFill>
+          <a:ln w="9525">
+            <a:noFill/>
+          </a:ln>
+        </p:spPr>
+        <p:txBody>
+          <a:bodyPr anchor="ctr" lIns="45720" rIns="45720" tIns="22860" bIns="22860" wrap="square"/>
+          <a:lstStyle/>
+          <a:p>
+            <a:pPr algn="l"/>
+            <a:endParaRPr lang="en-US"/>
+          </a:p>
+        </p:txBody>
+      </p:sp>
+      <p:sp>
+        <p:nvSpPr>
+          <p:cNvPr id="8" name="Cover footer"/>
+          <p:cNvSpPr txBox="1"/>
+          <p:nvPr/>
+        </p:nvSpPr>
+        <p:spPr>
+          <a:xfrm>
+            <a:off x="600000" y="6250000"/>
+            <a:ext cx="8200000" cy="360000"/>
+          </a:xfrm>
+          <a:prstGeom prst="rect">
+            <a:avLst/>
+          </a:prstGeom>
+          <a:noFill/>
+          <a:ln w="9525">
+            <a:noFill/>
+          </a:ln>
+        </p:spPr>
+        <p:txBody>
+          <a:bodyPr anchor="ctr" lIns="45720" rIns="45720" tIns="22860" bIns="22860" wrap="square"/>
+          <a:lstStyle/>
+          <a:p>
+            <a:pPr algn="l"/>
+            <a:r>
+              <a:rPr lang="en-US" sz="900">
+                <a:latin typeface="Aptos"/>
+                <a:solidFill>
+                  <a:srgbClr val="CBD5E1"/>
+                </a:solidFill>
+              </a:rPr>
+              <a:t>OPSDESK  /  DEVSECOPS CAPSTONE  /  LIVE CLASSROOM DEPLOYMENT</a:t>
+            </a:r>
+            <a:endParaRPr lang="en-US"/>
           </a:p>
         </p:txBody>
       </p:sp>
@@ -3177,8 +3428,16 @@
 </file>
 
 <file path=ppt/slides/slide10.xml><?xml version="1.0" encoding="utf-8"?>
-<p:sld xmlns:a="http://schemas.openxmlformats.org/drawingml/2006/main" xmlns:r="http://schemas.openxmlformats.org/officeDocument/2006/relationships" xmlns:p="http://schemas.openxmlformats.org/presentationml/2006/main">
+<p:sld xmlns:a="http://schemas.openxmlformats.org/drawingml/2006/main" xmlns:p="http://schemas.openxmlformats.org/presentationml/2006/main">
   <p:cSld>
+    <p:bg>
+      <a:bgPr>
+        <a:solidFill>
+          <a:srgbClr val="F8FAFC"/>
+        </a:solidFill>
+        <a:effectLst/>
+      </a:bgPr>
+    </p:bg>
     <p:spTree>
       <p:nvGrpSpPr>
         <p:cNvPr id="1" name=""/>
@@ -3195,6 +3454,61 @@
       </p:grpSpPr>
       <p:sp>
         <p:nvSpPr>
+          <p:cNvPr id="2" name="Title 1"/>
+          <p:cNvSpPr>
+            <a:spLocks noGrp="1"/>
+          </p:cNvSpPr>
+          <p:nvPr>
+            <p:ph type="title"/>
+          </p:nvPr>
+        </p:nvSpPr>
+        <p:spPr/>
+        <p:txBody>
+          <a:bodyPr wrap="square" anchor="t" lIns="91440" rIns="91440" tIns="45720" bIns="45720"/>
+          <a:lstStyle>
+            <a:lvl1pPr>
+              <a:defRPr sz="2500">
+                <a:latin typeface="Aptos Display"/>
+                <a:solidFill>
+                  <a:srgbClr val="0B1220"/>
+                </a:solidFill>
+              </a:defRPr>
+            </a:lvl1pPr>
+            <a:lvl2pPr>
+              <a:defRPr sz="2500">
+                <a:latin typeface="Aptos Display"/>
+                <a:solidFill>
+                  <a:srgbClr val="0B1220"/>
+                </a:solidFill>
+              </a:defRPr>
+            </a:lvl2pPr>
+            <a:lvl3pPr>
+              <a:defRPr sz="2500">
+                <a:latin typeface="Aptos Display"/>
+                <a:solidFill>
+                  <a:srgbClr val="0B1220"/>
+                </a:solidFill>
+              </a:defRPr>
+            </a:lvl3pPr>
+          </a:lstStyle>
+          <a:p>
+            <a:pPr lvl="0" indent="0" marL="0">
+              <a:buNone/>
+            </a:pPr>
+            <a:r>
+              <a:rPr sz="2500" b="1">
+                <a:latin typeface="Aptos Display"/>
+                <a:solidFill>
+                  <a:srgbClr val="0B1220"/>
+                </a:solidFill>
+              </a:rPr>
+              <a:t>Slide 9 — ArgoCD GitOps path</a:t>
+            </a:r>
+          </a:p>
+        </p:txBody>
+      </p:sp>
+      <p:sp>
+        <p:nvSpPr>
           <p:cNvPr id="3" name="Content Placeholder 2"/>
           <p:cNvSpPr>
             <a:spLocks noGrp="1"/>
@@ -3205,42 +3519,66 @@
         </p:nvSpPr>
         <p:spPr/>
         <p:txBody>
-          <a:bodyPr/>
-          <a:lstStyle/>
+          <a:bodyPr wrap="square" anchor="t" lIns="91440" rIns="91440" tIns="45720" bIns="45720"/>
+          <a:lstStyle>
+            <a:lvl1pPr>
+              <a:defRPr sz="1550">
+                <a:latin typeface="Aptos"/>
+                <a:solidFill>
+                  <a:srgbClr val="334155"/>
+                </a:solidFill>
+              </a:defRPr>
+            </a:lvl1pPr>
+            <a:lvl2pPr>
+              <a:defRPr sz="1550">
+                <a:latin typeface="Aptos"/>
+                <a:solidFill>
+                  <a:srgbClr val="334155"/>
+                </a:solidFill>
+              </a:defRPr>
+            </a:lvl2pPr>
+            <a:lvl3pPr>
+              <a:defRPr sz="1550">
+                <a:latin typeface="Aptos"/>
+                <a:solidFill>
+                  <a:srgbClr val="334155"/>
+                </a:solidFill>
+              </a:defRPr>
+            </a:lvl3pPr>
+          </a:lstStyle>
           <a:p>
             <a:pPr lvl="0" indent="0" marL="0">
-              <a:spcBef>
-                <a:spcPts val="3000"/>
-              </a:spcBef>
               <a:buNone/>
             </a:pPr>
             <a:r>
-              <a:rPr b="1"/>
-              <a:t>Slide 9 — ArgoCD GitOps path</a:t>
-            </a:r>
-          </a:p>
-          <a:p>
-            <a:pPr lvl="0" indent="0" marL="0">
+              <a:rPr sz="1550" b="0">
+                <a:latin typeface="Aptos"/>
+                <a:solidFill>
+                  <a:srgbClr val="334155"/>
+                </a:solidFill>
+              </a:rPr>
+              <a:t>argocd/application.yaml</a:t>
+            </a:r>
+            <a:r>
+              <a:rPr sz="1550" b="0">
+                <a:latin typeface="Aptos"/>
+                <a:solidFill>
+                  <a:srgbClr val="334155"/>
+                </a:solidFill>
+              </a:rPr>
+              <a:t> is the configured project Application:</a:t>
+            </a:r>
+          </a:p>
+          <a:p>
+            <a:pPr lvl="0" indent="0">
               <a:buNone/>
             </a:pPr>
             <a:r>
-              <a:rPr>
-                <a:latin typeface="Courier"/>
-              </a:rPr>
-              <a:t>argocd/application.yaml</a:t>
-            </a:r>
-            <a:r>
-              <a:rPr/>
-              <a:t> is a reviewable Application template:</a:t>
-            </a:r>
-          </a:p>
-          <a:p>
-            <a:pPr lvl="0" indent="0">
-              <a:buNone/>
-            </a:pPr>
-            <a:r>
-              <a:rPr>
-                <a:latin typeface="Courier"/>
+              <a:rPr sz="1550" b="0">
+                <a:latin typeface="Aptos"/>
+                <a:solidFill>
+                  <a:srgbClr val="334155"/>
+                </a:solidFill>
               </a:rPr>
               <a:t>Git main branch
       │
@@ -3254,38 +3592,100 @@
           <a:p>
             <a:pPr lvl="0"/>
             <a:r>
-              <a:rPr/>
-              <a:t>Replace repository, owner, and image/tag placeholders before applying.</a:t>
+              <a:rPr sz="1550" b="0">
+                <a:latin typeface="Aptos"/>
+                <a:solidFill>
+                  <a:srgbClr val="334155"/>
+                </a:solidFill>
+              </a:rPr>
+              <a:t>The current live release points at the project repository and immutable ECR image tags.</a:t>
             </a:r>
           </a:p>
           <a:p>
             <a:pPr lvl="0"/>
             <a:r>
-              <a:rPr>
-                <a:latin typeface="Courier"/>
+              <a:rPr sz="1550" b="0">
+                <a:latin typeface="Aptos"/>
+                <a:solidFill>
+                  <a:srgbClr val="334155"/>
+                </a:solidFill>
               </a:rPr>
               <a:t>automated.prune</a:t>
             </a:r>
             <a:r>
-              <a:rPr/>
+              <a:rPr sz="1550" b="0">
+                <a:latin typeface="Aptos"/>
+                <a:solidFill>
+                  <a:srgbClr val="334155"/>
+                </a:solidFill>
+              </a:rPr>
               <a:t> and </a:t>
             </a:r>
             <a:r>
-              <a:rPr>
-                <a:latin typeface="Courier"/>
+              <a:rPr sz="1550" b="0">
+                <a:latin typeface="Aptos"/>
+                <a:solidFill>
+                  <a:srgbClr val="334155"/>
+                </a:solidFill>
               </a:rPr>
               <a:t>selfHeal</a:t>
             </a:r>
             <a:r>
-              <a:rPr/>
-              <a:t> are enabled in the template.</a:t>
+              <a:rPr sz="1550" b="0">
+                <a:latin typeface="Aptos"/>
+                <a:solidFill>
+                  <a:srgbClr val="334155"/>
+                </a:solidFill>
+              </a:rPr>
+              <a:t> are enabled in the Application manifest.</a:t>
             </a:r>
           </a:p>
           <a:p>
             <a:pPr lvl="0"/>
             <a:r>
-              <a:rPr/>
-              <a:t>The manifest is not proof that ArgoCD is installed or synced.</a:t>
+              <a:rPr sz="1550" b="0">
+                <a:latin typeface="Aptos"/>
+                <a:solidFill>
+                  <a:srgbClr val="334155"/>
+                </a:solidFill>
+              </a:rPr>
+              <a:t>The live Application was observed as </a:t>
+            </a:r>
+            <a:r>
+              <a:rPr sz="1550" b="0">
+                <a:latin typeface="Aptos"/>
+                <a:solidFill>
+                  <a:srgbClr val="334155"/>
+                </a:solidFill>
+              </a:rPr>
+              <a:t>Synced</a:t>
+            </a:r>
+            <a:r>
+              <a:rPr sz="1550" b="0">
+                <a:latin typeface="Aptos"/>
+                <a:solidFill>
+                  <a:srgbClr val="334155"/>
+                </a:solidFill>
+              </a:rPr>
+              <a:t> and </a:t>
+            </a:r>
+            <a:r>
+              <a:rPr sz="1550" b="0">
+                <a:latin typeface="Aptos"/>
+                <a:solidFill>
+                  <a:srgbClr val="334155"/>
+                </a:solidFill>
+              </a:rPr>
+              <a:t>Healthy</a:t>
+            </a:r>
+            <a:r>
+              <a:rPr sz="1550" b="0">
+                <a:latin typeface="Aptos"/>
+                <a:solidFill>
+                  <a:srgbClr val="334155"/>
+                </a:solidFill>
+              </a:rPr>
+              <a:t> after deployment.</a:t>
             </a:r>
           </a:p>
           <a:p>
@@ -3293,23 +3693,277 @@
               <a:buNone/>
             </a:pPr>
             <a:r>
-              <a:rPr b="1"/>
-              <a:t>Evidence placeholder:</a:t>
-            </a:r>
-            <a:r>
-              <a:rPr/>
+              <a:rPr b="0" sz="1550">
+                <a:latin typeface="Aptos"/>
+                <a:solidFill>
+                  <a:srgbClr val="334155"/>
+                </a:solidFill>
+              </a:rPr>
+              <a:t>Observed live evidence:</a:t>
+            </a:r>
+            <a:r>
+              <a:rPr sz="1550" b="0">
+                <a:latin typeface="Aptos"/>
+                <a:solidFill>
+                  <a:srgbClr val="334155"/>
+                </a:solidFill>
+              </a:rPr>
               <a:t> </a:t>
             </a:r>
             <a:r>
-              <a:rPr>
-                <a:latin typeface="Courier"/>
-              </a:rPr>
-              <a:t>argocd app get opsdesk</a:t>
-            </a:r>
-            <a:r>
-              <a:rPr/>
-              <a:t> showing Synced/Healthy after a real deployment.</a:t>
-            </a:r>
+              <a:rPr sz="1550" b="0">
+                <a:latin typeface="Aptos"/>
+                <a:solidFill>
+                  <a:srgbClr val="334155"/>
+                </a:solidFill>
+              </a:rPr>
+              <a:t>kubectl -n argocd get application opsdesk</a:t>
+            </a:r>
+            <a:r>
+              <a:rPr sz="1550" b="0">
+                <a:latin typeface="Aptos"/>
+                <a:solidFill>
+                  <a:srgbClr val="334155"/>
+                </a:solidFill>
+              </a:rPr>
+              <a:t> reported </a:t>
+            </a:r>
+            <a:r>
+              <a:rPr sz="1550" b="0">
+                <a:latin typeface="Aptos"/>
+                <a:solidFill>
+                  <a:srgbClr val="334155"/>
+                </a:solidFill>
+              </a:rPr>
+              <a:t>Healthy Synced</a:t>
+            </a:r>
+            <a:r>
+              <a:rPr sz="1550" b="0">
+                <a:latin typeface="Aptos"/>
+                <a:solidFill>
+                  <a:srgbClr val="334155"/>
+                </a:solidFill>
+              </a:rPr>
+              <a:t>. The Application tracks </a:t>
+            </a:r>
+            <a:r>
+              <a:rPr sz="1550" b="0">
+                <a:latin typeface="Aptos"/>
+                <a:solidFill>
+                  <a:srgbClr val="334155"/>
+                </a:solidFill>
+              </a:rPr>
+              <a:t>Akarsh1196/devsecops-csp</a:t>
+            </a:r>
+            <a:r>
+              <a:rPr sz="1550" b="0">
+                <a:latin typeface="Aptos"/>
+                <a:solidFill>
+                  <a:srgbClr val="334155"/>
+                </a:solidFill>
+              </a:rPr>
+              <a:t> and reconciles the </a:t>
+            </a:r>
+            <a:r>
+              <a:rPr sz="1550" b="0">
+                <a:latin typeface="Aptos"/>
+                <a:solidFill>
+                  <a:srgbClr val="334155"/>
+                </a:solidFill>
+              </a:rPr>
+              <a:t>main</a:t>
+            </a:r>
+            <a:r>
+              <a:rPr sz="1550" b="0">
+                <a:latin typeface="Aptos"/>
+                <a:solidFill>
+                  <a:srgbClr val="334155"/>
+                </a:solidFill>
+              </a:rPr>
+              <a:t> branch into the </a:t>
+            </a:r>
+            <a:r>
+              <a:rPr sz="1550" b="0">
+                <a:latin typeface="Aptos"/>
+                <a:solidFill>
+                  <a:srgbClr val="334155"/>
+                </a:solidFill>
+              </a:rPr>
+              <a:t>opsdesk</a:t>
+            </a:r>
+            <a:r>
+              <a:rPr sz="1550" b="0">
+                <a:latin typeface="Aptos"/>
+                <a:solidFill>
+                  <a:srgbClr val="334155"/>
+                </a:solidFill>
+              </a:rPr>
+              <a:t> namespace.</a:t>
+            </a:r>
+          </a:p>
+        </p:txBody>
+      </p:sp>
+      <p:sp>
+        <p:nvSpPr>
+          <p:cNvPr id="4" name="Top accent"/>
+          <p:cNvSpPr txBox="0"/>
+          <p:nvPr/>
+        </p:nvSpPr>
+        <p:spPr>
+          <a:xfrm>
+            <a:off x="0" y="0"/>
+            <a:ext cx="9144000" cy="76000"/>
+          </a:xfrm>
+          <a:prstGeom prst="rect">
+            <a:avLst/>
+          </a:prstGeom>
+          <a:solidFill>
+            <a:srgbClr val="06B6D4"/>
+          </a:solidFill>
+          <a:ln w="9525">
+            <a:noFill/>
+          </a:ln>
+        </p:spPr>
+        <p:txBody>
+          <a:bodyPr anchor="ctr" lIns="45720" rIns="45720" tIns="22860" bIns="22860" wrap="square"/>
+          <a:lstStyle/>
+          <a:p>
+            <a:pPr algn="l"/>
+            <a:endParaRPr lang="en-US"/>
+          </a:p>
+        </p:txBody>
+      </p:sp>
+      <p:sp>
+        <p:nvSpPr>
+          <p:cNvPr id="5" name="Title accent"/>
+          <p:cNvSpPr txBox="0"/>
+          <p:nvPr/>
+        </p:nvSpPr>
+        <p:spPr>
+          <a:xfrm>
+            <a:off x="457200" y="1010000"/>
+            <a:ext cx="720000" cy="52000"/>
+          </a:xfrm>
+          <a:prstGeom prst="roundRect">
+            <a:avLst/>
+          </a:prstGeom>
+          <a:solidFill>
+            <a:srgbClr val="14B8A6"/>
+          </a:solidFill>
+          <a:ln w="9525">
+            <a:noFill/>
+          </a:ln>
+        </p:spPr>
+        <p:txBody>
+          <a:bodyPr anchor="ctr" lIns="45720" rIns="45720" tIns="22860" bIns="22860" wrap="square"/>
+          <a:lstStyle/>
+          <a:p>
+            <a:pPr algn="l"/>
+            <a:endParaRPr lang="en-US"/>
+          </a:p>
+        </p:txBody>
+      </p:sp>
+      <p:sp>
+        <p:nvSpPr>
+          <p:cNvPr id="6" name="Footer rule"/>
+          <p:cNvSpPr txBox="0"/>
+          <p:nvPr/>
+        </p:nvSpPr>
+        <p:spPr>
+          <a:xfrm>
+            <a:off x="457200" y="6440000"/>
+            <a:ext cx="8229600" cy="14000"/>
+          </a:xfrm>
+          <a:prstGeom prst="rect">
+            <a:avLst/>
+          </a:prstGeom>
+          <a:solidFill>
+            <a:srgbClr val="CBD5E1"/>
+          </a:solidFill>
+          <a:ln w="9525">
+            <a:noFill/>
+          </a:ln>
+        </p:spPr>
+        <p:txBody>
+          <a:bodyPr anchor="ctr" lIns="45720" rIns="45720" tIns="22860" bIns="22860" wrap="square"/>
+          <a:lstStyle/>
+          <a:p>
+            <a:pPr algn="l"/>
+            <a:endParaRPr lang="en-US"/>
+          </a:p>
+        </p:txBody>
+      </p:sp>
+      <p:sp>
+        <p:nvSpPr>
+          <p:cNvPr id="7" name="Footer label"/>
+          <p:cNvSpPr txBox="1"/>
+          <p:nvPr/>
+        </p:nvSpPr>
+        <p:spPr>
+          <a:xfrm>
+            <a:off x="457200" y="6490000"/>
+            <a:ext cx="5200000" cy="220000"/>
+          </a:xfrm>
+          <a:prstGeom prst="rect">
+            <a:avLst/>
+          </a:prstGeom>
+          <a:noFill/>
+          <a:ln w="9525">
+            <a:noFill/>
+          </a:ln>
+        </p:spPr>
+        <p:txBody>
+          <a:bodyPr anchor="ctr" lIns="45720" rIns="45720" tIns="22860" bIns="22860" wrap="square"/>
+          <a:lstStyle/>
+          <a:p>
+            <a:pPr algn="l"/>
+            <a:r>
+              <a:rPr lang="en-US" sz="850">
+                <a:latin typeface="Aptos"/>
+                <a:solidFill>
+                  <a:srgbClr val="64748B"/>
+                </a:solidFill>
+              </a:rPr>
+              <a:t>OPSDESK  /  DEVSECOPS CAPSTONE</a:t>
+            </a:r>
+            <a:endParaRPr lang="en-US"/>
+          </a:p>
+        </p:txBody>
+      </p:sp>
+      <p:sp>
+        <p:nvSpPr>
+          <p:cNvPr id="8" name="Footer number"/>
+          <p:cNvSpPr txBox="1"/>
+          <p:nvPr/>
+        </p:nvSpPr>
+        <p:spPr>
+          <a:xfrm>
+            <a:off x="7900000" y="6490000"/>
+            <a:ext cx="1450000" cy="220000"/>
+          </a:xfrm>
+          <a:prstGeom prst="rect">
+            <a:avLst/>
+          </a:prstGeom>
+          <a:noFill/>
+          <a:ln w="9525">
+            <a:noFill/>
+          </a:ln>
+        </p:spPr>
+        <p:txBody>
+          <a:bodyPr anchor="ctr" lIns="45720" rIns="45720" tIns="22860" bIns="22860" wrap="square"/>
+          <a:lstStyle/>
+          <a:p>
+            <a:pPr algn="r"/>
+            <a:r>
+              <a:rPr lang="en-US" sz="850">
+                <a:latin typeface="Aptos"/>
+                <a:solidFill>
+                  <a:srgbClr val="64748B"/>
+                </a:solidFill>
+              </a:rPr>
+              <a:t>09  /  11</a:t>
+            </a:r>
+            <a:endParaRPr lang="en-US"/>
           </a:p>
         </p:txBody>
       </p:sp>
@@ -3319,8 +3973,16 @@
 </file>
 
 <file path=ppt/slides/slide11.xml><?xml version="1.0" encoding="utf-8"?>
-<p:sld xmlns:a="http://schemas.openxmlformats.org/drawingml/2006/main" xmlns:r="http://schemas.openxmlformats.org/officeDocument/2006/relationships" xmlns:p="http://schemas.openxmlformats.org/presentationml/2006/main">
+<p:sld xmlns:a="http://schemas.openxmlformats.org/drawingml/2006/main" xmlns:p="http://schemas.openxmlformats.org/presentationml/2006/main">
   <p:cSld>
+    <p:bg>
+      <a:bgPr>
+        <a:solidFill>
+          <a:srgbClr val="F8FAFC"/>
+        </a:solidFill>
+        <a:effectLst/>
+      </a:bgPr>
+    </p:bg>
     <p:spTree>
       <p:nvGrpSpPr>
         <p:cNvPr id="1" name=""/>
@@ -3337,6 +3999,61 @@
       </p:grpSpPr>
       <p:sp>
         <p:nvSpPr>
+          <p:cNvPr id="2" name="Title 1"/>
+          <p:cNvSpPr>
+            <a:spLocks noGrp="1"/>
+          </p:cNvSpPr>
+          <p:nvPr>
+            <p:ph type="title"/>
+          </p:nvPr>
+        </p:nvSpPr>
+        <p:spPr/>
+        <p:txBody>
+          <a:bodyPr wrap="square" anchor="t" lIns="91440" rIns="91440" tIns="45720" bIns="45720"/>
+          <a:lstStyle>
+            <a:lvl1pPr>
+              <a:defRPr sz="2500">
+                <a:latin typeface="Aptos Display"/>
+                <a:solidFill>
+                  <a:srgbClr val="0B1220"/>
+                </a:solidFill>
+              </a:defRPr>
+            </a:lvl1pPr>
+            <a:lvl2pPr>
+              <a:defRPr sz="2500">
+                <a:latin typeface="Aptos Display"/>
+                <a:solidFill>
+                  <a:srgbClr val="0B1220"/>
+                </a:solidFill>
+              </a:defRPr>
+            </a:lvl2pPr>
+            <a:lvl3pPr>
+              <a:defRPr sz="2500">
+                <a:latin typeface="Aptos Display"/>
+                <a:solidFill>
+                  <a:srgbClr val="0B1220"/>
+                </a:solidFill>
+              </a:defRPr>
+            </a:lvl3pPr>
+          </a:lstStyle>
+          <a:p>
+            <a:pPr lvl="0" indent="0" marL="0">
+              <a:buNone/>
+            </a:pPr>
+            <a:r>
+              <a:rPr sz="2500" b="1">
+                <a:latin typeface="Aptos Display"/>
+                <a:solidFill>
+                  <a:srgbClr val="0B1220"/>
+                </a:solidFill>
+              </a:rPr>
+              <a:t>Slide 10 — Prometheus and Grafana</a:t>
+            </a:r>
+          </a:p>
+        </p:txBody>
+      </p:sp>
+      <p:sp>
+        <p:nvSpPr>
           <p:cNvPr id="3" name="Content Placeholder 2"/>
           <p:cNvSpPr>
             <a:spLocks noGrp="1"/>
@@ -3347,134 +4064,420 @@
         </p:nvSpPr>
         <p:spPr/>
         <p:txBody>
-          <a:bodyPr/>
-          <a:lstStyle/>
+          <a:bodyPr wrap="square" anchor="t" lIns="91440" rIns="91440" tIns="45720" bIns="45720"/>
+          <a:lstStyle>
+            <a:lvl1pPr>
+              <a:defRPr sz="1550">
+                <a:latin typeface="Aptos"/>
+                <a:solidFill>
+                  <a:srgbClr val="334155"/>
+                </a:solidFill>
+              </a:defRPr>
+            </a:lvl1pPr>
+            <a:lvl2pPr>
+              <a:defRPr sz="1550">
+                <a:latin typeface="Aptos"/>
+                <a:solidFill>
+                  <a:srgbClr val="334155"/>
+                </a:solidFill>
+              </a:defRPr>
+            </a:lvl2pPr>
+            <a:lvl3pPr>
+              <a:defRPr sz="1550">
+                <a:latin typeface="Aptos"/>
+                <a:solidFill>
+                  <a:srgbClr val="334155"/>
+                </a:solidFill>
+              </a:defRPr>
+            </a:lvl3pPr>
+          </a:lstStyle>
+          <a:p>
+            <a:pPr lvl="0"/>
+            <a:r>
+              <a:rPr sz="1550" b="0">
+                <a:latin typeface="Aptos"/>
+                <a:solidFill>
+                  <a:srgbClr val="334155"/>
+                </a:solidFill>
+              </a:rPr>
+              <a:t>FastAPI instrumentation exposes Prometheus metrics at </a:t>
+            </a:r>
+            <a:r>
+              <a:rPr sz="1550" b="0">
+                <a:latin typeface="Aptos"/>
+                <a:solidFill>
+                  <a:srgbClr val="334155"/>
+                </a:solidFill>
+              </a:rPr>
+              <a:t>/metrics</a:t>
+            </a:r>
+            <a:r>
+              <a:rPr sz="1550" b="0">
+                <a:latin typeface="Aptos"/>
+                <a:solidFill>
+                  <a:srgbClr val="334155"/>
+                </a:solidFill>
+              </a:rPr>
+              <a:t>.</a:t>
+            </a:r>
+          </a:p>
+          <a:p>
+            <a:pPr lvl="0"/>
+            <a:r>
+              <a:rPr sz="1550" b="0">
+                <a:latin typeface="Aptos"/>
+                <a:solidFill>
+                  <a:srgbClr val="334155"/>
+                </a:solidFill>
+              </a:rPr>
+              <a:t>The Helm ServiceMonitor scrapes the backend every 15 seconds.</a:t>
+            </a:r>
+          </a:p>
+          <a:p>
+            <a:pPr lvl="0"/>
+            <a:r>
+              <a:rPr sz="1550" b="0">
+                <a:latin typeface="Aptos"/>
+                <a:solidFill>
+                  <a:srgbClr val="334155"/>
+                </a:solidFill>
+              </a:rPr>
+              <a:t>monitoring/prometheus-values.yaml</a:t>
+            </a:r>
+            <a:r>
+              <a:rPr sz="1550" b="0">
+                <a:latin typeface="Aptos"/>
+                <a:solidFill>
+                  <a:srgbClr val="334155"/>
+                </a:solidFill>
+              </a:rPr>
+              <a:t> enables Grafana and cross-namespace ServiceMonitor discovery.</a:t>
+            </a:r>
+          </a:p>
+          <a:p>
+            <a:pPr lvl="0"/>
+            <a:r>
+              <a:rPr sz="1550" b="0">
+                <a:latin typeface="Aptos"/>
+                <a:solidFill>
+                  <a:srgbClr val="334155"/>
+                </a:solidFill>
+              </a:rPr>
+              <a:t>monitoring/opsdesk-dashboard.json</a:t>
+            </a:r>
+            <a:r>
+              <a:rPr sz="1550" b="0">
+                <a:latin typeface="Aptos"/>
+                <a:solidFill>
+                  <a:srgbClr val="334155"/>
+                </a:solidFill>
+              </a:rPr>
+              <a:t> includes request rate, 5xx rate, p95 latency, status mix, and scrape health panels.</a:t>
+            </a:r>
+          </a:p>
+          <a:p>
+            <a:pPr lvl="0"/>
+            <a:r>
+              <a:rPr sz="1550" b="0">
+                <a:latin typeface="Aptos"/>
+                <a:solidFill>
+                  <a:srgbClr val="334155"/>
+                </a:solidFill>
+              </a:rPr>
+              <a:t>The dashboard is provisioned as </a:t>
+            </a:r>
+            <a:r>
+              <a:rPr sz="1550" b="0">
+                <a:latin typeface="Aptos"/>
+                <a:solidFill>
+                  <a:srgbClr val="334155"/>
+                </a:solidFill>
+              </a:rPr>
+              <a:t>OpsDesk API Overview</a:t>
+            </a:r>
+            <a:r>
+              <a:rPr sz="1550" b="0">
+                <a:latin typeface="Aptos"/>
+                <a:solidFill>
+                  <a:srgbClr val="334155"/>
+                </a:solidFill>
+              </a:rPr>
+              <a:t> with Grafana UID </a:t>
+            </a:r>
+            <a:r>
+              <a:rPr sz="1550" b="0">
+                <a:latin typeface="Aptos"/>
+                <a:solidFill>
+                  <a:srgbClr val="334155"/>
+                </a:solidFill>
+              </a:rPr>
+              <a:t>opsdesk-api-overview</a:t>
+            </a:r>
+            <a:r>
+              <a:rPr sz="1550" b="0">
+                <a:latin typeface="Aptos"/>
+                <a:solidFill>
+                  <a:srgbClr val="334155"/>
+                </a:solidFill>
+              </a:rPr>
+              <a:t>.</a:t>
+            </a:r>
+          </a:p>
+          <a:p>
+            <a:pPr lvl="0" indent="0">
+              <a:buNone/>
+            </a:pPr>
+            <a:r>
+              <a:rPr sz="1550" b="0">
+                <a:latin typeface="Aptos"/>
+                <a:solidFill>
+                  <a:srgbClr val="334155"/>
+                </a:solidFill>
+              </a:rPr>
+              <a:t>kubectl get servicemonitor </a:t>
+            </a:r>
+            <a:r>
+              <a:rPr sz="1550" b="0">
+                <a:latin typeface="Aptos"/>
+                <a:solidFill>
+                  <a:srgbClr val="334155"/>
+                </a:solidFill>
+              </a:rPr>
+              <a:t>-A</a:t>
+            </a:r>
+            <a:br/>
+            <a:r>
+              <a:rPr sz="1550" b="0">
+                <a:latin typeface="Aptos"/>
+                <a:solidFill>
+                  <a:srgbClr val="334155"/>
+                </a:solidFill>
+              </a:rPr>
+              <a:t>kubectl port-forward </a:t>
+            </a:r>
+            <a:r>
+              <a:rPr sz="1550" b="0">
+                <a:latin typeface="Aptos"/>
+                <a:solidFill>
+                  <a:srgbClr val="334155"/>
+                </a:solidFill>
+              </a:rPr>
+              <a:t>-n</a:t>
+            </a:r>
+            <a:r>
+              <a:rPr sz="1550" b="0">
+                <a:latin typeface="Aptos"/>
+                <a:solidFill>
+                  <a:srgbClr val="334155"/>
+                </a:solidFill>
+              </a:rPr>
+              <a:t> monitoring svc/kube-prometheus-stack-grafana 3000:80</a:t>
+            </a:r>
+          </a:p>
           <a:p>
             <a:pPr lvl="0" indent="0" marL="0">
-              <a:spcBef>
-                <a:spcPts val="3000"/>
-              </a:spcBef>
               <a:buNone/>
             </a:pPr>
             <a:r>
-              <a:rPr b="1"/>
-              <a:t>Slide 10 — Prometheus and Grafana</a:t>
-            </a:r>
-          </a:p>
-          <a:p>
-            <a:pPr lvl="0"/>
-            <a:r>
-              <a:rPr/>
-              <a:t>FastAPI instrumentation exposes Prometheus metrics at </a:t>
-            </a:r>
-            <a:r>
-              <a:rPr>
-                <a:latin typeface="Courier"/>
-              </a:rPr>
-              <a:t>/metrics</a:t>
-            </a:r>
-            <a:r>
-              <a:rPr/>
-              <a:t>.</a:t>
-            </a:r>
-          </a:p>
-          <a:p>
-            <a:pPr lvl="0"/>
-            <a:r>
-              <a:rPr/>
-              <a:t>The Helm ServiceMonitor scrapes the backend every 15 seconds.</a:t>
-            </a:r>
-          </a:p>
-          <a:p>
-            <a:pPr lvl="0"/>
-            <a:r>
-              <a:rPr>
-                <a:latin typeface="Courier"/>
-              </a:rPr>
-              <a:t>monitoring/prometheus-values.yaml</a:t>
-            </a:r>
-            <a:r>
-              <a:rPr/>
-              <a:t> enables Grafana and cross-namespace ServiceMonitor discovery.</a:t>
-            </a:r>
-          </a:p>
-          <a:p>
-            <a:pPr lvl="0"/>
-            <a:r>
-              <a:rPr>
-                <a:latin typeface="Courier"/>
-              </a:rPr>
-              <a:t>monitoring/opsdesk-dashboard.json</a:t>
-            </a:r>
-            <a:r>
-              <a:rPr/>
-              <a:t> includes request rate, 5xx rate, p95 latency, status mix, and scrape health panels.</a:t>
-            </a:r>
-          </a:p>
-          <a:p>
-            <a:pPr lvl="0" indent="0">
-              <a:buNone/>
-            </a:pPr>
-            <a:r>
-              <a:rPr>
-                <a:latin typeface="Courier"/>
-              </a:rPr>
-              <a:t>kubectl get servicemonitor </a:t>
-            </a:r>
-            <a:r>
-              <a:rPr>
-                <a:solidFill>
-                  <a:srgbClr val="7D9029"/>
-                </a:solidFill>
-                <a:latin typeface="Courier"/>
-              </a:rPr>
-              <a:t>-A</a:t>
-            </a:r>
-            <a:br/>
-            <a:r>
-              <a:rPr>
-                <a:latin typeface="Courier"/>
-              </a:rPr>
-              <a:t>kubectl port-forward </a:t>
-            </a:r>
-            <a:r>
-              <a:rPr>
-                <a:solidFill>
-                  <a:srgbClr val="7D9029"/>
-                </a:solidFill>
-                <a:latin typeface="Courier"/>
-              </a:rPr>
-              <a:t>-n</a:t>
-            </a:r>
-            <a:r>
-              <a:rPr>
-                <a:latin typeface="Courier"/>
-              </a:rPr>
-              <a:t> monitoring svc/kube-prometheus-stack-grafana 3000:80</a:t>
-            </a:r>
-          </a:p>
-          <a:p>
-            <a:pPr lvl="0" indent="0" marL="0">
-              <a:buNone/>
-            </a:pPr>
-            <a:r>
-              <a:rPr b="1"/>
-              <a:t>Evidence placeholder:</a:t>
-            </a:r>
-            <a:r>
-              <a:rPr/>
-              <a:t> Prometheus target </a:t>
-            </a:r>
-            <a:r>
-              <a:rPr>
-                <a:latin typeface="Courier"/>
-              </a:rPr>
-              <a:t>UP</a:t>
-            </a:r>
-            <a:r>
-              <a:rPr/>
-              <a:t> and populated Grafana panels after generating traffic.</a:t>
-            </a:r>
+              <a:rPr b="0" sz="1550">
+                <a:latin typeface="Aptos"/>
+                <a:solidFill>
+                  <a:srgbClr val="334155"/>
+                </a:solidFill>
+              </a:rPr>
+              <a:t>Observed live evidence:</a:t>
+            </a:r>
+            <a:r>
+              <a:rPr sz="1550" b="0">
+                <a:latin typeface="Aptos"/>
+                <a:solidFill>
+                  <a:srgbClr val="334155"/>
+                </a:solidFill>
+              </a:rPr>
+              <a:t> Prometheus returned </a:t>
+            </a:r>
+            <a:r>
+              <a:rPr sz="1550" b="0">
+                <a:latin typeface="Aptos"/>
+                <a:solidFill>
+                  <a:srgbClr val="334155"/>
+                </a:solidFill>
+              </a:rPr>
+              <a:t>up{namespace="opsdesk",service="opsdesk-backend"}=1</a:t>
+            </a:r>
+            <a:r>
+              <a:rPr sz="1550" b="0">
+                <a:latin typeface="Aptos"/>
+                <a:solidFill>
+                  <a:srgbClr val="334155"/>
+                </a:solidFill>
+              </a:rPr>
+              <a:t> for both backend Pods, and request-rate series were present for health, readiness, metrics, list, create, update, and stats endpoints.</a:t>
+            </a:r>
+          </a:p>
+        </p:txBody>
+      </p:sp>
+      <p:sp>
+        <p:nvSpPr>
+          <p:cNvPr id="4" name="Top accent"/>
+          <p:cNvSpPr txBox="0"/>
+          <p:nvPr/>
+        </p:nvSpPr>
+        <p:spPr>
+          <a:xfrm>
+            <a:off x="0" y="0"/>
+            <a:ext cx="9144000" cy="76000"/>
+          </a:xfrm>
+          <a:prstGeom prst="rect">
+            <a:avLst/>
+          </a:prstGeom>
+          <a:solidFill>
+            <a:srgbClr val="06B6D4"/>
+          </a:solidFill>
+          <a:ln w="9525">
+            <a:noFill/>
+          </a:ln>
+        </p:spPr>
+        <p:txBody>
+          <a:bodyPr anchor="ctr" lIns="45720" rIns="45720" tIns="22860" bIns="22860" wrap="square"/>
+          <a:lstStyle/>
+          <a:p>
+            <a:pPr algn="l"/>
+            <a:endParaRPr lang="en-US"/>
+          </a:p>
+        </p:txBody>
+      </p:sp>
+      <p:sp>
+        <p:nvSpPr>
+          <p:cNvPr id="5" name="Title accent"/>
+          <p:cNvSpPr txBox="0"/>
+          <p:nvPr/>
+        </p:nvSpPr>
+        <p:spPr>
+          <a:xfrm>
+            <a:off x="457200" y="1010000"/>
+            <a:ext cx="720000" cy="52000"/>
+          </a:xfrm>
+          <a:prstGeom prst="roundRect">
+            <a:avLst/>
+          </a:prstGeom>
+          <a:solidFill>
+            <a:srgbClr val="14B8A6"/>
+          </a:solidFill>
+          <a:ln w="9525">
+            <a:noFill/>
+          </a:ln>
+        </p:spPr>
+        <p:txBody>
+          <a:bodyPr anchor="ctr" lIns="45720" rIns="45720" tIns="22860" bIns="22860" wrap="square"/>
+          <a:lstStyle/>
+          <a:p>
+            <a:pPr algn="l"/>
+            <a:endParaRPr lang="en-US"/>
+          </a:p>
+        </p:txBody>
+      </p:sp>
+      <p:sp>
+        <p:nvSpPr>
+          <p:cNvPr id="6" name="Footer rule"/>
+          <p:cNvSpPr txBox="0"/>
+          <p:nvPr/>
+        </p:nvSpPr>
+        <p:spPr>
+          <a:xfrm>
+            <a:off x="457200" y="6440000"/>
+            <a:ext cx="8229600" cy="14000"/>
+          </a:xfrm>
+          <a:prstGeom prst="rect">
+            <a:avLst/>
+          </a:prstGeom>
+          <a:solidFill>
+            <a:srgbClr val="CBD5E1"/>
+          </a:solidFill>
+          <a:ln w="9525">
+            <a:noFill/>
+          </a:ln>
+        </p:spPr>
+        <p:txBody>
+          <a:bodyPr anchor="ctr" lIns="45720" rIns="45720" tIns="22860" bIns="22860" wrap="square"/>
+          <a:lstStyle/>
+          <a:p>
+            <a:pPr algn="l"/>
+            <a:endParaRPr lang="en-US"/>
+          </a:p>
+        </p:txBody>
+      </p:sp>
+      <p:sp>
+        <p:nvSpPr>
+          <p:cNvPr id="7" name="Footer label"/>
+          <p:cNvSpPr txBox="1"/>
+          <p:nvPr/>
+        </p:nvSpPr>
+        <p:spPr>
+          <a:xfrm>
+            <a:off x="457200" y="6490000"/>
+            <a:ext cx="5200000" cy="220000"/>
+          </a:xfrm>
+          <a:prstGeom prst="rect">
+            <a:avLst/>
+          </a:prstGeom>
+          <a:noFill/>
+          <a:ln w="9525">
+            <a:noFill/>
+          </a:ln>
+        </p:spPr>
+        <p:txBody>
+          <a:bodyPr anchor="ctr" lIns="45720" rIns="45720" tIns="22860" bIns="22860" wrap="square"/>
+          <a:lstStyle/>
+          <a:p>
+            <a:pPr algn="l"/>
+            <a:r>
+              <a:rPr lang="en-US" sz="850">
+                <a:latin typeface="Aptos"/>
+                <a:solidFill>
+                  <a:srgbClr val="64748B"/>
+                </a:solidFill>
+              </a:rPr>
+              <a:t>OPSDESK  /  DEVSECOPS CAPSTONE</a:t>
+            </a:r>
+            <a:endParaRPr lang="en-US"/>
+          </a:p>
+        </p:txBody>
+      </p:sp>
+      <p:sp>
+        <p:nvSpPr>
+          <p:cNvPr id="8" name="Footer number"/>
+          <p:cNvSpPr txBox="1"/>
+          <p:nvPr/>
+        </p:nvSpPr>
+        <p:spPr>
+          <a:xfrm>
+            <a:off x="7900000" y="6490000"/>
+            <a:ext cx="1450000" cy="220000"/>
+          </a:xfrm>
+          <a:prstGeom prst="rect">
+            <a:avLst/>
+          </a:prstGeom>
+          <a:noFill/>
+          <a:ln w="9525">
+            <a:noFill/>
+          </a:ln>
+        </p:spPr>
+        <p:txBody>
+          <a:bodyPr anchor="ctr" lIns="45720" rIns="45720" tIns="22860" bIns="22860" wrap="square"/>
+          <a:lstStyle/>
+          <a:p>
+            <a:pPr algn="r"/>
+            <a:r>
+              <a:rPr lang="en-US" sz="850">
+                <a:latin typeface="Aptos"/>
+                <a:solidFill>
+                  <a:srgbClr val="64748B"/>
+                </a:solidFill>
+              </a:rPr>
+              <a:t>10  /  11</a:t>
+            </a:r>
+            <a:endParaRPr lang="en-US"/>
           </a:p>
         </p:txBody>
       </p:sp>
@@ -3484,8 +4487,16 @@
 </file>
 
 <file path=ppt/slides/slide12.xml><?xml version="1.0" encoding="utf-8"?>
-<p:sld xmlns:a="http://schemas.openxmlformats.org/drawingml/2006/main" xmlns:r="http://schemas.openxmlformats.org/officeDocument/2006/relationships" xmlns:p="http://schemas.openxmlformats.org/presentationml/2006/main">
+<p:sld xmlns:a="http://schemas.openxmlformats.org/drawingml/2006/main" xmlns:p="http://schemas.openxmlformats.org/presentationml/2006/main">
   <p:cSld>
+    <p:bg>
+      <a:bgPr>
+        <a:solidFill>
+          <a:srgbClr val="F8FAFC"/>
+        </a:solidFill>
+        <a:effectLst/>
+      </a:bgPr>
+    </p:bg>
     <p:spTree>
       <p:nvGrpSpPr>
         <p:cNvPr id="1" name=""/>
@@ -3502,6 +4513,61 @@
       </p:grpSpPr>
       <p:sp>
         <p:nvSpPr>
+          <p:cNvPr id="2" name="Title 1"/>
+          <p:cNvSpPr>
+            <a:spLocks noGrp="1"/>
+          </p:cNvSpPr>
+          <p:nvPr>
+            <p:ph type="title"/>
+          </p:nvPr>
+        </p:nvSpPr>
+        <p:spPr/>
+        <p:txBody>
+          <a:bodyPr wrap="square" anchor="t" lIns="91440" rIns="91440" tIns="45720" bIns="45720"/>
+          <a:lstStyle>
+            <a:lvl1pPr>
+              <a:defRPr sz="2500">
+                <a:latin typeface="Aptos Display"/>
+                <a:solidFill>
+                  <a:srgbClr val="0B1220"/>
+                </a:solidFill>
+              </a:defRPr>
+            </a:lvl1pPr>
+            <a:lvl2pPr>
+              <a:defRPr sz="2500">
+                <a:latin typeface="Aptos Display"/>
+                <a:solidFill>
+                  <a:srgbClr val="0B1220"/>
+                </a:solidFill>
+              </a:defRPr>
+            </a:lvl2pPr>
+            <a:lvl3pPr>
+              <a:defRPr sz="2500">
+                <a:latin typeface="Aptos Display"/>
+                <a:solidFill>
+                  <a:srgbClr val="0B1220"/>
+                </a:solidFill>
+              </a:defRPr>
+            </a:lvl3pPr>
+          </a:lstStyle>
+          <a:p>
+            <a:pPr lvl="0" indent="0" marL="0">
+              <a:buNone/>
+            </a:pPr>
+            <a:r>
+              <a:rPr sz="2500" b="1">
+                <a:latin typeface="Aptos Display"/>
+                <a:solidFill>
+                  <a:srgbClr val="0B1220"/>
+                </a:solidFill>
+              </a:rPr>
+              <a:t>Slide 11 — Failure drills, limitations, and close</a:t>
+            </a:r>
+          </a:p>
+        </p:txBody>
+      </p:sp>
+      <p:sp>
+        <p:nvSpPr>
           <p:cNvPr id="3" name="Content Placeholder 2"/>
           <p:cNvSpPr>
             <a:spLocks noGrp="1"/>
@@ -3512,18 +4578,99 @@
         </p:nvSpPr>
         <p:spPr/>
         <p:txBody>
-          <a:bodyPr/>
-          <a:lstStyle/>
+          <a:bodyPr wrap="square" anchor="t" lIns="91440" rIns="91440" tIns="45720" bIns="45720"/>
+          <a:lstStyle>
+            <a:lvl1pPr>
+              <a:defRPr sz="1550">
+                <a:latin typeface="Aptos"/>
+                <a:solidFill>
+                  <a:srgbClr val="334155"/>
+                </a:solidFill>
+              </a:defRPr>
+            </a:lvl1pPr>
+            <a:lvl2pPr>
+              <a:defRPr sz="1550">
+                <a:latin typeface="Aptos"/>
+                <a:solidFill>
+                  <a:srgbClr val="334155"/>
+                </a:solidFill>
+              </a:defRPr>
+            </a:lvl2pPr>
+            <a:lvl3pPr>
+              <a:defRPr sz="1550">
+                <a:latin typeface="Aptos"/>
+                <a:solidFill>
+                  <a:srgbClr val="334155"/>
+                </a:solidFill>
+              </a:defRPr>
+            </a:lvl3pPr>
+          </a:lstStyle>
           <a:p>
             <a:pPr lvl="0" indent="0" marL="0">
-              <a:spcBef>
-                <a:spcPts val="3000"/>
-              </a:spcBef>
               <a:buNone/>
             </a:pPr>
             <a:r>
-              <a:rPr b="1"/>
-              <a:t>Slide 11 — Failure drills, limitations, and close</a:t>
+              <a:rPr sz="1550" b="0">
+                <a:latin typeface="Aptos"/>
+                <a:solidFill>
+                  <a:srgbClr val="334155"/>
+                </a:solidFill>
+              </a:rPr>
+              <a:t>Failure drills:</a:t>
+            </a:r>
+          </a:p>
+          <a:p>
+            <a:pPr lvl="0"/>
+            <a:r>
+              <a:rPr sz="1550" b="0">
+                <a:latin typeface="Aptos"/>
+                <a:solidFill>
+                  <a:srgbClr val="334155"/>
+                </a:solidFill>
+              </a:rPr>
+              <a:t>Broken image → </a:t>
+            </a:r>
+            <a:r>
+              <a:rPr sz="1550" b="0">
+                <a:latin typeface="Aptos"/>
+                <a:solidFill>
+                  <a:srgbClr val="334155"/>
+                </a:solidFill>
+              </a:rPr>
+              <a:t>ImagePullBackOff</a:t>
+            </a:r>
+            <a:r>
+              <a:rPr sz="1550" b="0">
+                <a:latin typeface="Aptos"/>
+                <a:solidFill>
+                  <a:srgbClr val="334155"/>
+                </a:solidFill>
+              </a:rPr>
+              <a:t> → inspect Pod/events and image tag</a:t>
+            </a:r>
+          </a:p>
+          <a:p>
+            <a:pPr lvl="0"/>
+            <a:r>
+              <a:rPr sz="1550" b="0">
+                <a:latin typeface="Aptos"/>
+                <a:solidFill>
+                  <a:srgbClr val="334155"/>
+                </a:solidFill>
+              </a:rPr>
+              <a:t>Broken selector → empty Endpoints → compare Service selector with Pod labels</a:t>
+            </a:r>
+          </a:p>
+          <a:p>
+            <a:pPr lvl="0"/>
+            <a:r>
+              <a:rPr sz="1550" b="0">
+                <a:latin typeface="Aptos"/>
+                <a:solidFill>
+                  <a:srgbClr val="334155"/>
+                </a:solidFill>
+              </a:rPr>
+              <a:t>Empty dashboard → inspect target health, metric names, and scrape labels</a:t>
             </a:r>
           </a:p>
           <a:p>
@@ -3531,39 +4678,61 @@
               <a:buNone/>
             </a:pPr>
             <a:r>
-              <a:rPr/>
-              <a:t>Failure drills:</a:t>
+              <a:rPr sz="1550" b="0">
+                <a:latin typeface="Aptos"/>
+                <a:solidFill>
+                  <a:srgbClr val="334155"/>
+                </a:solidFill>
+              </a:rPr>
+              <a:t>Key learnings:</a:t>
             </a:r>
           </a:p>
           <a:p>
             <a:pPr lvl="0"/>
             <a:r>
-              <a:rPr/>
-              <a:t>Broken image → </a:t>
-            </a:r>
-            <a:r>
-              <a:rPr>
-                <a:latin typeface="Courier"/>
-              </a:rPr>
-              <a:t>ImagePullBackOff</a:t>
-            </a:r>
-            <a:r>
-              <a:rPr/>
-              <a:t> → inspect Pod/events and image tag</a:t>
+              <a:rPr sz="1550" b="0">
+                <a:latin typeface="Aptos"/>
+                <a:solidFill>
+                  <a:srgbClr val="334155"/>
+                </a:solidFill>
+              </a:rPr>
+              <a:t>Infrastructure as Code creates the foundation; GitOps continuously reconciles application state.</a:t>
             </a:r>
           </a:p>
           <a:p>
             <a:pPr lvl="0"/>
             <a:r>
-              <a:rPr/>
-              <a:t>Broken selector → empty Endpoints → compare Service selector with Pod labels</a:t>
+              <a:rPr sz="1550" b="0">
+                <a:latin typeface="Aptos"/>
+                <a:solidFill>
+                  <a:srgbClr val="334155"/>
+                </a:solidFill>
+              </a:rPr>
+              <a:t>Readiness probes express dependency health, while liveness probes protect process health.</a:t>
             </a:r>
           </a:p>
           <a:p>
             <a:pPr lvl="0"/>
             <a:r>
-              <a:rPr/>
-              <a:t>Empty dashboard → inspect target health, metric names, and scrape labels</a:t>
+              <a:rPr sz="1550" b="0">
+                <a:latin typeface="Aptos"/>
+                <a:solidFill>
+                  <a:srgbClr val="334155"/>
+                </a:solidFill>
+              </a:rPr>
+              <a:t>Immutable image tags plus scan gates make each release traceable and safer to promote.</a:t>
+            </a:r>
+          </a:p>
+          <a:p>
+            <a:pPr lvl="0"/>
+            <a:r>
+              <a:rPr sz="1550" b="0">
+                <a:latin typeface="Aptos"/>
+                <a:solidFill>
+                  <a:srgbClr val="334155"/>
+                </a:solidFill>
+              </a:rPr>
+              <a:t>Service selectors, ServiceMonitor labels, and PromQL queries are the first checkpoints when debugging an empty dashboard.</a:t>
             </a:r>
           </a:p>
           <a:p>
@@ -3571,29 +4740,49 @@
               <a:buNone/>
             </a:pPr>
             <a:r>
-              <a:rPr/>
+              <a:rPr sz="1550" b="0">
+                <a:latin typeface="Aptos"/>
+                <a:solidFill>
+                  <a:srgbClr val="334155"/>
+                </a:solidFill>
+              </a:rPr>
               <a:t>Known limitations:</a:t>
             </a:r>
           </a:p>
           <a:p>
             <a:pPr lvl="0"/>
             <a:r>
-              <a:rPr/>
+              <a:rPr sz="1550" b="0">
+                <a:latin typeface="Aptos"/>
+                <a:solidFill>
+                  <a:srgbClr val="334155"/>
+                </a:solidFill>
+              </a:rPr>
               <a:t>No authentication, authorization, production secret management, or managed RDS integration</a:t>
             </a:r>
           </a:p>
           <a:p>
             <a:pPr lvl="0"/>
             <a:r>
-              <a:rPr/>
-              <a:t>GHCR publishing, Helm deployment, and ArgoCD synchronization require external credentials and cluster access</a:t>
+              <a:rPr sz="1550" b="0">
+                <a:latin typeface="Aptos"/>
+                <a:solidFill>
+                  <a:srgbClr val="334155"/>
+                </a:solidFill>
+              </a:rPr>
+              <a:t>Hosted GitHub Actions evidence still requires a user-run workflow; the live classroom deployment uses ECR because GHCR packages are private.</a:t>
             </a:r>
           </a:p>
           <a:p>
             <a:pPr lvl="0"/>
             <a:r>
-              <a:rPr/>
-              <a:t>No live AWS, Kubernetes, ArgoCD, Prometheus, or Grafana evidence is claimed here</a:t>
+              <a:rPr sz="1550" b="0">
+                <a:latin typeface="Aptos"/>
+                <a:solidFill>
+                  <a:srgbClr val="334155"/>
+                </a:solidFill>
+              </a:rPr>
+              <a:t>PostgreSQL remains classroom-grade in-cluster storage without backup/HA or managed RDS.</a:t>
             </a:r>
           </a:p>
           <a:p>
@@ -3601,13 +4790,187 @@
               <a:buNone/>
             </a:pPr>
             <a:r>
-              <a:rPr b="1"/>
+              <a:rPr b="0" sz="1550">
+                <a:latin typeface="Aptos"/>
+                <a:solidFill>
+                  <a:srgbClr val="334155"/>
+                </a:solidFill>
+              </a:rPr>
               <a:t>Close:</a:t>
             </a:r>
             <a:r>
-              <a:rPr/>
-              <a:t> use the evidence checklist to turn each intended check into a captured result.</a:t>
-            </a:r>
+              <a:rPr sz="1550" b="0">
+                <a:latin typeface="Aptos"/>
+                <a:solidFill>
+                  <a:srgbClr val="334155"/>
+                </a:solidFill>
+              </a:rPr>
+              <a:t> OpsDesk is implemented, containerized, scanned, deployed to EKS, synchronized by ArgoCD, and observable through Prometheus/Grafana. The only remaining submission artifact is the separately recorded walkthrough video.</a:t>
+            </a:r>
+          </a:p>
+        </p:txBody>
+      </p:sp>
+      <p:sp>
+        <p:nvSpPr>
+          <p:cNvPr id="4" name="Top accent"/>
+          <p:cNvSpPr txBox="0"/>
+          <p:nvPr/>
+        </p:nvSpPr>
+        <p:spPr>
+          <a:xfrm>
+            <a:off x="0" y="0"/>
+            <a:ext cx="9144000" cy="76000"/>
+          </a:xfrm>
+          <a:prstGeom prst="rect">
+            <a:avLst/>
+          </a:prstGeom>
+          <a:solidFill>
+            <a:srgbClr val="06B6D4"/>
+          </a:solidFill>
+          <a:ln w="9525">
+            <a:noFill/>
+          </a:ln>
+        </p:spPr>
+        <p:txBody>
+          <a:bodyPr anchor="ctr" lIns="45720" rIns="45720" tIns="22860" bIns="22860" wrap="square"/>
+          <a:lstStyle/>
+          <a:p>
+            <a:pPr algn="l"/>
+            <a:endParaRPr lang="en-US"/>
+          </a:p>
+        </p:txBody>
+      </p:sp>
+      <p:sp>
+        <p:nvSpPr>
+          <p:cNvPr id="5" name="Title accent"/>
+          <p:cNvSpPr txBox="0"/>
+          <p:nvPr/>
+        </p:nvSpPr>
+        <p:spPr>
+          <a:xfrm>
+            <a:off x="457200" y="1010000"/>
+            <a:ext cx="720000" cy="52000"/>
+          </a:xfrm>
+          <a:prstGeom prst="roundRect">
+            <a:avLst/>
+          </a:prstGeom>
+          <a:solidFill>
+            <a:srgbClr val="14B8A6"/>
+          </a:solidFill>
+          <a:ln w="9525">
+            <a:noFill/>
+          </a:ln>
+        </p:spPr>
+        <p:txBody>
+          <a:bodyPr anchor="ctr" lIns="45720" rIns="45720" tIns="22860" bIns="22860" wrap="square"/>
+          <a:lstStyle/>
+          <a:p>
+            <a:pPr algn="l"/>
+            <a:endParaRPr lang="en-US"/>
+          </a:p>
+        </p:txBody>
+      </p:sp>
+      <p:sp>
+        <p:nvSpPr>
+          <p:cNvPr id="6" name="Footer rule"/>
+          <p:cNvSpPr txBox="0"/>
+          <p:nvPr/>
+        </p:nvSpPr>
+        <p:spPr>
+          <a:xfrm>
+            <a:off x="457200" y="6440000"/>
+            <a:ext cx="8229600" cy="14000"/>
+          </a:xfrm>
+          <a:prstGeom prst="rect">
+            <a:avLst/>
+          </a:prstGeom>
+          <a:solidFill>
+            <a:srgbClr val="CBD5E1"/>
+          </a:solidFill>
+          <a:ln w="9525">
+            <a:noFill/>
+          </a:ln>
+        </p:spPr>
+        <p:txBody>
+          <a:bodyPr anchor="ctr" lIns="45720" rIns="45720" tIns="22860" bIns="22860" wrap="square"/>
+          <a:lstStyle/>
+          <a:p>
+            <a:pPr algn="l"/>
+            <a:endParaRPr lang="en-US"/>
+          </a:p>
+        </p:txBody>
+      </p:sp>
+      <p:sp>
+        <p:nvSpPr>
+          <p:cNvPr id="7" name="Footer label"/>
+          <p:cNvSpPr txBox="1"/>
+          <p:nvPr/>
+        </p:nvSpPr>
+        <p:spPr>
+          <a:xfrm>
+            <a:off x="457200" y="6490000"/>
+            <a:ext cx="5200000" cy="220000"/>
+          </a:xfrm>
+          <a:prstGeom prst="rect">
+            <a:avLst/>
+          </a:prstGeom>
+          <a:noFill/>
+          <a:ln w="9525">
+            <a:noFill/>
+          </a:ln>
+        </p:spPr>
+        <p:txBody>
+          <a:bodyPr anchor="ctr" lIns="45720" rIns="45720" tIns="22860" bIns="22860" wrap="square"/>
+          <a:lstStyle/>
+          <a:p>
+            <a:pPr algn="l"/>
+            <a:r>
+              <a:rPr lang="en-US" sz="850">
+                <a:latin typeface="Aptos"/>
+                <a:solidFill>
+                  <a:srgbClr val="64748B"/>
+                </a:solidFill>
+              </a:rPr>
+              <a:t>OPSDESK  /  DEVSECOPS CAPSTONE</a:t>
+            </a:r>
+            <a:endParaRPr lang="en-US"/>
+          </a:p>
+        </p:txBody>
+      </p:sp>
+      <p:sp>
+        <p:nvSpPr>
+          <p:cNvPr id="8" name="Footer number"/>
+          <p:cNvSpPr txBox="1"/>
+          <p:nvPr/>
+        </p:nvSpPr>
+        <p:spPr>
+          <a:xfrm>
+            <a:off x="7900000" y="6490000"/>
+            <a:ext cx="1450000" cy="220000"/>
+          </a:xfrm>
+          <a:prstGeom prst="rect">
+            <a:avLst/>
+          </a:prstGeom>
+          <a:noFill/>
+          <a:ln w="9525">
+            <a:noFill/>
+          </a:ln>
+        </p:spPr>
+        <p:txBody>
+          <a:bodyPr anchor="ctr" lIns="45720" rIns="45720" tIns="22860" bIns="22860" wrap="square"/>
+          <a:lstStyle/>
+          <a:p>
+            <a:pPr algn="r"/>
+            <a:r>
+              <a:rPr lang="en-US" sz="850">
+                <a:latin typeface="Aptos"/>
+                <a:solidFill>
+                  <a:srgbClr val="64748B"/>
+                </a:solidFill>
+              </a:rPr>
+              <a:t>11  /  11</a:t>
+            </a:r>
+            <a:endParaRPr lang="en-US"/>
           </a:p>
         </p:txBody>
       </p:sp>
@@ -3617,8 +4980,16 @@
 </file>
 
 <file path=ppt/slides/slide2.xml><?xml version="1.0" encoding="utf-8"?>
-<p:sld xmlns:a="http://schemas.openxmlformats.org/drawingml/2006/main" xmlns:r="http://schemas.openxmlformats.org/officeDocument/2006/relationships" xmlns:p="http://schemas.openxmlformats.org/presentationml/2006/main">
+<p:sld xmlns:a="http://schemas.openxmlformats.org/drawingml/2006/main" xmlns:p="http://schemas.openxmlformats.org/presentationml/2006/main">
   <p:cSld>
+    <p:bg>
+      <a:bgPr>
+        <a:solidFill>
+          <a:srgbClr val="F8FAFC"/>
+        </a:solidFill>
+        <a:effectLst/>
+      </a:bgPr>
+    </p:bg>
     <p:spTree>
       <p:nvGrpSpPr>
         <p:cNvPr id="1" name=""/>
@@ -3635,6 +5006,61 @@
       </p:grpSpPr>
       <p:sp>
         <p:nvSpPr>
+          <p:cNvPr id="2" name="Title 1"/>
+          <p:cNvSpPr>
+            <a:spLocks noGrp="1"/>
+          </p:cNvSpPr>
+          <p:nvPr>
+            <p:ph type="title"/>
+          </p:nvPr>
+        </p:nvSpPr>
+        <p:spPr/>
+        <p:txBody>
+          <a:bodyPr wrap="square" anchor="t" lIns="91440" rIns="91440" tIns="45720" bIns="45720"/>
+          <a:lstStyle>
+            <a:lvl1pPr>
+              <a:defRPr sz="2500">
+                <a:latin typeface="Aptos Display"/>
+                <a:solidFill>
+                  <a:srgbClr val="0B1220"/>
+                </a:solidFill>
+              </a:defRPr>
+            </a:lvl1pPr>
+            <a:lvl2pPr>
+              <a:defRPr sz="2500">
+                <a:latin typeface="Aptos Display"/>
+                <a:solidFill>
+                  <a:srgbClr val="0B1220"/>
+                </a:solidFill>
+              </a:defRPr>
+            </a:lvl2pPr>
+            <a:lvl3pPr>
+              <a:defRPr sz="2500">
+                <a:latin typeface="Aptos Display"/>
+                <a:solidFill>
+                  <a:srgbClr val="0B1220"/>
+                </a:solidFill>
+              </a:defRPr>
+            </a:lvl3pPr>
+          </a:lstStyle>
+          <a:p>
+            <a:pPr lvl="0" indent="0" marL="0">
+              <a:buNone/>
+            </a:pPr>
+            <a:r>
+              <a:rPr sz="2500" b="1">
+                <a:latin typeface="Aptos Display"/>
+                <a:solidFill>
+                  <a:srgbClr val="0B1220"/>
+                </a:solidFill>
+              </a:rPr>
+              <a:t>Slide 1 — Platform at a glance</a:t>
+            </a:r>
+          </a:p>
+        </p:txBody>
+      </p:sp>
+      <p:sp>
+        <p:nvSpPr>
           <p:cNvPr id="3" name="Content Placeholder 2"/>
           <p:cNvSpPr>
             <a:spLocks noGrp="1"/>
@@ -3645,18 +5071,93 @@
         </p:nvSpPr>
         <p:spPr/>
         <p:txBody>
-          <a:bodyPr/>
-          <a:lstStyle/>
+          <a:bodyPr wrap="square" anchor="t" lIns="91440" rIns="91440" tIns="45720" bIns="45720"/>
+          <a:lstStyle>
+            <a:lvl1pPr>
+              <a:defRPr sz="1550">
+                <a:latin typeface="Aptos"/>
+                <a:solidFill>
+                  <a:srgbClr val="334155"/>
+                </a:solidFill>
+              </a:defRPr>
+            </a:lvl1pPr>
+            <a:lvl2pPr>
+              <a:defRPr sz="1550">
+                <a:latin typeface="Aptos"/>
+                <a:solidFill>
+                  <a:srgbClr val="334155"/>
+                </a:solidFill>
+              </a:defRPr>
+            </a:lvl2pPr>
+            <a:lvl3pPr>
+              <a:defRPr sz="1550">
+                <a:latin typeface="Aptos"/>
+                <a:solidFill>
+                  <a:srgbClr val="334155"/>
+                </a:solidFill>
+              </a:defRPr>
+            </a:lvl3pPr>
+          </a:lstStyle>
           <a:p>
             <a:pPr lvl="0" indent="0" marL="0">
-              <a:spcBef>
-                <a:spcPts val="3000"/>
-              </a:spcBef>
               <a:buNone/>
             </a:pPr>
             <a:r>
-              <a:rPr b="1"/>
-              <a:t>Slide 1 — OpsDesk: from code to observable operations</a:t>
+              <a:rPr b="0" sz="1550">
+                <a:latin typeface="Aptos"/>
+                <a:solidFill>
+                  <a:srgbClr val="334155"/>
+                </a:solidFill>
+              </a:rPr>
+              <a:t>DevSecOps capstone</a:t>
+            </a:r>
+          </a:p>
+          <a:p>
+            <a:pPr lvl="0"/>
+            <a:r>
+              <a:rPr sz="1550" b="0">
+                <a:latin typeface="Aptos"/>
+                <a:solidFill>
+                  <a:srgbClr val="334155"/>
+                </a:solidFill>
+              </a:rPr>
+              <a:t>Incident/work-item dashboard for an operations team</a:t>
+            </a:r>
+          </a:p>
+          <a:p>
+            <a:pPr lvl="0"/>
+            <a:r>
+              <a:rPr sz="1550" b="0">
+                <a:latin typeface="Aptos"/>
+                <a:solidFill>
+                  <a:srgbClr val="334155"/>
+                </a:solidFill>
+              </a:rPr>
+              <a:t>React + FastAPI + PostgreSQL</a:t>
+            </a:r>
+          </a:p>
+          <a:p>
+            <a:pPr lvl="0"/>
+            <a:r>
+              <a:rPr sz="1550" b="0">
+                <a:latin typeface="Aptos"/>
+                <a:solidFill>
+                  <a:srgbClr val="334155"/>
+                </a:solidFill>
+              </a:rPr>
+              <a:t>CI/CD, containers, Terraform, Kubernetes, Helm, ArgoCD, Prometheus, and Grafana artifacts</a:t>
+            </a:r>
+          </a:p>
+          <a:p>
+            <a:pPr lvl="0"/>
+            <a:r>
+              <a:rPr sz="1550" b="0">
+                <a:latin typeface="Aptos"/>
+                <a:solidFill>
+                  <a:srgbClr val="334155"/>
+                </a:solidFill>
+              </a:rPr>
+              <a:t>Delivery path verified from local Compose through a live EKS deployment</a:t>
             </a:r>
           </a:p>
           <a:p>
@@ -3664,29 +5165,76 @@
               <a:buNone/>
             </a:pPr>
             <a:r>
-              <a:rPr b="1"/>
-              <a:t>DevSecOps capstone</a:t>
+              <a:rPr b="0" sz="1550">
+                <a:latin typeface="Aptos"/>
+                <a:solidFill>
+                  <a:srgbClr val="334155"/>
+                </a:solidFill>
+              </a:rPr>
+              <a:t>Technology stack</a:t>
             </a:r>
           </a:p>
           <a:p>
             <a:pPr lvl="0"/>
             <a:r>
-              <a:rPr/>
-              <a:t>Incident/work-item dashboard for an operations team</a:t>
+              <a:rPr b="0" sz="1550">
+                <a:latin typeface="Aptos"/>
+                <a:solidFill>
+                  <a:srgbClr val="334155"/>
+                </a:solidFill>
+              </a:rPr>
+              <a:t>Frontend:</a:t>
+            </a:r>
+            <a:r>
+              <a:rPr sz="1550" b="0">
+                <a:latin typeface="Aptos"/>
+                <a:solidFill>
+                  <a:srgbClr val="334155"/>
+                </a:solidFill>
+              </a:rPr>
+              <a:t> React 18, Vite, Node.js 22, Nginx</a:t>
             </a:r>
           </a:p>
           <a:p>
             <a:pPr lvl="0"/>
             <a:r>
-              <a:rPr/>
-              <a:t>React + FastAPI + PostgreSQL</a:t>
+              <a:rPr b="0" sz="1550">
+                <a:latin typeface="Aptos"/>
+                <a:solidFill>
+                  <a:srgbClr val="334155"/>
+                </a:solidFill>
+              </a:rPr>
+              <a:t>Backend:</a:t>
+            </a:r>
+            <a:r>
+              <a:rPr sz="1550" b="0">
+                <a:latin typeface="Aptos"/>
+                <a:solidFill>
+                  <a:srgbClr val="334155"/>
+                </a:solidFill>
+              </a:rPr>
+              <a:t> Python 3.12, FastAPI, SQLAlchemy, Pydantic, Alembic, Pytest</a:t>
             </a:r>
           </a:p>
           <a:p>
             <a:pPr lvl="0"/>
             <a:r>
-              <a:rPr/>
-              <a:t>CI/CD, containers, Terraform, Kubernetes, Helm, ArgoCD, Prometheus, and Grafana artifacts</a:t>
+              <a:rPr b="0" sz="1550">
+                <a:latin typeface="Aptos"/>
+                <a:solidFill>
+                  <a:srgbClr val="334155"/>
+                </a:solidFill>
+              </a:rPr>
+              <a:t>Platform:</a:t>
+            </a:r>
+            <a:r>
+              <a:rPr sz="1550" b="0">
+                <a:latin typeface="Aptos"/>
+                <a:solidFill>
+                  <a:srgbClr val="334155"/>
+                </a:solidFill>
+              </a:rPr>
+              <a:t> Docker Compose, GitHub Actions, Trivy, Terraform, AWS EKS, Kubernetes, Helm, ArgoCD, Prometheus, Grafana</a:t>
             </a:r>
           </a:p>
           <a:p>
@@ -3694,23 +5242,205 @@
               <a:buNone/>
             </a:pPr>
             <a:r>
-              <a:rPr b="1"/>
+              <a:rPr b="0" sz="1550">
+                <a:latin typeface="Aptos"/>
+                <a:solidFill>
+                  <a:srgbClr val="334155"/>
+                </a:solidFill>
+              </a:rPr>
               <a:t>Presenter note:</a:t>
             </a:r>
             <a:r>
-              <a:rPr/>
+              <a:rPr sz="1550" b="0">
+                <a:latin typeface="Aptos"/>
+                <a:solidFill>
+                  <a:srgbClr val="334155"/>
+                </a:solidFill>
+              </a:rPr>
               <a:t> The repository is named </a:t>
             </a:r>
             <a:r>
-              <a:rPr>
-                <a:latin typeface="Courier"/>
+              <a:rPr sz="1550" b="0">
+                <a:latin typeface="Aptos"/>
+                <a:solidFill>
+                  <a:srgbClr val="334155"/>
+                </a:solidFill>
               </a:rPr>
               <a:t>devsecops-csp</a:t>
             </a:r>
             <a:r>
-              <a:rPr/>
+              <a:rPr sz="1550" b="0">
+                <a:latin typeface="Aptos"/>
+                <a:solidFill>
+                  <a:srgbClr val="334155"/>
+                </a:solidFill>
+              </a:rPr>
               <a:t>; the product presented by the current frontend and API is OpsDesk.</a:t>
             </a:r>
+          </a:p>
+        </p:txBody>
+      </p:sp>
+      <p:sp>
+        <p:nvSpPr>
+          <p:cNvPr id="4" name="Top accent"/>
+          <p:cNvSpPr txBox="0"/>
+          <p:nvPr/>
+        </p:nvSpPr>
+        <p:spPr>
+          <a:xfrm>
+            <a:off x="0" y="0"/>
+            <a:ext cx="9144000" cy="76000"/>
+          </a:xfrm>
+          <a:prstGeom prst="rect">
+            <a:avLst/>
+          </a:prstGeom>
+          <a:solidFill>
+            <a:srgbClr val="06B6D4"/>
+          </a:solidFill>
+          <a:ln w="9525">
+            <a:noFill/>
+          </a:ln>
+        </p:spPr>
+        <p:txBody>
+          <a:bodyPr anchor="ctr" lIns="45720" rIns="45720" tIns="22860" bIns="22860" wrap="square"/>
+          <a:lstStyle/>
+          <a:p>
+            <a:pPr algn="l"/>
+            <a:endParaRPr lang="en-US"/>
+          </a:p>
+        </p:txBody>
+      </p:sp>
+      <p:sp>
+        <p:nvSpPr>
+          <p:cNvPr id="5" name="Title accent"/>
+          <p:cNvSpPr txBox="0"/>
+          <p:nvPr/>
+        </p:nvSpPr>
+        <p:spPr>
+          <a:xfrm>
+            <a:off x="457200" y="1010000"/>
+            <a:ext cx="720000" cy="52000"/>
+          </a:xfrm>
+          <a:prstGeom prst="roundRect">
+            <a:avLst/>
+          </a:prstGeom>
+          <a:solidFill>
+            <a:srgbClr val="14B8A6"/>
+          </a:solidFill>
+          <a:ln w="9525">
+            <a:noFill/>
+          </a:ln>
+        </p:spPr>
+        <p:txBody>
+          <a:bodyPr anchor="ctr" lIns="45720" rIns="45720" tIns="22860" bIns="22860" wrap="square"/>
+          <a:lstStyle/>
+          <a:p>
+            <a:pPr algn="l"/>
+            <a:endParaRPr lang="en-US"/>
+          </a:p>
+        </p:txBody>
+      </p:sp>
+      <p:sp>
+        <p:nvSpPr>
+          <p:cNvPr id="6" name="Footer rule"/>
+          <p:cNvSpPr txBox="0"/>
+          <p:nvPr/>
+        </p:nvSpPr>
+        <p:spPr>
+          <a:xfrm>
+            <a:off x="457200" y="6440000"/>
+            <a:ext cx="8229600" cy="14000"/>
+          </a:xfrm>
+          <a:prstGeom prst="rect">
+            <a:avLst/>
+          </a:prstGeom>
+          <a:solidFill>
+            <a:srgbClr val="CBD5E1"/>
+          </a:solidFill>
+          <a:ln w="9525">
+            <a:noFill/>
+          </a:ln>
+        </p:spPr>
+        <p:txBody>
+          <a:bodyPr anchor="ctr" lIns="45720" rIns="45720" tIns="22860" bIns="22860" wrap="square"/>
+          <a:lstStyle/>
+          <a:p>
+            <a:pPr algn="l"/>
+            <a:endParaRPr lang="en-US"/>
+          </a:p>
+        </p:txBody>
+      </p:sp>
+      <p:sp>
+        <p:nvSpPr>
+          <p:cNvPr id="7" name="Footer label"/>
+          <p:cNvSpPr txBox="1"/>
+          <p:nvPr/>
+        </p:nvSpPr>
+        <p:spPr>
+          <a:xfrm>
+            <a:off x="457200" y="6490000"/>
+            <a:ext cx="5200000" cy="220000"/>
+          </a:xfrm>
+          <a:prstGeom prst="rect">
+            <a:avLst/>
+          </a:prstGeom>
+          <a:noFill/>
+          <a:ln w="9525">
+            <a:noFill/>
+          </a:ln>
+        </p:spPr>
+        <p:txBody>
+          <a:bodyPr anchor="ctr" lIns="45720" rIns="45720" tIns="22860" bIns="22860" wrap="square"/>
+          <a:lstStyle/>
+          <a:p>
+            <a:pPr algn="l"/>
+            <a:r>
+              <a:rPr lang="en-US" sz="850">
+                <a:latin typeface="Aptos"/>
+                <a:solidFill>
+                  <a:srgbClr val="64748B"/>
+                </a:solidFill>
+              </a:rPr>
+              <a:t>OPSDESK  /  DEVSECOPS CAPSTONE</a:t>
+            </a:r>
+            <a:endParaRPr lang="en-US"/>
+          </a:p>
+        </p:txBody>
+      </p:sp>
+      <p:sp>
+        <p:nvSpPr>
+          <p:cNvPr id="8" name="Footer number"/>
+          <p:cNvSpPr txBox="1"/>
+          <p:nvPr/>
+        </p:nvSpPr>
+        <p:spPr>
+          <a:xfrm>
+            <a:off x="7900000" y="6490000"/>
+            <a:ext cx="1450000" cy="220000"/>
+          </a:xfrm>
+          <a:prstGeom prst="rect">
+            <a:avLst/>
+          </a:prstGeom>
+          <a:noFill/>
+          <a:ln w="9525">
+            <a:noFill/>
+          </a:ln>
+        </p:spPr>
+        <p:txBody>
+          <a:bodyPr anchor="ctr" lIns="45720" rIns="45720" tIns="22860" bIns="22860" wrap="square"/>
+          <a:lstStyle/>
+          <a:p>
+            <a:pPr algn="r"/>
+            <a:r>
+              <a:rPr lang="en-US" sz="850">
+                <a:latin typeface="Aptos"/>
+                <a:solidFill>
+                  <a:srgbClr val="64748B"/>
+                </a:solidFill>
+              </a:rPr>
+              <a:t>01  /  11</a:t>
+            </a:r>
+            <a:endParaRPr lang="en-US"/>
           </a:p>
         </p:txBody>
       </p:sp>
@@ -3720,8 +5450,16 @@
 </file>
 
 <file path=ppt/slides/slide3.xml><?xml version="1.0" encoding="utf-8"?>
-<p:sld xmlns:a="http://schemas.openxmlformats.org/drawingml/2006/main" xmlns:r="http://schemas.openxmlformats.org/officeDocument/2006/relationships" xmlns:p="http://schemas.openxmlformats.org/presentationml/2006/main">
+<p:sld xmlns:a="http://schemas.openxmlformats.org/drawingml/2006/main" xmlns:p="http://schemas.openxmlformats.org/presentationml/2006/main">
   <p:cSld>
+    <p:bg>
+      <a:bgPr>
+        <a:solidFill>
+          <a:srgbClr val="F8FAFC"/>
+        </a:solidFill>
+        <a:effectLst/>
+      </a:bgPr>
+    </p:bg>
     <p:spTree>
       <p:nvGrpSpPr>
         <p:cNvPr id="1" name=""/>
@@ -3738,6 +5476,61 @@
       </p:grpSpPr>
       <p:sp>
         <p:nvSpPr>
+          <p:cNvPr id="2" name="Title 1"/>
+          <p:cNvSpPr>
+            <a:spLocks noGrp="1"/>
+          </p:cNvSpPr>
+          <p:nvPr>
+            <p:ph type="title"/>
+          </p:nvPr>
+        </p:nvSpPr>
+        <p:spPr/>
+        <p:txBody>
+          <a:bodyPr wrap="square" anchor="t" lIns="91440" rIns="91440" tIns="45720" bIns="45720"/>
+          <a:lstStyle>
+            <a:lvl1pPr>
+              <a:defRPr sz="2500">
+                <a:latin typeface="Aptos Display"/>
+                <a:solidFill>
+                  <a:srgbClr val="0B1220"/>
+                </a:solidFill>
+              </a:defRPr>
+            </a:lvl1pPr>
+            <a:lvl2pPr>
+              <a:defRPr sz="2500">
+                <a:latin typeface="Aptos Display"/>
+                <a:solidFill>
+                  <a:srgbClr val="0B1220"/>
+                </a:solidFill>
+              </a:defRPr>
+            </a:lvl2pPr>
+            <a:lvl3pPr>
+              <a:defRPr sz="2500">
+                <a:latin typeface="Aptos Display"/>
+                <a:solidFill>
+                  <a:srgbClr val="0B1220"/>
+                </a:solidFill>
+              </a:defRPr>
+            </a:lvl3pPr>
+          </a:lstStyle>
+          <a:p>
+            <a:pPr lvl="0" indent="0" marL="0">
+              <a:buNone/>
+            </a:pPr>
+            <a:r>
+              <a:rPr sz="2500" b="1">
+                <a:latin typeface="Aptos Display"/>
+                <a:solidFill>
+                  <a:srgbClr val="0B1220"/>
+                </a:solidFill>
+              </a:rPr>
+              <a:t>Slide 2 — The application outcome</a:t>
+            </a:r>
+          </a:p>
+        </p:txBody>
+      </p:sp>
+      <p:sp>
+        <p:nvSpPr>
           <p:cNvPr id="3" name="Content Placeholder 2"/>
           <p:cNvSpPr>
             <a:spLocks noGrp="1"/>
@@ -3748,103 +5541,378 @@
         </p:nvSpPr>
         <p:spPr/>
         <p:txBody>
-          <a:bodyPr/>
-          <a:lstStyle/>
+          <a:bodyPr wrap="square" anchor="t" lIns="91440" rIns="91440" tIns="45720" bIns="45720"/>
+          <a:lstStyle>
+            <a:lvl1pPr>
+              <a:defRPr sz="1550">
+                <a:latin typeface="Aptos"/>
+                <a:solidFill>
+                  <a:srgbClr val="334155"/>
+                </a:solidFill>
+              </a:defRPr>
+            </a:lvl1pPr>
+            <a:lvl2pPr>
+              <a:defRPr sz="1550">
+                <a:latin typeface="Aptos"/>
+                <a:solidFill>
+                  <a:srgbClr val="334155"/>
+                </a:solidFill>
+              </a:defRPr>
+            </a:lvl2pPr>
+            <a:lvl3pPr>
+              <a:defRPr sz="1550">
+                <a:latin typeface="Aptos"/>
+                <a:solidFill>
+                  <a:srgbClr val="334155"/>
+                </a:solidFill>
+              </a:defRPr>
+            </a:lvl3pPr>
+          </a:lstStyle>
+          <a:p>
+            <a:pPr lvl="0"/>
+            <a:r>
+              <a:rPr sz="1550" b="0">
+                <a:latin typeface="Aptos"/>
+                <a:solidFill>
+                  <a:srgbClr val="334155"/>
+                </a:solidFill>
+              </a:rPr>
+              <a:t>Create incidents with title, description, priority, status, and owner</a:t>
+            </a:r>
+          </a:p>
+          <a:p>
+            <a:pPr lvl="0"/>
+            <a:r>
+              <a:rPr sz="1550" b="0">
+                <a:latin typeface="Aptos"/>
+                <a:solidFill>
+                  <a:srgbClr val="334155"/>
+                </a:solidFill>
+              </a:rPr>
+              <a:t>Filter the queue by status, priority, or text</a:t>
+            </a:r>
+          </a:p>
+          <a:p>
+            <a:pPr lvl="0"/>
+            <a:r>
+              <a:rPr sz="1550" b="0">
+                <a:latin typeface="Aptos"/>
+                <a:solidFill>
+                  <a:srgbClr val="334155"/>
+                </a:solidFill>
+              </a:rPr>
+              <a:t>Advance work through </a:t>
+            </a:r>
+            <a:r>
+              <a:rPr sz="1550" b="0">
+                <a:latin typeface="Aptos"/>
+                <a:solidFill>
+                  <a:srgbClr val="334155"/>
+                </a:solidFill>
+              </a:rPr>
+              <a:t>OPEN → IN_PROGRESS → RESOLVED</a:t>
+            </a:r>
+          </a:p>
+          <a:p>
+            <a:pPr lvl="0"/>
+            <a:r>
+              <a:rPr sz="1550" b="0">
+                <a:latin typeface="Aptos"/>
+                <a:solidFill>
+                  <a:srgbClr val="334155"/>
+                </a:solidFill>
+              </a:rPr>
+              <a:t>Read summary statistics from the API</a:t>
+            </a:r>
+          </a:p>
+          <a:p>
+            <a:pPr lvl="0"/>
+            <a:r>
+              <a:rPr sz="1550" b="0">
+                <a:latin typeface="Aptos"/>
+                <a:solidFill>
+                  <a:srgbClr val="334155"/>
+                </a:solidFill>
+              </a:rPr>
+              <a:t>Use </a:t>
+            </a:r>
+            <a:r>
+              <a:rPr sz="1550" b="0">
+                <a:latin typeface="Aptos"/>
+                <a:solidFill>
+                  <a:srgbClr val="334155"/>
+                </a:solidFill>
+              </a:rPr>
+              <a:t>/health</a:t>
+            </a:r>
+            <a:r>
+              <a:rPr sz="1550" b="0">
+                <a:latin typeface="Aptos"/>
+                <a:solidFill>
+                  <a:srgbClr val="334155"/>
+                </a:solidFill>
+              </a:rPr>
+              <a:t>, </a:t>
+            </a:r>
+            <a:r>
+              <a:rPr sz="1550" b="0">
+                <a:latin typeface="Aptos"/>
+                <a:solidFill>
+                  <a:srgbClr val="334155"/>
+                </a:solidFill>
+              </a:rPr>
+              <a:t>/ready</a:t>
+            </a:r>
+            <a:r>
+              <a:rPr sz="1550" b="0">
+                <a:latin typeface="Aptos"/>
+                <a:solidFill>
+                  <a:srgbClr val="334155"/>
+                </a:solidFill>
+              </a:rPr>
+              <a:t>, and </a:t>
+            </a:r>
+            <a:r>
+              <a:rPr sz="1550" b="0">
+                <a:latin typeface="Aptos"/>
+                <a:solidFill>
+                  <a:srgbClr val="334155"/>
+                </a:solidFill>
+              </a:rPr>
+              <a:t>/metrics</a:t>
+            </a:r>
+            <a:r>
+              <a:rPr sz="1550" b="0">
+                <a:latin typeface="Aptos"/>
+                <a:solidFill>
+                  <a:srgbClr val="334155"/>
+                </a:solidFill>
+              </a:rPr>
+              <a:t> for operational checks</a:t>
+            </a:r>
+          </a:p>
           <a:p>
             <a:pPr lvl="0" indent="0" marL="0">
-              <a:spcBef>
-                <a:spcPts val="3000"/>
-              </a:spcBef>
               <a:buNone/>
             </a:pPr>
             <a:r>
-              <a:rPr b="1"/>
-              <a:t>Slide 2 — The application outcome</a:t>
-            </a:r>
-          </a:p>
-          <a:p>
-            <a:pPr lvl="0"/>
-            <a:r>
-              <a:rPr/>
-              <a:t>Create incidents with title, description, priority, status, and owner</a:t>
-            </a:r>
-          </a:p>
-          <a:p>
-            <a:pPr lvl="0"/>
-            <a:r>
-              <a:rPr/>
-              <a:t>Filter the queue by status, priority, or text</a:t>
-            </a:r>
-          </a:p>
-          <a:p>
-            <a:pPr lvl="0"/>
-            <a:r>
-              <a:rPr/>
-              <a:t>Advance work through </a:t>
-            </a:r>
-            <a:r>
-              <a:rPr>
-                <a:latin typeface="Courier"/>
-              </a:rPr>
-              <a:t>OPEN → IN_PROGRESS → RESOLVED</a:t>
-            </a:r>
-          </a:p>
-          <a:p>
-            <a:pPr lvl="0"/>
-            <a:r>
-              <a:rPr/>
-              <a:t>Read summary statistics from the API</a:t>
-            </a:r>
-          </a:p>
-          <a:p>
-            <a:pPr lvl="0"/>
-            <a:r>
-              <a:rPr/>
-              <a:t>Use </a:t>
-            </a:r>
-            <a:r>
-              <a:rPr>
-                <a:latin typeface="Courier"/>
-              </a:rPr>
-              <a:t>/health</a:t>
-            </a:r>
-            <a:r>
-              <a:rPr/>
-              <a:t>, </a:t>
-            </a:r>
-            <a:r>
-              <a:rPr>
-                <a:latin typeface="Courier"/>
-              </a:rPr>
-              <a:t>/ready</a:t>
-            </a:r>
-            <a:r>
-              <a:rPr/>
-              <a:t>, and </a:t>
-            </a:r>
-            <a:r>
-              <a:rPr>
-                <a:latin typeface="Courier"/>
-              </a:rPr>
-              <a:t>/metrics</a:t>
-            </a:r>
-            <a:r>
-              <a:rPr/>
-              <a:t> for operational checks</a:t>
-            </a:r>
-          </a:p>
-          <a:p>
-            <a:pPr lvl="0" indent="0" marL="0">
-              <a:buNone/>
-            </a:pPr>
-            <a:r>
-              <a:rPr b="1"/>
-              <a:t>Evidence placeholder:</a:t>
-            </a:r>
-            <a:r>
-              <a:rPr/>
-              <a:t> browser capture of the running OpsDesk UI.</a:t>
-            </a:r>
+              <a:rPr b="0" sz="1550">
+                <a:latin typeface="Aptos"/>
+                <a:solidFill>
+                  <a:srgbClr val="334155"/>
+                </a:solidFill>
+              </a:rPr>
+              <a:t>Verified outcome:</a:t>
+            </a:r>
+            <a:r>
+              <a:rPr sz="1550" b="0">
+                <a:latin typeface="Aptos"/>
+                <a:solidFill>
+                  <a:srgbClr val="334155"/>
+                </a:solidFill>
+              </a:rPr>
+              <a:t> the live Ingress served the React application, and the API smoke flow created incident </a:t>
+            </a:r>
+            <a:r>
+              <a:rPr sz="1550" b="0">
+                <a:latin typeface="Aptos"/>
+                <a:solidFill>
+                  <a:srgbClr val="334155"/>
+                </a:solidFill>
+              </a:rPr>
+              <a:t>1</a:t>
+            </a:r>
+            <a:r>
+              <a:rPr sz="1550" b="0">
+                <a:latin typeface="Aptos"/>
+                <a:solidFill>
+                  <a:srgbClr val="334155"/>
+                </a:solidFill>
+              </a:rPr>
+              <a:t>, moved it to </a:t>
+            </a:r>
+            <a:r>
+              <a:rPr sz="1550" b="0">
+                <a:latin typeface="Aptos"/>
+                <a:solidFill>
+                  <a:srgbClr val="334155"/>
+                </a:solidFill>
+              </a:rPr>
+              <a:t>IN_PROGRESS</a:t>
+            </a:r>
+            <a:r>
+              <a:rPr sz="1550" b="0">
+                <a:latin typeface="Aptos"/>
+                <a:solidFill>
+                  <a:srgbClr val="334155"/>
+                </a:solidFill>
+              </a:rPr>
+              <a:t>, and returned updated statistics.</a:t>
+            </a:r>
+          </a:p>
+        </p:txBody>
+      </p:sp>
+      <p:sp>
+        <p:nvSpPr>
+          <p:cNvPr id="4" name="Top accent"/>
+          <p:cNvSpPr txBox="0"/>
+          <p:nvPr/>
+        </p:nvSpPr>
+        <p:spPr>
+          <a:xfrm>
+            <a:off x="0" y="0"/>
+            <a:ext cx="9144000" cy="76000"/>
+          </a:xfrm>
+          <a:prstGeom prst="rect">
+            <a:avLst/>
+          </a:prstGeom>
+          <a:solidFill>
+            <a:srgbClr val="06B6D4"/>
+          </a:solidFill>
+          <a:ln w="9525">
+            <a:noFill/>
+          </a:ln>
+        </p:spPr>
+        <p:txBody>
+          <a:bodyPr anchor="ctr" lIns="45720" rIns="45720" tIns="22860" bIns="22860" wrap="square"/>
+          <a:lstStyle/>
+          <a:p>
+            <a:pPr algn="l"/>
+            <a:endParaRPr lang="en-US"/>
+          </a:p>
+        </p:txBody>
+      </p:sp>
+      <p:sp>
+        <p:nvSpPr>
+          <p:cNvPr id="5" name="Title accent"/>
+          <p:cNvSpPr txBox="0"/>
+          <p:nvPr/>
+        </p:nvSpPr>
+        <p:spPr>
+          <a:xfrm>
+            <a:off x="457200" y="1010000"/>
+            <a:ext cx="720000" cy="52000"/>
+          </a:xfrm>
+          <a:prstGeom prst="roundRect">
+            <a:avLst/>
+          </a:prstGeom>
+          <a:solidFill>
+            <a:srgbClr val="14B8A6"/>
+          </a:solidFill>
+          <a:ln w="9525">
+            <a:noFill/>
+          </a:ln>
+        </p:spPr>
+        <p:txBody>
+          <a:bodyPr anchor="ctr" lIns="45720" rIns="45720" tIns="22860" bIns="22860" wrap="square"/>
+          <a:lstStyle/>
+          <a:p>
+            <a:pPr algn="l"/>
+            <a:endParaRPr lang="en-US"/>
+          </a:p>
+        </p:txBody>
+      </p:sp>
+      <p:sp>
+        <p:nvSpPr>
+          <p:cNvPr id="6" name="Footer rule"/>
+          <p:cNvSpPr txBox="0"/>
+          <p:nvPr/>
+        </p:nvSpPr>
+        <p:spPr>
+          <a:xfrm>
+            <a:off x="457200" y="6440000"/>
+            <a:ext cx="8229600" cy="14000"/>
+          </a:xfrm>
+          <a:prstGeom prst="rect">
+            <a:avLst/>
+          </a:prstGeom>
+          <a:solidFill>
+            <a:srgbClr val="CBD5E1"/>
+          </a:solidFill>
+          <a:ln w="9525">
+            <a:noFill/>
+          </a:ln>
+        </p:spPr>
+        <p:txBody>
+          <a:bodyPr anchor="ctr" lIns="45720" rIns="45720" tIns="22860" bIns="22860" wrap="square"/>
+          <a:lstStyle/>
+          <a:p>
+            <a:pPr algn="l"/>
+            <a:endParaRPr lang="en-US"/>
+          </a:p>
+        </p:txBody>
+      </p:sp>
+      <p:sp>
+        <p:nvSpPr>
+          <p:cNvPr id="7" name="Footer label"/>
+          <p:cNvSpPr txBox="1"/>
+          <p:nvPr/>
+        </p:nvSpPr>
+        <p:spPr>
+          <a:xfrm>
+            <a:off x="457200" y="6490000"/>
+            <a:ext cx="5200000" cy="220000"/>
+          </a:xfrm>
+          <a:prstGeom prst="rect">
+            <a:avLst/>
+          </a:prstGeom>
+          <a:noFill/>
+          <a:ln w="9525">
+            <a:noFill/>
+          </a:ln>
+        </p:spPr>
+        <p:txBody>
+          <a:bodyPr anchor="ctr" lIns="45720" rIns="45720" tIns="22860" bIns="22860" wrap="square"/>
+          <a:lstStyle/>
+          <a:p>
+            <a:pPr algn="l"/>
+            <a:r>
+              <a:rPr lang="en-US" sz="850">
+                <a:latin typeface="Aptos"/>
+                <a:solidFill>
+                  <a:srgbClr val="64748B"/>
+                </a:solidFill>
+              </a:rPr>
+              <a:t>OPSDESK  /  DEVSECOPS CAPSTONE</a:t>
+            </a:r>
+            <a:endParaRPr lang="en-US"/>
+          </a:p>
+        </p:txBody>
+      </p:sp>
+      <p:sp>
+        <p:nvSpPr>
+          <p:cNvPr id="8" name="Footer number"/>
+          <p:cNvSpPr txBox="1"/>
+          <p:nvPr/>
+        </p:nvSpPr>
+        <p:spPr>
+          <a:xfrm>
+            <a:off x="7900000" y="6490000"/>
+            <a:ext cx="1450000" cy="220000"/>
+          </a:xfrm>
+          <a:prstGeom prst="rect">
+            <a:avLst/>
+          </a:prstGeom>
+          <a:noFill/>
+          <a:ln w="9525">
+            <a:noFill/>
+          </a:ln>
+        </p:spPr>
+        <p:txBody>
+          <a:bodyPr anchor="ctr" lIns="45720" rIns="45720" tIns="22860" bIns="22860" wrap="square"/>
+          <a:lstStyle/>
+          <a:p>
+            <a:pPr algn="r"/>
+            <a:r>
+              <a:rPr lang="en-US" sz="850">
+                <a:latin typeface="Aptos"/>
+                <a:solidFill>
+                  <a:srgbClr val="64748B"/>
+                </a:solidFill>
+              </a:rPr>
+              <a:t>02  /  11</a:t>
+            </a:r>
+            <a:endParaRPr lang="en-US"/>
           </a:p>
         </p:txBody>
       </p:sp>
@@ -3854,8 +5922,16 @@
 </file>
 
 <file path=ppt/slides/slide4.xml><?xml version="1.0" encoding="utf-8"?>
-<p:sld xmlns:a="http://schemas.openxmlformats.org/drawingml/2006/main" xmlns:r="http://schemas.openxmlformats.org/officeDocument/2006/relationships" xmlns:p="http://schemas.openxmlformats.org/presentationml/2006/main">
+<p:sld xmlns:a="http://schemas.openxmlformats.org/drawingml/2006/main" xmlns:p="http://schemas.openxmlformats.org/presentationml/2006/main">
   <p:cSld>
+    <p:bg>
+      <a:bgPr>
+        <a:solidFill>
+          <a:srgbClr val="F8FAFC"/>
+        </a:solidFill>
+        <a:effectLst/>
+      </a:bgPr>
+    </p:bg>
     <p:spTree>
       <p:nvGrpSpPr>
         <p:cNvPr id="1" name=""/>
@@ -3872,6 +5948,61 @@
       </p:grpSpPr>
       <p:sp>
         <p:nvSpPr>
+          <p:cNvPr id="2" name="Title 1"/>
+          <p:cNvSpPr>
+            <a:spLocks noGrp="1"/>
+          </p:cNvSpPr>
+          <p:nvPr>
+            <p:ph type="title"/>
+          </p:nvPr>
+        </p:nvSpPr>
+        <p:spPr/>
+        <p:txBody>
+          <a:bodyPr wrap="square" anchor="t" lIns="91440" rIns="91440" tIns="45720" bIns="45720"/>
+          <a:lstStyle>
+            <a:lvl1pPr>
+              <a:defRPr sz="2500">
+                <a:latin typeface="Aptos Display"/>
+                <a:solidFill>
+                  <a:srgbClr val="0B1220"/>
+                </a:solidFill>
+              </a:defRPr>
+            </a:lvl1pPr>
+            <a:lvl2pPr>
+              <a:defRPr sz="2500">
+                <a:latin typeface="Aptos Display"/>
+                <a:solidFill>
+                  <a:srgbClr val="0B1220"/>
+                </a:solidFill>
+              </a:defRPr>
+            </a:lvl2pPr>
+            <a:lvl3pPr>
+              <a:defRPr sz="2500">
+                <a:latin typeface="Aptos Display"/>
+                <a:solidFill>
+                  <a:srgbClr val="0B1220"/>
+                </a:solidFill>
+              </a:defRPr>
+            </a:lvl3pPr>
+          </a:lstStyle>
+          <a:p>
+            <a:pPr lvl="0" indent="0" marL="0">
+              <a:buNone/>
+            </a:pPr>
+            <a:r>
+              <a:rPr sz="2500" b="1">
+                <a:latin typeface="Aptos Display"/>
+                <a:solidFill>
+                  <a:srgbClr val="0B1220"/>
+                </a:solidFill>
+              </a:rPr>
+              <a:t>Slide 3 — Architecture</a:t>
+            </a:r>
+          </a:p>
+        </p:txBody>
+      </p:sp>
+      <p:sp>
+        <p:nvSpPr>
           <p:cNvPr id="3" name="Content Placeholder 2"/>
           <p:cNvSpPr>
             <a:spLocks noGrp="1"/>
@@ -3882,30 +6013,46 @@
         </p:nvSpPr>
         <p:spPr/>
         <p:txBody>
-          <a:bodyPr/>
-          <a:lstStyle/>
-          <a:p>
-            <a:pPr lvl="0" indent="0" marL="0">
-              <a:spcBef>
-                <a:spcPts val="3000"/>
-              </a:spcBef>
+          <a:bodyPr wrap="square" anchor="t" lIns="91440" rIns="91440" tIns="45720" bIns="45720"/>
+          <a:lstStyle>
+            <a:lvl1pPr>
+              <a:defRPr sz="1550">
+                <a:latin typeface="Aptos"/>
+                <a:solidFill>
+                  <a:srgbClr val="334155"/>
+                </a:solidFill>
+              </a:defRPr>
+            </a:lvl1pPr>
+            <a:lvl2pPr>
+              <a:defRPr sz="1550">
+                <a:latin typeface="Aptos"/>
+                <a:solidFill>
+                  <a:srgbClr val="334155"/>
+                </a:solidFill>
+              </a:defRPr>
+            </a:lvl2pPr>
+            <a:lvl3pPr>
+              <a:defRPr sz="1550">
+                <a:latin typeface="Aptos"/>
+                <a:solidFill>
+                  <a:srgbClr val="334155"/>
+                </a:solidFill>
+              </a:defRPr>
+            </a:lvl3pPr>
+          </a:lstStyle>
+          <a:p>
+            <a:pPr lvl="0" indent="0">
               <a:buNone/>
             </a:pPr>
             <a:r>
-              <a:rPr b="1"/>
-              <a:t>Slide 3 — Architecture</a:t>
-            </a:r>
-          </a:p>
-          <a:p>
-            <a:pPr lvl="0" indent="0">
-              <a:buNone/>
-            </a:pPr>
-            <a:r>
-              <a:rPr>
-                <a:latin typeface="Courier"/>
+              <a:rPr sz="1550" b="0">
+                <a:latin typeface="Aptos"/>
+                <a:solidFill>
+                  <a:srgbClr val="334155"/>
+                </a:solidFill>
               </a:rPr>
               <a:t>Browser
-  │  http://localhost:3000 or Ingress /
+  │  local port 3001 or AWS NGINX Ingress /
   ▼
 React static site + Nginx
   │  /api/*
@@ -3922,23 +6069,202 @@
           <a:p>
             <a:pPr lvl="0"/>
             <a:r>
-              <a:rPr/>
-              <a:t>Docker Compose is the local three-service path.</a:t>
+              <a:rPr sz="1550" b="0">
+                <a:latin typeface="Aptos"/>
+                <a:solidFill>
+                  <a:srgbClr val="334155"/>
+                </a:solidFill>
+              </a:rPr>
+              <a:t>Docker Compose is the local three-service path; it was verified with PostgreSQL, backend, and frontend containers.</a:t>
             </a:r>
           </a:p>
           <a:p>
             <a:pPr lvl="0"/>
             <a:r>
-              <a:rPr/>
-              <a:t>Helm packages the cluster path and includes PostgreSQL, HPA, Ingress, and ServiceMonitor templates.</a:t>
+              <a:rPr sz="1550" b="0">
+                <a:latin typeface="Aptos"/>
+                <a:solidFill>
+                  <a:srgbClr val="334155"/>
+                </a:solidFill>
+              </a:rPr>
+              <a:t>Helm packages the cluster path and includes PostgreSQL/PVC, HPA, Ingress, and ServiceMonitor resources.</a:t>
             </a:r>
           </a:p>
           <a:p>
             <a:pPr lvl="0"/>
             <a:r>
-              <a:rPr/>
-              <a:t>Terraform describes the AWS VPC and EKS foundation.</a:t>
-            </a:r>
+              <a:rPr sz="1550" b="0">
+                <a:latin typeface="Aptos"/>
+                <a:solidFill>
+                  <a:srgbClr val="334155"/>
+                </a:solidFill>
+              </a:rPr>
+              <a:t>Terraform manages the AWS VPC, EKS cluster, managed nodes, EBS CSI add-on, and supporting IAM.</a:t>
+            </a:r>
+          </a:p>
+        </p:txBody>
+      </p:sp>
+      <p:sp>
+        <p:nvSpPr>
+          <p:cNvPr id="4" name="Top accent"/>
+          <p:cNvSpPr txBox="0"/>
+          <p:nvPr/>
+        </p:nvSpPr>
+        <p:spPr>
+          <a:xfrm>
+            <a:off x="0" y="0"/>
+            <a:ext cx="9144000" cy="76000"/>
+          </a:xfrm>
+          <a:prstGeom prst="rect">
+            <a:avLst/>
+          </a:prstGeom>
+          <a:solidFill>
+            <a:srgbClr val="06B6D4"/>
+          </a:solidFill>
+          <a:ln w="9525">
+            <a:noFill/>
+          </a:ln>
+        </p:spPr>
+        <p:txBody>
+          <a:bodyPr anchor="ctr" lIns="45720" rIns="45720" tIns="22860" bIns="22860" wrap="square"/>
+          <a:lstStyle/>
+          <a:p>
+            <a:pPr algn="l"/>
+            <a:endParaRPr lang="en-US"/>
+          </a:p>
+        </p:txBody>
+      </p:sp>
+      <p:sp>
+        <p:nvSpPr>
+          <p:cNvPr id="5" name="Title accent"/>
+          <p:cNvSpPr txBox="0"/>
+          <p:nvPr/>
+        </p:nvSpPr>
+        <p:spPr>
+          <a:xfrm>
+            <a:off x="457200" y="1010000"/>
+            <a:ext cx="720000" cy="52000"/>
+          </a:xfrm>
+          <a:prstGeom prst="roundRect">
+            <a:avLst/>
+          </a:prstGeom>
+          <a:solidFill>
+            <a:srgbClr val="14B8A6"/>
+          </a:solidFill>
+          <a:ln w="9525">
+            <a:noFill/>
+          </a:ln>
+        </p:spPr>
+        <p:txBody>
+          <a:bodyPr anchor="ctr" lIns="45720" rIns="45720" tIns="22860" bIns="22860" wrap="square"/>
+          <a:lstStyle/>
+          <a:p>
+            <a:pPr algn="l"/>
+            <a:endParaRPr lang="en-US"/>
+          </a:p>
+        </p:txBody>
+      </p:sp>
+      <p:sp>
+        <p:nvSpPr>
+          <p:cNvPr id="6" name="Footer rule"/>
+          <p:cNvSpPr txBox="0"/>
+          <p:nvPr/>
+        </p:nvSpPr>
+        <p:spPr>
+          <a:xfrm>
+            <a:off x="457200" y="6440000"/>
+            <a:ext cx="8229600" cy="14000"/>
+          </a:xfrm>
+          <a:prstGeom prst="rect">
+            <a:avLst/>
+          </a:prstGeom>
+          <a:solidFill>
+            <a:srgbClr val="CBD5E1"/>
+          </a:solidFill>
+          <a:ln w="9525">
+            <a:noFill/>
+          </a:ln>
+        </p:spPr>
+        <p:txBody>
+          <a:bodyPr anchor="ctr" lIns="45720" rIns="45720" tIns="22860" bIns="22860" wrap="square"/>
+          <a:lstStyle/>
+          <a:p>
+            <a:pPr algn="l"/>
+            <a:endParaRPr lang="en-US"/>
+          </a:p>
+        </p:txBody>
+      </p:sp>
+      <p:sp>
+        <p:nvSpPr>
+          <p:cNvPr id="7" name="Footer label"/>
+          <p:cNvSpPr txBox="1"/>
+          <p:nvPr/>
+        </p:nvSpPr>
+        <p:spPr>
+          <a:xfrm>
+            <a:off x="457200" y="6490000"/>
+            <a:ext cx="5200000" cy="220000"/>
+          </a:xfrm>
+          <a:prstGeom prst="rect">
+            <a:avLst/>
+          </a:prstGeom>
+          <a:noFill/>
+          <a:ln w="9525">
+            <a:noFill/>
+          </a:ln>
+        </p:spPr>
+        <p:txBody>
+          <a:bodyPr anchor="ctr" lIns="45720" rIns="45720" tIns="22860" bIns="22860" wrap="square"/>
+          <a:lstStyle/>
+          <a:p>
+            <a:pPr algn="l"/>
+            <a:r>
+              <a:rPr lang="en-US" sz="850">
+                <a:latin typeface="Aptos"/>
+                <a:solidFill>
+                  <a:srgbClr val="64748B"/>
+                </a:solidFill>
+              </a:rPr>
+              <a:t>OPSDESK  /  DEVSECOPS CAPSTONE</a:t>
+            </a:r>
+            <a:endParaRPr lang="en-US"/>
+          </a:p>
+        </p:txBody>
+      </p:sp>
+      <p:sp>
+        <p:nvSpPr>
+          <p:cNvPr id="8" name="Footer number"/>
+          <p:cNvSpPr txBox="1"/>
+          <p:nvPr/>
+        </p:nvSpPr>
+        <p:spPr>
+          <a:xfrm>
+            <a:off x="7900000" y="6490000"/>
+            <a:ext cx="1450000" cy="220000"/>
+          </a:xfrm>
+          <a:prstGeom prst="rect">
+            <a:avLst/>
+          </a:prstGeom>
+          <a:noFill/>
+          <a:ln w="9525">
+            <a:noFill/>
+          </a:ln>
+        </p:spPr>
+        <p:txBody>
+          <a:bodyPr anchor="ctr" lIns="45720" rIns="45720" tIns="22860" bIns="22860" wrap="square"/>
+          <a:lstStyle/>
+          <a:p>
+            <a:pPr algn="r"/>
+            <a:r>
+              <a:rPr lang="en-US" sz="850">
+                <a:latin typeface="Aptos"/>
+                <a:solidFill>
+                  <a:srgbClr val="64748B"/>
+                </a:solidFill>
+              </a:rPr>
+              <a:t>03  /  11</a:t>
+            </a:r>
+            <a:endParaRPr lang="en-US"/>
           </a:p>
         </p:txBody>
       </p:sp>
@@ -3948,8 +6274,16 @@
 </file>
 
 <file path=ppt/slides/slide5.xml><?xml version="1.0" encoding="utf-8"?>
-<p:sld xmlns:a="http://schemas.openxmlformats.org/drawingml/2006/main" xmlns:r="http://schemas.openxmlformats.org/officeDocument/2006/relationships" xmlns:p="http://schemas.openxmlformats.org/presentationml/2006/main">
+<p:sld xmlns:a="http://schemas.openxmlformats.org/drawingml/2006/main" xmlns:p="http://schemas.openxmlformats.org/presentationml/2006/main">
   <p:cSld>
+    <p:bg>
+      <a:bgPr>
+        <a:solidFill>
+          <a:srgbClr val="F8FAFC"/>
+        </a:solidFill>
+        <a:effectLst/>
+      </a:bgPr>
+    </p:bg>
     <p:spTree>
       <p:nvGrpSpPr>
         <p:cNvPr id="1" name=""/>
@@ -3966,6 +6300,61 @@
       </p:grpSpPr>
       <p:sp>
         <p:nvSpPr>
+          <p:cNvPr id="2" name="Title 1"/>
+          <p:cNvSpPr>
+            <a:spLocks noGrp="1"/>
+          </p:cNvSpPr>
+          <p:nvPr>
+            <p:ph type="title"/>
+          </p:nvPr>
+        </p:nvSpPr>
+        <p:spPr/>
+        <p:txBody>
+          <a:bodyPr wrap="square" anchor="t" lIns="91440" rIns="91440" tIns="45720" bIns="45720"/>
+          <a:lstStyle>
+            <a:lvl1pPr>
+              <a:defRPr sz="2500">
+                <a:latin typeface="Aptos Display"/>
+                <a:solidFill>
+                  <a:srgbClr val="0B1220"/>
+                </a:solidFill>
+              </a:defRPr>
+            </a:lvl1pPr>
+            <a:lvl2pPr>
+              <a:defRPr sz="2500">
+                <a:latin typeface="Aptos Display"/>
+                <a:solidFill>
+                  <a:srgbClr val="0B1220"/>
+                </a:solidFill>
+              </a:defRPr>
+            </a:lvl2pPr>
+            <a:lvl3pPr>
+              <a:defRPr sz="2500">
+                <a:latin typeface="Aptos Display"/>
+                <a:solidFill>
+                  <a:srgbClr val="0B1220"/>
+                </a:solidFill>
+              </a:defRPr>
+            </a:lvl3pPr>
+          </a:lstStyle>
+          <a:p>
+            <a:pPr lvl="0" indent="0" marL="0">
+              <a:buNone/>
+            </a:pPr>
+            <a:r>
+              <a:rPr sz="2500" b="1">
+                <a:latin typeface="Aptos Display"/>
+                <a:solidFill>
+                  <a:srgbClr val="0B1220"/>
+                </a:solidFill>
+              </a:rPr>
+              <a:t>Slide 4 — API and data flow</a:t>
+            </a:r>
+          </a:p>
+        </p:txBody>
+      </p:sp>
+      <p:sp>
+        <p:nvSpPr>
           <p:cNvPr id="3" name="Content Placeholder 2"/>
           <p:cNvSpPr>
             <a:spLocks noGrp="1"/>
@@ -3976,36 +6365,57 @@
         </p:nvSpPr>
         <p:spPr/>
         <p:txBody>
-          <a:bodyPr/>
-          <a:lstStyle/>
+          <a:bodyPr wrap="square" anchor="t" lIns="91440" rIns="91440" tIns="45720" bIns="45720"/>
+          <a:lstStyle>
+            <a:lvl1pPr>
+              <a:defRPr sz="1550">
+                <a:latin typeface="Aptos"/>
+                <a:solidFill>
+                  <a:srgbClr val="334155"/>
+                </a:solidFill>
+              </a:defRPr>
+            </a:lvl1pPr>
+            <a:lvl2pPr>
+              <a:defRPr sz="1550">
+                <a:latin typeface="Aptos"/>
+                <a:solidFill>
+                  <a:srgbClr val="334155"/>
+                </a:solidFill>
+              </a:defRPr>
+            </a:lvl2pPr>
+            <a:lvl3pPr>
+              <a:defRPr sz="1550">
+                <a:latin typeface="Aptos"/>
+                <a:solidFill>
+                  <a:srgbClr val="334155"/>
+                </a:solidFill>
+              </a:defRPr>
+            </a:lvl3pPr>
+          </a:lstStyle>
           <a:p>
             <a:pPr lvl="0" indent="0" marL="0">
-              <a:spcBef>
-                <a:spcPts val="3000"/>
-              </a:spcBef>
               <a:buNone/>
             </a:pPr>
             <a:r>
-              <a:rPr b="1"/>
-              <a:t>Slide 4 — API and data flow</a:t>
-            </a:r>
-          </a:p>
-          <a:p>
-            <a:pPr lvl="0" indent="0" marL="0">
+              <a:rPr sz="1550" b="0">
+                <a:latin typeface="Aptos"/>
+                <a:solidFill>
+                  <a:srgbClr val="334155"/>
+                </a:solidFill>
+              </a:rPr>
+              <a:t>Canonical API resources:</a:t>
+            </a:r>
+          </a:p>
+          <a:p>
+            <a:pPr lvl="0" indent="0">
               <a:buNone/>
             </a:pPr>
             <a:r>
-              <a:rPr/>
-              <a:t>Canonical API resources:</a:t>
-            </a:r>
-          </a:p>
-          <a:p>
-            <a:pPr lvl="0" indent="0">
-              <a:buNone/>
-            </a:pPr>
-            <a:r>
-              <a:rPr>
-                <a:latin typeface="Courier"/>
+              <a:rPr sz="1550" b="0">
+                <a:latin typeface="Aptos"/>
+                <a:solidFill>
+                  <a:srgbClr val="334155"/>
+                </a:solidFill>
               </a:rPr>
               <a:t>GET    /api/incidents
 GET    /api/incidents/{id}
@@ -4018,27 +6428,45 @@
           <a:p>
             <a:pPr lvl="0"/>
             <a:r>
-              <a:rPr/>
+              <a:rPr sz="1550" b="0">
+                <a:latin typeface="Aptos"/>
+                <a:solidFill>
+                  <a:srgbClr val="334155"/>
+                </a:solidFill>
+              </a:rPr>
               <a:t>Alembic migrations manage the database schema.</a:t>
             </a:r>
           </a:p>
           <a:p>
             <a:pPr lvl="0"/>
             <a:r>
-              <a:rPr/>
+              <a:rPr sz="1550" b="0">
+                <a:latin typeface="Aptos"/>
+                <a:solidFill>
+                  <a:srgbClr val="334155"/>
+                </a:solidFill>
+              </a:rPr>
               <a:t>Pydantic validates titles, statuses, priorities, and update payloads.</a:t>
             </a:r>
           </a:p>
           <a:p>
             <a:pPr lvl="0"/>
             <a:r>
-              <a:rPr>
-                <a:latin typeface="Courier"/>
+              <a:rPr sz="1550" b="0">
+                <a:latin typeface="Aptos"/>
+                <a:solidFill>
+                  <a:srgbClr val="334155"/>
+                </a:solidFill>
               </a:rPr>
               <a:t>/api/work-items</a:t>
             </a:r>
             <a:r>
-              <a:rPr/>
+              <a:rPr sz="1550" b="0">
+                <a:latin typeface="Aptos"/>
+                <a:solidFill>
+                  <a:srgbClr val="334155"/>
+                </a:solidFill>
+              </a:rPr>
               <a:t> remains as a hidden compatibility alias.</a:t>
             </a:r>
           </a:p>
@@ -4047,33 +6475,259 @@
               <a:buNone/>
             </a:pPr>
             <a:r>
-              <a:rPr b="1"/>
-              <a:t>Evidence placeholder:</a:t>
-            </a:r>
-            <a:r>
-              <a:rPr/>
+              <a:rPr b="0" sz="1550">
+                <a:latin typeface="Aptos"/>
+                <a:solidFill>
+                  <a:srgbClr val="334155"/>
+                </a:solidFill>
+              </a:rPr>
+              <a:t>Verified API flow:</a:t>
+            </a:r>
+            <a:r>
+              <a:rPr sz="1550" b="0">
+                <a:latin typeface="Aptos"/>
+                <a:solidFill>
+                  <a:srgbClr val="334155"/>
+                </a:solidFill>
+              </a:rPr>
               <a:t> </a:t>
             </a:r>
             <a:r>
-              <a:rPr>
-                <a:latin typeface="Courier"/>
-              </a:rPr>
-              <a:t>/docs</a:t>
-            </a:r>
-            <a:r>
-              <a:rPr/>
-              <a:t>, a CRUD request, and </a:t>
-            </a:r>
-            <a:r>
-              <a:rPr>
-                <a:latin typeface="Courier"/>
-              </a:rPr>
-              <a:t>curl /metrics</a:t>
-            </a:r>
-            <a:r>
-              <a:rPr/>
-              <a:t> output.</a:t>
-            </a:r>
+              <a:rPr sz="1550" b="0">
+                <a:latin typeface="Aptos"/>
+                <a:solidFill>
+                  <a:srgbClr val="334155"/>
+                </a:solidFill>
+              </a:rPr>
+              <a:t>/health</a:t>
+            </a:r>
+            <a:r>
+              <a:rPr sz="1550" b="0">
+                <a:latin typeface="Aptos"/>
+                <a:solidFill>
+                  <a:srgbClr val="334155"/>
+                </a:solidFill>
+              </a:rPr>
+              <a:t> returned </a:t>
+            </a:r>
+            <a:r>
+              <a:rPr sz="1550" b="0">
+                <a:latin typeface="Aptos"/>
+                <a:solidFill>
+                  <a:srgbClr val="334155"/>
+                </a:solidFill>
+              </a:rPr>
+              <a:t>UP</a:t>
+            </a:r>
+            <a:r>
+              <a:rPr sz="1550" b="0">
+                <a:latin typeface="Aptos"/>
+                <a:solidFill>
+                  <a:srgbClr val="334155"/>
+                </a:solidFill>
+              </a:rPr>
+              <a:t>, </a:t>
+            </a:r>
+            <a:r>
+              <a:rPr sz="1550" b="0">
+                <a:latin typeface="Aptos"/>
+                <a:solidFill>
+                  <a:srgbClr val="334155"/>
+                </a:solidFill>
+              </a:rPr>
+              <a:t>/ready</a:t>
+            </a:r>
+            <a:r>
+              <a:rPr sz="1550" b="0">
+                <a:latin typeface="Aptos"/>
+                <a:solidFill>
+                  <a:srgbClr val="334155"/>
+                </a:solidFill>
+              </a:rPr>
+              <a:t> returned </a:t>
+            </a:r>
+            <a:r>
+              <a:rPr sz="1550" b="0">
+                <a:latin typeface="Aptos"/>
+                <a:solidFill>
+                  <a:srgbClr val="334155"/>
+                </a:solidFill>
+              </a:rPr>
+              <a:t>READY</a:t>
+            </a:r>
+            <a:r>
+              <a:rPr sz="1550" b="0">
+                <a:latin typeface="Aptos"/>
+                <a:solidFill>
+                  <a:srgbClr val="334155"/>
+                </a:solidFill>
+              </a:rPr>
+              <a:t>, the live CRUD smoke test succeeded, and Prometheus scraped both backend Pods.</a:t>
+            </a:r>
+          </a:p>
+        </p:txBody>
+      </p:sp>
+      <p:sp>
+        <p:nvSpPr>
+          <p:cNvPr id="4" name="Top accent"/>
+          <p:cNvSpPr txBox="0"/>
+          <p:nvPr/>
+        </p:nvSpPr>
+        <p:spPr>
+          <a:xfrm>
+            <a:off x="0" y="0"/>
+            <a:ext cx="9144000" cy="76000"/>
+          </a:xfrm>
+          <a:prstGeom prst="rect">
+            <a:avLst/>
+          </a:prstGeom>
+          <a:solidFill>
+            <a:srgbClr val="06B6D4"/>
+          </a:solidFill>
+          <a:ln w="9525">
+            <a:noFill/>
+          </a:ln>
+        </p:spPr>
+        <p:txBody>
+          <a:bodyPr anchor="ctr" lIns="45720" rIns="45720" tIns="22860" bIns="22860" wrap="square"/>
+          <a:lstStyle/>
+          <a:p>
+            <a:pPr algn="l"/>
+            <a:endParaRPr lang="en-US"/>
+          </a:p>
+        </p:txBody>
+      </p:sp>
+      <p:sp>
+        <p:nvSpPr>
+          <p:cNvPr id="5" name="Title accent"/>
+          <p:cNvSpPr txBox="0"/>
+          <p:nvPr/>
+        </p:nvSpPr>
+        <p:spPr>
+          <a:xfrm>
+            <a:off x="457200" y="1010000"/>
+            <a:ext cx="720000" cy="52000"/>
+          </a:xfrm>
+          <a:prstGeom prst="roundRect">
+            <a:avLst/>
+          </a:prstGeom>
+          <a:solidFill>
+            <a:srgbClr val="14B8A6"/>
+          </a:solidFill>
+          <a:ln w="9525">
+            <a:noFill/>
+          </a:ln>
+        </p:spPr>
+        <p:txBody>
+          <a:bodyPr anchor="ctr" lIns="45720" rIns="45720" tIns="22860" bIns="22860" wrap="square"/>
+          <a:lstStyle/>
+          <a:p>
+            <a:pPr algn="l"/>
+            <a:endParaRPr lang="en-US"/>
+          </a:p>
+        </p:txBody>
+      </p:sp>
+      <p:sp>
+        <p:nvSpPr>
+          <p:cNvPr id="6" name="Footer rule"/>
+          <p:cNvSpPr txBox="0"/>
+          <p:nvPr/>
+        </p:nvSpPr>
+        <p:spPr>
+          <a:xfrm>
+            <a:off x="457200" y="6440000"/>
+            <a:ext cx="8229600" cy="14000"/>
+          </a:xfrm>
+          <a:prstGeom prst="rect">
+            <a:avLst/>
+          </a:prstGeom>
+          <a:solidFill>
+            <a:srgbClr val="CBD5E1"/>
+          </a:solidFill>
+          <a:ln w="9525">
+            <a:noFill/>
+          </a:ln>
+        </p:spPr>
+        <p:txBody>
+          <a:bodyPr anchor="ctr" lIns="45720" rIns="45720" tIns="22860" bIns="22860" wrap="square"/>
+          <a:lstStyle/>
+          <a:p>
+            <a:pPr algn="l"/>
+            <a:endParaRPr lang="en-US"/>
+          </a:p>
+        </p:txBody>
+      </p:sp>
+      <p:sp>
+        <p:nvSpPr>
+          <p:cNvPr id="7" name="Footer label"/>
+          <p:cNvSpPr txBox="1"/>
+          <p:nvPr/>
+        </p:nvSpPr>
+        <p:spPr>
+          <a:xfrm>
+            <a:off x="457200" y="6490000"/>
+            <a:ext cx="5200000" cy="220000"/>
+          </a:xfrm>
+          <a:prstGeom prst="rect">
+            <a:avLst/>
+          </a:prstGeom>
+          <a:noFill/>
+          <a:ln w="9525">
+            <a:noFill/>
+          </a:ln>
+        </p:spPr>
+        <p:txBody>
+          <a:bodyPr anchor="ctr" lIns="45720" rIns="45720" tIns="22860" bIns="22860" wrap="square"/>
+          <a:lstStyle/>
+          <a:p>
+            <a:pPr algn="l"/>
+            <a:r>
+              <a:rPr lang="en-US" sz="850">
+                <a:latin typeface="Aptos"/>
+                <a:solidFill>
+                  <a:srgbClr val="64748B"/>
+                </a:solidFill>
+              </a:rPr>
+              <a:t>OPSDESK  /  DEVSECOPS CAPSTONE</a:t>
+            </a:r>
+            <a:endParaRPr lang="en-US"/>
+          </a:p>
+        </p:txBody>
+      </p:sp>
+      <p:sp>
+        <p:nvSpPr>
+          <p:cNvPr id="8" name="Footer number"/>
+          <p:cNvSpPr txBox="1"/>
+          <p:nvPr/>
+        </p:nvSpPr>
+        <p:spPr>
+          <a:xfrm>
+            <a:off x="7900000" y="6490000"/>
+            <a:ext cx="1450000" cy="220000"/>
+          </a:xfrm>
+          <a:prstGeom prst="rect">
+            <a:avLst/>
+          </a:prstGeom>
+          <a:noFill/>
+          <a:ln w="9525">
+            <a:noFill/>
+          </a:ln>
+        </p:spPr>
+        <p:txBody>
+          <a:bodyPr anchor="ctr" lIns="45720" rIns="45720" tIns="22860" bIns="22860" wrap="square"/>
+          <a:lstStyle/>
+          <a:p>
+            <a:pPr algn="r"/>
+            <a:r>
+              <a:rPr lang="en-US" sz="850">
+                <a:latin typeface="Aptos"/>
+                <a:solidFill>
+                  <a:srgbClr val="64748B"/>
+                </a:solidFill>
+              </a:rPr>
+              <a:t>04  /  11</a:t>
+            </a:r>
+            <a:endParaRPr lang="en-US"/>
           </a:p>
         </p:txBody>
       </p:sp>
@@ -4083,8 +6737,16 @@
 </file>
 
 <file path=ppt/slides/slide6.xml><?xml version="1.0" encoding="utf-8"?>
-<p:sld xmlns:a="http://schemas.openxmlformats.org/drawingml/2006/main" xmlns:r="http://schemas.openxmlformats.org/officeDocument/2006/relationships" xmlns:p="http://schemas.openxmlformats.org/presentationml/2006/main">
+<p:sld xmlns:a="http://schemas.openxmlformats.org/drawingml/2006/main" xmlns:p="http://schemas.openxmlformats.org/presentationml/2006/main">
   <p:cSld>
+    <p:bg>
+      <a:bgPr>
+        <a:solidFill>
+          <a:srgbClr val="F8FAFC"/>
+        </a:solidFill>
+        <a:effectLst/>
+      </a:bgPr>
+    </p:bg>
     <p:spTree>
       <p:nvGrpSpPr>
         <p:cNvPr id="1" name=""/>
@@ -4101,6 +6763,61 @@
       </p:grpSpPr>
       <p:sp>
         <p:nvSpPr>
+          <p:cNvPr id="2" name="Title 1"/>
+          <p:cNvSpPr>
+            <a:spLocks noGrp="1"/>
+          </p:cNvSpPr>
+          <p:nvPr>
+            <p:ph type="title"/>
+          </p:nvPr>
+        </p:nvSpPr>
+        <p:spPr/>
+        <p:txBody>
+          <a:bodyPr wrap="square" anchor="t" lIns="91440" rIns="91440" tIns="45720" bIns="45720"/>
+          <a:lstStyle>
+            <a:lvl1pPr>
+              <a:defRPr sz="2500">
+                <a:latin typeface="Aptos Display"/>
+                <a:solidFill>
+                  <a:srgbClr val="0B1220"/>
+                </a:solidFill>
+              </a:defRPr>
+            </a:lvl1pPr>
+            <a:lvl2pPr>
+              <a:defRPr sz="2500">
+                <a:latin typeface="Aptos Display"/>
+                <a:solidFill>
+                  <a:srgbClr val="0B1220"/>
+                </a:solidFill>
+              </a:defRPr>
+            </a:lvl2pPr>
+            <a:lvl3pPr>
+              <a:defRPr sz="2500">
+                <a:latin typeface="Aptos Display"/>
+                <a:solidFill>
+                  <a:srgbClr val="0B1220"/>
+                </a:solidFill>
+              </a:defRPr>
+            </a:lvl3pPr>
+          </a:lstStyle>
+          <a:p>
+            <a:pPr lvl="0" indent="0" marL="0">
+              <a:buNone/>
+            </a:pPr>
+            <a:r>
+              <a:rPr sz="2500" b="1">
+                <a:latin typeface="Aptos Display"/>
+                <a:solidFill>
+                  <a:srgbClr val="0B1220"/>
+                </a:solidFill>
+              </a:rPr>
+              <a:t>Slide 5 — Local developer workflow</a:t>
+            </a:r>
+          </a:p>
+        </p:txBody>
+      </p:sp>
+      <p:sp>
+        <p:nvSpPr>
           <p:cNvPr id="3" name="Content Placeholder 2"/>
           <p:cNvSpPr>
             <a:spLocks noGrp="1"/>
@@ -4111,57 +6828,128 @@
         </p:nvSpPr>
         <p:spPr/>
         <p:txBody>
-          <a:bodyPr/>
-          <a:lstStyle/>
-          <a:p>
-            <a:pPr lvl="0" indent="0" marL="0">
-              <a:spcBef>
-                <a:spcPts val="3000"/>
-              </a:spcBef>
+          <a:bodyPr wrap="square" anchor="t" lIns="91440" rIns="91440" tIns="45720" bIns="45720"/>
+          <a:lstStyle>
+            <a:lvl1pPr>
+              <a:defRPr sz="1550">
+                <a:latin typeface="Aptos"/>
+                <a:solidFill>
+                  <a:srgbClr val="334155"/>
+                </a:solidFill>
+              </a:defRPr>
+            </a:lvl1pPr>
+            <a:lvl2pPr>
+              <a:defRPr sz="1550">
+                <a:latin typeface="Aptos"/>
+                <a:solidFill>
+                  <a:srgbClr val="334155"/>
+                </a:solidFill>
+              </a:defRPr>
+            </a:lvl2pPr>
+            <a:lvl3pPr>
+              <a:defRPr sz="1550">
+                <a:latin typeface="Aptos"/>
+                <a:solidFill>
+                  <a:srgbClr val="334155"/>
+                </a:solidFill>
+              </a:defRPr>
+            </a:lvl3pPr>
+          </a:lstStyle>
+          <a:p>
+            <a:pPr lvl="0" indent="0">
               <a:buNone/>
             </a:pPr>
             <a:r>
-              <a:rPr b="1"/>
-              <a:t>Slide 5 — Local developer workflow</a:t>
-            </a:r>
-          </a:p>
-          <a:p>
-            <a:pPr lvl="0" indent="0">
-              <a:buNone/>
-            </a:pPr>
-            <a:r>
-              <a:rPr>
-                <a:latin typeface="Courier"/>
-              </a:rPr>
-              <a:t>docker compose up </a:t>
-            </a:r>
-            <a:r>
-              <a:rPr>
-                <a:solidFill>
-                  <a:srgbClr val="7D9029"/>
-                </a:solidFill>
-                <a:latin typeface="Courier"/>
+              <a:rPr sz="1550" b="0">
+                <a:latin typeface="Aptos"/>
+                <a:solidFill>
+                  <a:srgbClr val="334155"/>
+                </a:solidFill>
+              </a:rPr>
+              <a:t>FRONTEND_PORT</a:t>
+            </a:r>
+            <a:r>
+              <a:rPr sz="1550" b="0">
+                <a:latin typeface="Aptos"/>
+                <a:solidFill>
+                  <a:srgbClr val="334155"/>
+                </a:solidFill>
+              </a:rPr>
+              <a:t>=</a:t>
+            </a:r>
+            <a:r>
+              <a:rPr sz="1550" b="0">
+                <a:latin typeface="Aptos"/>
+                <a:solidFill>
+                  <a:srgbClr val="334155"/>
+                </a:solidFill>
+              </a:rPr>
+              <a:t>3001 docker compose up </a:t>
+            </a:r>
+            <a:r>
+              <a:rPr sz="1550" b="0">
+                <a:latin typeface="Aptos"/>
+                <a:solidFill>
+                  <a:srgbClr val="334155"/>
+                </a:solidFill>
               </a:rPr>
               <a:t>--build</a:t>
             </a:r>
+            <a:r>
+              <a:rPr sz="1550" b="0">
+                <a:latin typeface="Aptos"/>
+                <a:solidFill>
+                  <a:srgbClr val="334155"/>
+                </a:solidFill>
+              </a:rPr>
+              <a:t> </a:t>
+            </a:r>
+            <a:r>
+              <a:rPr sz="1550" b="0">
+                <a:latin typeface="Aptos"/>
+                <a:solidFill>
+                  <a:srgbClr val="334155"/>
+                </a:solidFill>
+              </a:rPr>
+              <a:t>-d</a:t>
+            </a:r>
             <a:br/>
             <a:r>
-              <a:rPr>
-                <a:latin typeface="Courier"/>
-              </a:rPr>
-              <a:t>open http://localhost:3000</a:t>
+              <a:rPr sz="1550" b="0">
+                <a:latin typeface="Aptos"/>
+                <a:solidFill>
+                  <a:srgbClr val="334155"/>
+                </a:solidFill>
+              </a:rPr>
+              <a:t>curl http://localhost:8000/health</a:t>
             </a:r>
             <a:br/>
             <a:r>
-              <a:rPr>
-                <a:latin typeface="Courier"/>
-              </a:rPr>
-              <a:t>open http://localhost:8000/docs</a:t>
+              <a:rPr sz="1550" b="0">
+                <a:latin typeface="Aptos"/>
+                <a:solidFill>
+                  <a:srgbClr val="334155"/>
+                </a:solidFill>
+              </a:rPr>
+              <a:t>curl http://localhost:8000/ready</a:t>
             </a:r>
             <a:br/>
             <a:r>
-              <a:rPr>
-                <a:latin typeface="Courier"/>
+              <a:rPr sz="1550" b="0">
+                <a:latin typeface="Aptos"/>
+                <a:solidFill>
+                  <a:srgbClr val="334155"/>
+                </a:solidFill>
+              </a:rPr>
+              <a:t>curl http://localhost:3001/</a:t>
+            </a:r>
+            <a:br/>
+            <a:r>
+              <a:rPr sz="1550" b="0">
+                <a:latin typeface="Aptos"/>
+                <a:solidFill>
+                  <a:srgbClr val="334155"/>
+                </a:solidFill>
               </a:rPr>
               <a:t>docker compose down</a:t>
             </a:r>
@@ -4169,53 +6957,286 @@
           <a:p>
             <a:pPr lvl="0"/>
             <a:r>
-              <a:rPr/>
+              <a:rPr sz="1550" b="0">
+                <a:latin typeface="Aptos"/>
+                <a:solidFill>
+                  <a:srgbClr val="334155"/>
+                </a:solidFill>
+              </a:rPr>
               <a:t>Compose starts Postgres, the FastAPI backend, and Nginx-served frontend.</a:t>
             </a:r>
           </a:p>
           <a:p>
             <a:pPr lvl="0"/>
             <a:r>
-              <a:rPr/>
-              <a:t>The Compose database uses the </a:t>
-            </a:r>
-            <a:r>
-              <a:rPr>
-                <a:latin typeface="Courier"/>
+              <a:rPr sz="1550" b="0">
+                <a:latin typeface="Aptos"/>
+                <a:solidFill>
+                  <a:srgbClr val="334155"/>
+                </a:solidFill>
+              </a:rPr>
+              <a:t>The Compose database uses the development </a:t>
+            </a:r>
+            <a:r>
+              <a:rPr sz="1550" b="0">
+                <a:latin typeface="Aptos"/>
+                <a:solidFill>
+                  <a:srgbClr val="334155"/>
+                </a:solidFill>
               </a:rPr>
               <a:t>opsdesk</a:t>
             </a:r>
             <a:r>
-              <a:rPr/>
+              <a:rPr sz="1550" b="0">
+                <a:latin typeface="Aptos"/>
+                <a:solidFill>
+                  <a:srgbClr val="334155"/>
+                </a:solidFill>
+              </a:rPr>
               <a:t> database/user/password values in </a:t>
             </a:r>
             <a:r>
-              <a:rPr>
-                <a:latin typeface="Courier"/>
+              <a:rPr sz="1550" b="0">
+                <a:latin typeface="Aptos"/>
+                <a:solidFill>
+                  <a:srgbClr val="334155"/>
+                </a:solidFill>
               </a:rPr>
               <a:t>docker-compose.yml</a:t>
             </a:r>
             <a:r>
-              <a:rPr/>
+              <a:rPr sz="1550" b="0">
+                <a:latin typeface="Aptos"/>
+                <a:solidFill>
+                  <a:srgbClr val="334155"/>
+                </a:solidFill>
+              </a:rPr>
               <a:t>.</a:t>
             </a:r>
           </a:p>
           <a:p>
             <a:pPr lvl="0"/>
             <a:r>
-              <a:rPr/>
-              <a:t>The direct backend path uses an explicitly supplied </a:t>
-            </a:r>
-            <a:r>
-              <a:rPr>
-                <a:latin typeface="Courier"/>
-              </a:rPr>
-              <a:t>DATABASE_URL</a:t>
-            </a:r>
-            <a:r>
-              <a:rPr/>
-              <a:t> and Alembic.</a:t>
-            </a:r>
+              <a:rPr sz="1550" b="0">
+                <a:latin typeface="Aptos"/>
+                <a:solidFill>
+                  <a:srgbClr val="334155"/>
+                </a:solidFill>
+              </a:rPr>
+              <a:t>The backend container runs Alembic migrations before serving traffic.</a:t>
+            </a:r>
+          </a:p>
+          <a:p>
+            <a:pPr lvl="0"/>
+            <a:r>
+              <a:rPr sz="1550" b="0">
+                <a:latin typeface="Aptos"/>
+                <a:solidFill>
+                  <a:srgbClr val="334155"/>
+                </a:solidFill>
+              </a:rPr>
+              <a:t>The local smoke check completed successfully; the frontend was mapped to port </a:t>
+            </a:r>
+            <a:r>
+              <a:rPr sz="1550" b="0">
+                <a:latin typeface="Aptos"/>
+                <a:solidFill>
+                  <a:srgbClr val="334155"/>
+                </a:solidFill>
+              </a:rPr>
+              <a:t>3001</a:t>
+            </a:r>
+            <a:r>
+              <a:rPr sz="1550" b="0">
+                <a:latin typeface="Aptos"/>
+                <a:solidFill>
+                  <a:srgbClr val="334155"/>
+                </a:solidFill>
+              </a:rPr>
+              <a:t> because port </a:t>
+            </a:r>
+            <a:r>
+              <a:rPr sz="1550" b="0">
+                <a:latin typeface="Aptos"/>
+                <a:solidFill>
+                  <a:srgbClr val="334155"/>
+                </a:solidFill>
+              </a:rPr>
+              <a:t>3000</a:t>
+            </a:r>
+            <a:r>
+              <a:rPr sz="1550" b="0">
+                <a:latin typeface="Aptos"/>
+                <a:solidFill>
+                  <a:srgbClr val="334155"/>
+                </a:solidFill>
+              </a:rPr>
+              <a:t> was already in use.</a:t>
+            </a:r>
+          </a:p>
+        </p:txBody>
+      </p:sp>
+      <p:sp>
+        <p:nvSpPr>
+          <p:cNvPr id="4" name="Top accent"/>
+          <p:cNvSpPr txBox="0"/>
+          <p:nvPr/>
+        </p:nvSpPr>
+        <p:spPr>
+          <a:xfrm>
+            <a:off x="0" y="0"/>
+            <a:ext cx="9144000" cy="76000"/>
+          </a:xfrm>
+          <a:prstGeom prst="rect">
+            <a:avLst/>
+          </a:prstGeom>
+          <a:solidFill>
+            <a:srgbClr val="06B6D4"/>
+          </a:solidFill>
+          <a:ln w="9525">
+            <a:noFill/>
+          </a:ln>
+        </p:spPr>
+        <p:txBody>
+          <a:bodyPr anchor="ctr" lIns="45720" rIns="45720" tIns="22860" bIns="22860" wrap="square"/>
+          <a:lstStyle/>
+          <a:p>
+            <a:pPr algn="l"/>
+            <a:endParaRPr lang="en-US"/>
+          </a:p>
+        </p:txBody>
+      </p:sp>
+      <p:sp>
+        <p:nvSpPr>
+          <p:cNvPr id="5" name="Title accent"/>
+          <p:cNvSpPr txBox="0"/>
+          <p:nvPr/>
+        </p:nvSpPr>
+        <p:spPr>
+          <a:xfrm>
+            <a:off x="457200" y="1010000"/>
+            <a:ext cx="720000" cy="52000"/>
+          </a:xfrm>
+          <a:prstGeom prst="roundRect">
+            <a:avLst/>
+          </a:prstGeom>
+          <a:solidFill>
+            <a:srgbClr val="14B8A6"/>
+          </a:solidFill>
+          <a:ln w="9525">
+            <a:noFill/>
+          </a:ln>
+        </p:spPr>
+        <p:txBody>
+          <a:bodyPr anchor="ctr" lIns="45720" rIns="45720" tIns="22860" bIns="22860" wrap="square"/>
+          <a:lstStyle/>
+          <a:p>
+            <a:pPr algn="l"/>
+            <a:endParaRPr lang="en-US"/>
+          </a:p>
+        </p:txBody>
+      </p:sp>
+      <p:sp>
+        <p:nvSpPr>
+          <p:cNvPr id="6" name="Footer rule"/>
+          <p:cNvSpPr txBox="0"/>
+          <p:nvPr/>
+        </p:nvSpPr>
+        <p:spPr>
+          <a:xfrm>
+            <a:off x="457200" y="6440000"/>
+            <a:ext cx="8229600" cy="14000"/>
+          </a:xfrm>
+          <a:prstGeom prst="rect">
+            <a:avLst/>
+          </a:prstGeom>
+          <a:solidFill>
+            <a:srgbClr val="CBD5E1"/>
+          </a:solidFill>
+          <a:ln w="9525">
+            <a:noFill/>
+          </a:ln>
+        </p:spPr>
+        <p:txBody>
+          <a:bodyPr anchor="ctr" lIns="45720" rIns="45720" tIns="22860" bIns="22860" wrap="square"/>
+          <a:lstStyle/>
+          <a:p>
+            <a:pPr algn="l"/>
+            <a:endParaRPr lang="en-US"/>
+          </a:p>
+        </p:txBody>
+      </p:sp>
+      <p:sp>
+        <p:nvSpPr>
+          <p:cNvPr id="7" name="Footer label"/>
+          <p:cNvSpPr txBox="1"/>
+          <p:nvPr/>
+        </p:nvSpPr>
+        <p:spPr>
+          <a:xfrm>
+            <a:off x="457200" y="6490000"/>
+            <a:ext cx="5200000" cy="220000"/>
+          </a:xfrm>
+          <a:prstGeom prst="rect">
+            <a:avLst/>
+          </a:prstGeom>
+          <a:noFill/>
+          <a:ln w="9525">
+            <a:noFill/>
+          </a:ln>
+        </p:spPr>
+        <p:txBody>
+          <a:bodyPr anchor="ctr" lIns="45720" rIns="45720" tIns="22860" bIns="22860" wrap="square"/>
+          <a:lstStyle/>
+          <a:p>
+            <a:pPr algn="l"/>
+            <a:r>
+              <a:rPr lang="en-US" sz="850">
+                <a:latin typeface="Aptos"/>
+                <a:solidFill>
+                  <a:srgbClr val="64748B"/>
+                </a:solidFill>
+              </a:rPr>
+              <a:t>OPSDESK  /  DEVSECOPS CAPSTONE</a:t>
+            </a:r>
+            <a:endParaRPr lang="en-US"/>
+          </a:p>
+        </p:txBody>
+      </p:sp>
+      <p:sp>
+        <p:nvSpPr>
+          <p:cNvPr id="8" name="Footer number"/>
+          <p:cNvSpPr txBox="1"/>
+          <p:nvPr/>
+        </p:nvSpPr>
+        <p:spPr>
+          <a:xfrm>
+            <a:off x="7900000" y="6490000"/>
+            <a:ext cx="1450000" cy="220000"/>
+          </a:xfrm>
+          <a:prstGeom prst="rect">
+            <a:avLst/>
+          </a:prstGeom>
+          <a:noFill/>
+          <a:ln w="9525">
+            <a:noFill/>
+          </a:ln>
+        </p:spPr>
+        <p:txBody>
+          <a:bodyPr anchor="ctr" lIns="45720" rIns="45720" tIns="22860" bIns="22860" wrap="square"/>
+          <a:lstStyle/>
+          <a:p>
+            <a:pPr algn="r"/>
+            <a:r>
+              <a:rPr lang="en-US" sz="850">
+                <a:latin typeface="Aptos"/>
+                <a:solidFill>
+                  <a:srgbClr val="64748B"/>
+                </a:solidFill>
+              </a:rPr>
+              <a:t>05  /  11</a:t>
+            </a:r>
+            <a:endParaRPr lang="en-US"/>
           </a:p>
         </p:txBody>
       </p:sp>
@@ -4225,8 +7246,16 @@
 </file>
 
 <file path=ppt/slides/slide7.xml><?xml version="1.0" encoding="utf-8"?>
-<p:sld xmlns:a="http://schemas.openxmlformats.org/drawingml/2006/main" xmlns:r="http://schemas.openxmlformats.org/officeDocument/2006/relationships" xmlns:p="http://schemas.openxmlformats.org/presentationml/2006/main">
+<p:sld xmlns:a="http://schemas.openxmlformats.org/drawingml/2006/main" xmlns:p="http://schemas.openxmlformats.org/presentationml/2006/main">
   <p:cSld>
+    <p:bg>
+      <a:bgPr>
+        <a:solidFill>
+          <a:srgbClr val="F8FAFC"/>
+        </a:solidFill>
+        <a:effectLst/>
+      </a:bgPr>
+    </p:bg>
     <p:spTree>
       <p:nvGrpSpPr>
         <p:cNvPr id="1" name=""/>
@@ -4243,6 +7272,61 @@
       </p:grpSpPr>
       <p:sp>
         <p:nvSpPr>
+          <p:cNvPr id="2" name="Title 1"/>
+          <p:cNvSpPr>
+            <a:spLocks noGrp="1"/>
+          </p:cNvSpPr>
+          <p:nvPr>
+            <p:ph type="title"/>
+          </p:nvPr>
+        </p:nvSpPr>
+        <p:spPr/>
+        <p:txBody>
+          <a:bodyPr wrap="square" anchor="t" lIns="91440" rIns="91440" tIns="45720" bIns="45720"/>
+          <a:lstStyle>
+            <a:lvl1pPr>
+              <a:defRPr sz="2500">
+                <a:latin typeface="Aptos Display"/>
+                <a:solidFill>
+                  <a:srgbClr val="0B1220"/>
+                </a:solidFill>
+              </a:defRPr>
+            </a:lvl1pPr>
+            <a:lvl2pPr>
+              <a:defRPr sz="2500">
+                <a:latin typeface="Aptos Display"/>
+                <a:solidFill>
+                  <a:srgbClr val="0B1220"/>
+                </a:solidFill>
+              </a:defRPr>
+            </a:lvl2pPr>
+            <a:lvl3pPr>
+              <a:defRPr sz="2500">
+                <a:latin typeface="Aptos Display"/>
+                <a:solidFill>
+                  <a:srgbClr val="0B1220"/>
+                </a:solidFill>
+              </a:defRPr>
+            </a:lvl3pPr>
+          </a:lstStyle>
+          <a:p>
+            <a:pPr lvl="0" indent="0" marL="0">
+              <a:buNone/>
+            </a:pPr>
+            <a:r>
+              <a:rPr sz="2500" b="1">
+                <a:latin typeface="Aptos Display"/>
+                <a:solidFill>
+                  <a:srgbClr val="0B1220"/>
+                </a:solidFill>
+              </a:rPr>
+              <a:t>Slide 6 — CI/CD and supply-chain controls</a:t>
+            </a:r>
+          </a:p>
+        </p:txBody>
+      </p:sp>
+      <p:sp>
+        <p:nvSpPr>
           <p:cNvPr id="3" name="Content Placeholder 2"/>
           <p:cNvSpPr>
             <a:spLocks noGrp="1"/>
@@ -4253,35 +7337,61 @@
         </p:nvSpPr>
         <p:spPr/>
         <p:txBody>
-          <a:bodyPr/>
-          <a:lstStyle/>
+          <a:bodyPr wrap="square" anchor="t" lIns="91440" rIns="91440" tIns="45720" bIns="45720"/>
+          <a:lstStyle>
+            <a:lvl1pPr>
+              <a:defRPr sz="1550">
+                <a:latin typeface="Aptos"/>
+                <a:solidFill>
+                  <a:srgbClr val="334155"/>
+                </a:solidFill>
+              </a:defRPr>
+            </a:lvl1pPr>
+            <a:lvl2pPr>
+              <a:defRPr sz="1550">
+                <a:latin typeface="Aptos"/>
+                <a:solidFill>
+                  <a:srgbClr val="334155"/>
+                </a:solidFill>
+              </a:defRPr>
+            </a:lvl2pPr>
+            <a:lvl3pPr>
+              <a:defRPr sz="1550">
+                <a:latin typeface="Aptos"/>
+                <a:solidFill>
+                  <a:srgbClr val="334155"/>
+                </a:solidFill>
+              </a:defRPr>
+            </a:lvl3pPr>
+          </a:lstStyle>
           <a:p>
             <a:pPr lvl="0" indent="0" marL="0">
-              <a:spcBef>
-                <a:spcPts val="3000"/>
-              </a:spcBef>
               <a:buNone/>
             </a:pPr>
             <a:r>
-              <a:rPr b="1"/>
-              <a:t>Slide 6 — CI/CD and supply-chain controls</a:t>
-            </a:r>
-          </a:p>
-          <a:p>
-            <a:pPr lvl="0" indent="0" marL="0">
-              <a:buNone/>
-            </a:pPr>
-            <a:r>
-              <a:rPr b="1"/>
+              <a:rPr b="0" sz="1550">
+                <a:latin typeface="Aptos"/>
+                <a:solidFill>
+                  <a:srgbClr val="334155"/>
+                </a:solidFill>
+              </a:rPr>
               <a:t>Active workflow:</a:t>
             </a:r>
             <a:r>
-              <a:rPr/>
+              <a:rPr sz="1550" b="0">
+                <a:latin typeface="Aptos"/>
+                <a:solidFill>
+                  <a:srgbClr val="334155"/>
+                </a:solidFill>
+              </a:rPr>
               <a:t> </a:t>
             </a:r>
             <a:r>
-              <a:rPr>
-                <a:latin typeface="Courier"/>
+              <a:rPr sz="1550" b="0">
+                <a:latin typeface="Aptos"/>
+                <a:solidFill>
+                  <a:srgbClr val="334155"/>
+                </a:solidFill>
               </a:rPr>
               <a:t>.github/workflows/ci-cd.yml</a:t>
             </a:r>
@@ -4291,8 +7401,22 @@
               <a:buAutoNum type="arabicPeriod"/>
             </a:pPr>
             <a:r>
-              <a:rPr/>
-              <a:t>Pytest and frontend build</a:t>
+              <a:rPr sz="1550" b="0">
+                <a:latin typeface="Aptos"/>
+                <a:solidFill>
+                  <a:srgbClr val="334155"/>
+                </a:solidFill>
+              </a:rPr>
+              <a:t>Runs on pushes and pull requests targeting </a:t>
+            </a:r>
+            <a:r>
+              <a:rPr sz="1550" b="0">
+                <a:latin typeface="Aptos"/>
+                <a:solidFill>
+                  <a:srgbClr val="334155"/>
+                </a:solidFill>
+              </a:rPr>
+              <a:t>main</a:t>
             </a:r>
           </a:p>
           <a:p>
@@ -4300,8 +7424,13 @@
               <a:buAutoNum type="arabicPeriod"/>
             </a:pPr>
             <a:r>
-              <a:rPr/>
-              <a:t>Build backend/frontend images</a:t>
+              <a:rPr sz="1550" b="0">
+                <a:latin typeface="Aptos"/>
+                <a:solidFill>
+                  <a:srgbClr val="334155"/>
+                </a:solidFill>
+              </a:rPr>
+              <a:t>Backend Pytest, frontend tests, and frontend production build</a:t>
             </a:r>
           </a:p>
           <a:p>
@@ -4309,14 +7438,13 @@
               <a:buAutoNum type="arabicPeriod"/>
             </a:pPr>
             <a:r>
-              <a:rPr/>
-              <a:t>Trivy HIGH/CRITICAL scan with </a:t>
-            </a:r>
-            <a:r>
-              <a:rPr>
-                <a:latin typeface="Courier"/>
-              </a:rPr>
-              <a:t>exit-code: 1</a:t>
+              <a:rPr sz="1550" b="0">
+                <a:latin typeface="Aptos"/>
+                <a:solidFill>
+                  <a:srgbClr val="334155"/>
+                </a:solidFill>
+              </a:rPr>
+              <a:t>Terraform format/validation and Helm lint/render validation</a:t>
             </a:r>
           </a:p>
           <a:p>
@@ -4324,8 +7452,13 @@
               <a:buAutoNum type="arabicPeriod"/>
             </a:pPr>
             <a:r>
-              <a:rPr/>
-              <a:t>Push SHA-tagged images to GHCR</a:t>
+              <a:rPr sz="1550" b="0">
+                <a:latin typeface="Aptos"/>
+                <a:solidFill>
+                  <a:srgbClr val="334155"/>
+                </a:solidFill>
+              </a:rPr>
+              <a:t>Builds backend/frontend images</a:t>
             </a:r>
           </a:p>
           <a:p>
@@ -4333,25 +7466,310 @@
               <a:buAutoNum type="arabicPeriod"/>
             </a:pPr>
             <a:r>
-              <a:rPr/>
-              <a:t>On </a:t>
-            </a:r>
-            <a:r>
-              <a:rPr>
-                <a:latin typeface="Courier"/>
-              </a:rPr>
-              <a:t>main</a:t>
-            </a:r>
-            <a:r>
-              <a:rPr/>
-              <a:t>, optionally deploy the SHA-tagged images with Helm using </a:t>
-            </a:r>
-            <a:r>
-              <a:rPr>
-                <a:latin typeface="Courier"/>
-              </a:rPr>
-              <a:t>KUBE_CONFIG_DATA</a:t>
-            </a:r>
+              <a:rPr sz="1550" b="0">
+                <a:latin typeface="Aptos"/>
+                <a:solidFill>
+                  <a:srgbClr val="334155"/>
+                </a:solidFill>
+              </a:rPr>
+              <a:t>Trivy HIGH/CRITICAL scan with </a:t>
+            </a:r>
+            <a:r>
+              <a:rPr sz="1550" b="0">
+                <a:latin typeface="Aptos"/>
+                <a:solidFill>
+                  <a:srgbClr val="334155"/>
+                </a:solidFill>
+              </a:rPr>
+              <a:t>exit-code: 1</a:t>
+            </a:r>
+          </a:p>
+          <a:p>
+            <a:pPr lvl="0" indent="-342900" marL="342900">
+              <a:buAutoNum type="arabicPeriod"/>
+            </a:pPr>
+            <a:r>
+              <a:rPr sz="1550" b="0">
+                <a:latin typeface="Aptos"/>
+                <a:solidFill>
+                  <a:srgbClr val="334155"/>
+                </a:solidFill>
+              </a:rPr>
+              <a:t>Pushes commit-SHA-tagged images to GHCR</a:t>
+            </a:r>
+          </a:p>
+          <a:p>
+            <a:pPr lvl="0" indent="-342900" marL="342900">
+              <a:buAutoNum type="arabicPeriod"/>
+            </a:pPr>
+            <a:r>
+              <a:rPr sz="1550" b="0">
+                <a:latin typeface="Aptos"/>
+                <a:solidFill>
+                  <a:srgbClr val="334155"/>
+                </a:solidFill>
+              </a:rPr>
+              <a:t>Optional manual deployment with </a:t>
+            </a:r>
+            <a:r>
+              <a:rPr sz="1550" b="0">
+                <a:latin typeface="Aptos"/>
+                <a:solidFill>
+                  <a:srgbClr val="334155"/>
+                </a:solidFill>
+              </a:rPr>
+              <a:t>workflow_dispatch</a:t>
+            </a:r>
+            <a:r>
+              <a:rPr sz="1550" b="0">
+                <a:latin typeface="Aptos"/>
+                <a:solidFill>
+                  <a:srgbClr val="334155"/>
+                </a:solidFill>
+              </a:rPr>
+              <a:t>, prerequisite checks, and Helm</a:t>
+            </a:r>
+          </a:p>
+          <a:p>
+            <a:pPr lvl="0" indent="0" marL="0">
+              <a:buNone/>
+            </a:pPr>
+            <a:r>
+              <a:rPr b="0" sz="1550">
+                <a:latin typeface="Aptos"/>
+                <a:solidFill>
+                  <a:srgbClr val="334155"/>
+                </a:solidFill>
+              </a:rPr>
+              <a:t>Verified locally:</a:t>
+            </a:r>
+            <a:r>
+              <a:rPr sz="1550" b="0">
+                <a:latin typeface="Aptos"/>
+                <a:solidFill>
+                  <a:srgbClr val="334155"/>
+                </a:solidFill>
+              </a:rPr>
+              <a:t> </a:t>
+            </a:r>
+            <a:r>
+              <a:rPr sz="1550" b="0">
+                <a:latin typeface="Aptos"/>
+                <a:solidFill>
+                  <a:srgbClr val="334155"/>
+                </a:solidFill>
+              </a:rPr>
+              <a:t>actionlint</a:t>
+            </a:r>
+            <a:r>
+              <a:rPr sz="1550" b="0">
+                <a:latin typeface="Aptos"/>
+                <a:solidFill>
+                  <a:srgbClr val="334155"/>
+                </a:solidFill>
+              </a:rPr>
+              <a:t> passed, frontend tests reported </a:t>
+            </a:r>
+            <a:r>
+              <a:rPr sz="1550" b="0">
+                <a:latin typeface="Aptos"/>
+                <a:solidFill>
+                  <a:srgbClr val="334155"/>
+                </a:solidFill>
+              </a:rPr>
+              <a:t>3 passed</a:t>
+            </a:r>
+            <a:r>
+              <a:rPr sz="1550" b="0">
+                <a:latin typeface="Aptos"/>
+                <a:solidFill>
+                  <a:srgbClr val="334155"/>
+                </a:solidFill>
+              </a:rPr>
+              <a:t>, backend tests reported </a:t>
+            </a:r>
+            <a:r>
+              <a:rPr sz="1550" b="0">
+                <a:latin typeface="Aptos"/>
+                <a:solidFill>
+                  <a:srgbClr val="334155"/>
+                </a:solidFill>
+              </a:rPr>
+              <a:t>9 passed</a:t>
+            </a:r>
+            <a:r>
+              <a:rPr sz="1550" b="0">
+                <a:latin typeface="Aptos"/>
+                <a:solidFill>
+                  <a:srgbClr val="334155"/>
+                </a:solidFill>
+              </a:rPr>
+              <a:t>, and the local cached-DB Trivy scans reported zero HIGH/CRITICAL findings for both images.</a:t>
+            </a:r>
+          </a:p>
+        </p:txBody>
+      </p:sp>
+      <p:sp>
+        <p:nvSpPr>
+          <p:cNvPr id="4" name="Top accent"/>
+          <p:cNvSpPr txBox="0"/>
+          <p:nvPr/>
+        </p:nvSpPr>
+        <p:spPr>
+          <a:xfrm>
+            <a:off x="0" y="0"/>
+            <a:ext cx="9144000" cy="76000"/>
+          </a:xfrm>
+          <a:prstGeom prst="rect">
+            <a:avLst/>
+          </a:prstGeom>
+          <a:solidFill>
+            <a:srgbClr val="06B6D4"/>
+          </a:solidFill>
+          <a:ln w="9525">
+            <a:noFill/>
+          </a:ln>
+        </p:spPr>
+        <p:txBody>
+          <a:bodyPr anchor="ctr" lIns="45720" rIns="45720" tIns="22860" bIns="22860" wrap="square"/>
+          <a:lstStyle/>
+          <a:p>
+            <a:pPr algn="l"/>
+            <a:endParaRPr lang="en-US"/>
+          </a:p>
+        </p:txBody>
+      </p:sp>
+      <p:sp>
+        <p:nvSpPr>
+          <p:cNvPr id="5" name="Title accent"/>
+          <p:cNvSpPr txBox="0"/>
+          <p:nvPr/>
+        </p:nvSpPr>
+        <p:spPr>
+          <a:xfrm>
+            <a:off x="457200" y="1010000"/>
+            <a:ext cx="720000" cy="52000"/>
+          </a:xfrm>
+          <a:prstGeom prst="roundRect">
+            <a:avLst/>
+          </a:prstGeom>
+          <a:solidFill>
+            <a:srgbClr val="14B8A6"/>
+          </a:solidFill>
+          <a:ln w="9525">
+            <a:noFill/>
+          </a:ln>
+        </p:spPr>
+        <p:txBody>
+          <a:bodyPr anchor="ctr" lIns="45720" rIns="45720" tIns="22860" bIns="22860" wrap="square"/>
+          <a:lstStyle/>
+          <a:p>
+            <a:pPr algn="l"/>
+            <a:endParaRPr lang="en-US"/>
+          </a:p>
+        </p:txBody>
+      </p:sp>
+      <p:sp>
+        <p:nvSpPr>
+          <p:cNvPr id="6" name="Footer rule"/>
+          <p:cNvSpPr txBox="0"/>
+          <p:nvPr/>
+        </p:nvSpPr>
+        <p:spPr>
+          <a:xfrm>
+            <a:off x="457200" y="6440000"/>
+            <a:ext cx="8229600" cy="14000"/>
+          </a:xfrm>
+          <a:prstGeom prst="rect">
+            <a:avLst/>
+          </a:prstGeom>
+          <a:solidFill>
+            <a:srgbClr val="CBD5E1"/>
+          </a:solidFill>
+          <a:ln w="9525">
+            <a:noFill/>
+          </a:ln>
+        </p:spPr>
+        <p:txBody>
+          <a:bodyPr anchor="ctr" lIns="45720" rIns="45720" tIns="22860" bIns="22860" wrap="square"/>
+          <a:lstStyle/>
+          <a:p>
+            <a:pPr algn="l"/>
+            <a:endParaRPr lang="en-US"/>
+          </a:p>
+        </p:txBody>
+      </p:sp>
+      <p:sp>
+        <p:nvSpPr>
+          <p:cNvPr id="7" name="Footer label"/>
+          <p:cNvSpPr txBox="1"/>
+          <p:nvPr/>
+        </p:nvSpPr>
+        <p:spPr>
+          <a:xfrm>
+            <a:off x="457200" y="6490000"/>
+            <a:ext cx="5200000" cy="220000"/>
+          </a:xfrm>
+          <a:prstGeom prst="rect">
+            <a:avLst/>
+          </a:prstGeom>
+          <a:noFill/>
+          <a:ln w="9525">
+            <a:noFill/>
+          </a:ln>
+        </p:spPr>
+        <p:txBody>
+          <a:bodyPr anchor="ctr" lIns="45720" rIns="45720" tIns="22860" bIns="22860" wrap="square"/>
+          <a:lstStyle/>
+          <a:p>
+            <a:pPr algn="l"/>
+            <a:r>
+              <a:rPr lang="en-US" sz="850">
+                <a:latin typeface="Aptos"/>
+                <a:solidFill>
+                  <a:srgbClr val="64748B"/>
+                </a:solidFill>
+              </a:rPr>
+              <a:t>OPSDESK  /  DEVSECOPS CAPSTONE</a:t>
+            </a:r>
+            <a:endParaRPr lang="en-US"/>
+          </a:p>
+        </p:txBody>
+      </p:sp>
+      <p:sp>
+        <p:nvSpPr>
+          <p:cNvPr id="8" name="Footer number"/>
+          <p:cNvSpPr txBox="1"/>
+          <p:nvPr/>
+        </p:nvSpPr>
+        <p:spPr>
+          <a:xfrm>
+            <a:off x="7900000" y="6490000"/>
+            <a:ext cx="1450000" cy="220000"/>
+          </a:xfrm>
+          <a:prstGeom prst="rect">
+            <a:avLst/>
+          </a:prstGeom>
+          <a:noFill/>
+          <a:ln w="9525">
+            <a:noFill/>
+          </a:ln>
+        </p:spPr>
+        <p:txBody>
+          <a:bodyPr anchor="ctr" lIns="45720" rIns="45720" tIns="22860" bIns="22860" wrap="square"/>
+          <a:lstStyle/>
+          <a:p>
+            <a:pPr algn="r"/>
+            <a:r>
+              <a:rPr lang="en-US" sz="850">
+                <a:latin typeface="Aptos"/>
+                <a:solidFill>
+                  <a:srgbClr val="64748B"/>
+                </a:solidFill>
+              </a:rPr>
+              <a:t>06  /  11</a:t>
+            </a:r>
+            <a:endParaRPr lang="en-US"/>
           </a:p>
         </p:txBody>
       </p:sp>
@@ -4361,8 +7779,16 @@
 </file>
 
 <file path=ppt/slides/slide8.xml><?xml version="1.0" encoding="utf-8"?>
-<p:sld xmlns:a="http://schemas.openxmlformats.org/drawingml/2006/main" xmlns:r="http://schemas.openxmlformats.org/officeDocument/2006/relationships" xmlns:p="http://schemas.openxmlformats.org/presentationml/2006/main">
+<p:sld xmlns:a="http://schemas.openxmlformats.org/drawingml/2006/main" xmlns:p="http://schemas.openxmlformats.org/presentationml/2006/main">
   <p:cSld>
+    <p:bg>
+      <a:bgPr>
+        <a:solidFill>
+          <a:srgbClr val="F8FAFC"/>
+        </a:solidFill>
+        <a:effectLst/>
+      </a:bgPr>
+    </p:bg>
     <p:spTree>
       <p:nvGrpSpPr>
         <p:cNvPr id="1" name=""/>
@@ -4379,6 +7805,61 @@
       </p:grpSpPr>
       <p:sp>
         <p:nvSpPr>
+          <p:cNvPr id="2" name="Title 1"/>
+          <p:cNvSpPr>
+            <a:spLocks noGrp="1"/>
+          </p:cNvSpPr>
+          <p:nvPr>
+            <p:ph type="title"/>
+          </p:nvPr>
+        </p:nvSpPr>
+        <p:spPr/>
+        <p:txBody>
+          <a:bodyPr wrap="square" anchor="t" lIns="91440" rIns="91440" tIns="45720" bIns="45720"/>
+          <a:lstStyle>
+            <a:lvl1pPr>
+              <a:defRPr sz="2500">
+                <a:latin typeface="Aptos Display"/>
+                <a:solidFill>
+                  <a:srgbClr val="0B1220"/>
+                </a:solidFill>
+              </a:defRPr>
+            </a:lvl1pPr>
+            <a:lvl2pPr>
+              <a:defRPr sz="2500">
+                <a:latin typeface="Aptos Display"/>
+                <a:solidFill>
+                  <a:srgbClr val="0B1220"/>
+                </a:solidFill>
+              </a:defRPr>
+            </a:lvl2pPr>
+            <a:lvl3pPr>
+              <a:defRPr sz="2500">
+                <a:latin typeface="Aptos Display"/>
+                <a:solidFill>
+                  <a:srgbClr val="0B1220"/>
+                </a:solidFill>
+              </a:defRPr>
+            </a:lvl3pPr>
+          </a:lstStyle>
+          <a:p>
+            <a:pPr lvl="0" indent="0" marL="0">
+              <a:buNone/>
+            </a:pPr>
+            <a:r>
+              <a:rPr sz="2500" b="1">
+                <a:latin typeface="Aptos Display"/>
+                <a:solidFill>
+                  <a:srgbClr val="0B1220"/>
+                </a:solidFill>
+              </a:rPr>
+              <a:t>Slide 7 — Terraform foundation</a:t>
+            </a:r>
+          </a:p>
+        </p:txBody>
+      </p:sp>
+      <p:sp>
+        <p:nvSpPr>
           <p:cNvPr id="3" name="Content Placeholder 2"/>
           <p:cNvSpPr>
             <a:spLocks noGrp="1"/>
@@ -4389,34 +7870,50 @@
         </p:nvSpPr>
         <p:spPr/>
         <p:txBody>
-          <a:bodyPr/>
-          <a:lstStyle/>
-          <a:p>
-            <a:pPr lvl="0" indent="0" marL="0">
-              <a:spcBef>
-                <a:spcPts val="3000"/>
-              </a:spcBef>
+          <a:bodyPr wrap="square" anchor="t" lIns="91440" rIns="91440" tIns="45720" bIns="45720"/>
+          <a:lstStyle>
+            <a:lvl1pPr>
+              <a:defRPr sz="1550">
+                <a:latin typeface="Aptos"/>
+                <a:solidFill>
+                  <a:srgbClr val="334155"/>
+                </a:solidFill>
+              </a:defRPr>
+            </a:lvl1pPr>
+            <a:lvl2pPr>
+              <a:defRPr sz="1550">
+                <a:latin typeface="Aptos"/>
+                <a:solidFill>
+                  <a:srgbClr val="334155"/>
+                </a:solidFill>
+              </a:defRPr>
+            </a:lvl2pPr>
+            <a:lvl3pPr>
+              <a:defRPr sz="1550">
+                <a:latin typeface="Aptos"/>
+                <a:solidFill>
+                  <a:srgbClr val="334155"/>
+                </a:solidFill>
+              </a:defRPr>
+            </a:lvl3pPr>
+          </a:lstStyle>
+          <a:p>
+            <a:pPr lvl="0" indent="0">
               <a:buNone/>
             </a:pPr>
             <a:r>
-              <a:rPr b="1"/>
-              <a:t>Slide 7 — Terraform foundation</a:t>
-            </a:r>
-          </a:p>
-          <a:p>
-            <a:pPr lvl="0" indent="0">
-              <a:buNone/>
-            </a:pPr>
-            <a:r>
-              <a:rPr>
-                <a:latin typeface="Courier"/>
+              <a:rPr sz="1550" b="0">
+                <a:latin typeface="Aptos"/>
+                <a:solidFill>
+                  <a:srgbClr val="334155"/>
+                </a:solidFill>
               </a:rPr>
               <a:t>AWS VPC 10.20.0.0/16
   ├── two public subnets
   ├── two private subnets
   ├── single NAT gateway
   └── EKS opsdesk-eks
-        └── managed t3.medium node group, desired size 2</a:t>
+         └── managed t3.small node group, desired size 4</a:t>
             </a:r>
           </a:p>
           <a:p>
@@ -4424,84 +7921,18 @@
               <a:buNone/>
             </a:pPr>
             <a:r>
-              <a:rPr>
-                <a:solidFill>
-                  <a:srgbClr val="008000"/>
-                </a:solidFill>
-                <a:latin typeface="Courier"/>
-              </a:rPr>
-              <a:t>cd</a:t>
-            </a:r>
-            <a:r>
-              <a:rPr>
-                <a:latin typeface="Courier"/>
-              </a:rPr>
-              <a:t> terraform</a:t>
-            </a:r>
-            <a:br/>
-            <a:r>
-              <a:rPr>
-                <a:latin typeface="Courier"/>
-              </a:rPr>
-              <a:t>terraform init</a:t>
-            </a:r>
-            <a:br/>
-            <a:r>
-              <a:rPr>
-                <a:latin typeface="Courier"/>
-              </a:rPr>
-              <a:t>terraform validate</a:t>
-            </a:r>
-            <a:br/>
-            <a:r>
-              <a:rPr>
-                <a:latin typeface="Courier"/>
-              </a:rPr>
-              <a:t>terraform plan</a:t>
-            </a:r>
-            <a:br/>
-            <a:r>
-              <a:rPr>
-                <a:latin typeface="Courier"/>
-              </a:rPr>
-              <a:t>terraform apply</a:t>
-            </a:r>
-            <a:br/>
-            <a:r>
-              <a:rPr>
-                <a:latin typeface="Courier"/>
-              </a:rPr>
-              <a:t>aws eks update-kubeconfig </a:t>
-            </a:r>
-            <a:r>
-              <a:rPr>
-                <a:solidFill>
-                  <a:srgbClr val="7D9029"/>
-                </a:solidFill>
-                <a:latin typeface="Courier"/>
-              </a:rPr>
-              <a:t>--region</a:t>
-            </a:r>
-            <a:r>
-              <a:rPr>
-                <a:latin typeface="Courier"/>
-              </a:rPr>
-              <a:t> ap-south-1 </a:t>
-            </a:r>
-            <a:r>
-              <a:rPr>
-                <a:solidFill>
-                  <a:srgbClr val="7D9029"/>
-                </a:solidFill>
-                <a:latin typeface="Courier"/>
-              </a:rPr>
-              <a:t>--name</a:t>
-            </a:r>
-            <a:r>
-              <a:rPr>
-                <a:latin typeface="Courier"/>
-              </a:rPr>
-              <a:t> opsdesk-eks</a:t>
+              <a:rPr sz="1550" b="0">
+                <a:latin typeface="Aptos"/>
+                <a:solidFill>
+                  <a:srgbClr val="334155"/>
+                </a:solidFill>
+              </a:rPr>
+              <a:t>Initial plan:   non-empty → apply succeeded
+Steady-state:   No changes
+Cluster:        opsdesk-eks / ACTIVE / Kubernetes 1.31
+Region:         ap-south-1
+Workers:        4 x t3.small / Ready
+Storage:        AWS EBS CSI + default gp3 StorageClass</a:t>
             </a:r>
           </a:p>
           <a:p>
@@ -4509,13 +7940,259 @@
               <a:buNone/>
             </a:pPr>
             <a:r>
-              <a:rPr b="1"/>
-              <a:t>Evidence placeholder:</a:t>
-            </a:r>
-            <a:r>
-              <a:rPr/>
-              <a:t> plan/AWS Console capture, only if actually provisioned. No live AWS evidence is included in this repository.</a:t>
-            </a:r>
+              <a:rPr b="0" sz="1550">
+                <a:latin typeface="Aptos"/>
+                <a:solidFill>
+                  <a:srgbClr val="334155"/>
+                </a:solidFill>
+              </a:rPr>
+              <a:t>Observed live evidence:</a:t>
+            </a:r>
+            <a:r>
+              <a:rPr sz="1550" b="0">
+                <a:latin typeface="Aptos"/>
+                <a:solidFill>
+                  <a:srgbClr val="334155"/>
+                </a:solidFill>
+              </a:rPr>
+              <a:t> the initial provisioning plan was non-empty and applied successfully; the steady-state refresh later reported </a:t>
+            </a:r>
+            <a:r>
+              <a:rPr sz="1550" b="0">
+                <a:latin typeface="Aptos"/>
+                <a:solidFill>
+                  <a:srgbClr val="334155"/>
+                </a:solidFill>
+              </a:rPr>
+              <a:t>No changes</a:t>
+            </a:r>
+            <a:r>
+              <a:rPr sz="1550" b="0">
+                <a:latin typeface="Aptos"/>
+                <a:solidFill>
+                  <a:srgbClr val="334155"/>
+                </a:solidFill>
+              </a:rPr>
+              <a:t>. The </a:t>
+            </a:r>
+            <a:r>
+              <a:rPr sz="1550" b="0">
+                <a:latin typeface="Aptos"/>
+                <a:solidFill>
+                  <a:srgbClr val="334155"/>
+                </a:solidFill>
+              </a:rPr>
+              <a:t>opsdesk-eks</a:t>
+            </a:r>
+            <a:r>
+              <a:rPr sz="1550" b="0">
+                <a:latin typeface="Aptos"/>
+                <a:solidFill>
+                  <a:srgbClr val="334155"/>
+                </a:solidFill>
+              </a:rPr>
+              <a:t> cluster is ACTIVE in </a:t>
+            </a:r>
+            <a:r>
+              <a:rPr sz="1550" b="0">
+                <a:latin typeface="Aptos"/>
+                <a:solidFill>
+                  <a:srgbClr val="334155"/>
+                </a:solidFill>
+              </a:rPr>
+              <a:t>ap-south-1</a:t>
+            </a:r>
+            <a:r>
+              <a:rPr sz="1550" b="0">
+                <a:latin typeface="Aptos"/>
+                <a:solidFill>
+                  <a:srgbClr val="334155"/>
+                </a:solidFill>
+              </a:rPr>
+              <a:t> with four Ready </a:t>
+            </a:r>
+            <a:r>
+              <a:rPr sz="1550" b="0">
+                <a:latin typeface="Aptos"/>
+                <a:solidFill>
+                  <a:srgbClr val="334155"/>
+                </a:solidFill>
+              </a:rPr>
+              <a:t>t3.small</a:t>
+            </a:r>
+            <a:r>
+              <a:rPr sz="1550" b="0">
+                <a:latin typeface="Aptos"/>
+                <a:solidFill>
+                  <a:srgbClr val="334155"/>
+                </a:solidFill>
+              </a:rPr>
+              <a:t> nodes and the AWS EBS CSI add-on.</a:t>
+            </a:r>
+          </a:p>
+        </p:txBody>
+      </p:sp>
+      <p:sp>
+        <p:nvSpPr>
+          <p:cNvPr id="4" name="Top accent"/>
+          <p:cNvSpPr txBox="0"/>
+          <p:nvPr/>
+        </p:nvSpPr>
+        <p:spPr>
+          <a:xfrm>
+            <a:off x="0" y="0"/>
+            <a:ext cx="9144000" cy="76000"/>
+          </a:xfrm>
+          <a:prstGeom prst="rect">
+            <a:avLst/>
+          </a:prstGeom>
+          <a:solidFill>
+            <a:srgbClr val="06B6D4"/>
+          </a:solidFill>
+          <a:ln w="9525">
+            <a:noFill/>
+          </a:ln>
+        </p:spPr>
+        <p:txBody>
+          <a:bodyPr anchor="ctr" lIns="45720" rIns="45720" tIns="22860" bIns="22860" wrap="square"/>
+          <a:lstStyle/>
+          <a:p>
+            <a:pPr algn="l"/>
+            <a:endParaRPr lang="en-US"/>
+          </a:p>
+        </p:txBody>
+      </p:sp>
+      <p:sp>
+        <p:nvSpPr>
+          <p:cNvPr id="5" name="Title accent"/>
+          <p:cNvSpPr txBox="0"/>
+          <p:nvPr/>
+        </p:nvSpPr>
+        <p:spPr>
+          <a:xfrm>
+            <a:off x="457200" y="1010000"/>
+            <a:ext cx="720000" cy="52000"/>
+          </a:xfrm>
+          <a:prstGeom prst="roundRect">
+            <a:avLst/>
+          </a:prstGeom>
+          <a:solidFill>
+            <a:srgbClr val="14B8A6"/>
+          </a:solidFill>
+          <a:ln w="9525">
+            <a:noFill/>
+          </a:ln>
+        </p:spPr>
+        <p:txBody>
+          <a:bodyPr anchor="ctr" lIns="45720" rIns="45720" tIns="22860" bIns="22860" wrap="square"/>
+          <a:lstStyle/>
+          <a:p>
+            <a:pPr algn="l"/>
+            <a:endParaRPr lang="en-US"/>
+          </a:p>
+        </p:txBody>
+      </p:sp>
+      <p:sp>
+        <p:nvSpPr>
+          <p:cNvPr id="6" name="Footer rule"/>
+          <p:cNvSpPr txBox="0"/>
+          <p:nvPr/>
+        </p:nvSpPr>
+        <p:spPr>
+          <a:xfrm>
+            <a:off x="457200" y="6440000"/>
+            <a:ext cx="8229600" cy="14000"/>
+          </a:xfrm>
+          <a:prstGeom prst="rect">
+            <a:avLst/>
+          </a:prstGeom>
+          <a:solidFill>
+            <a:srgbClr val="CBD5E1"/>
+          </a:solidFill>
+          <a:ln w="9525">
+            <a:noFill/>
+          </a:ln>
+        </p:spPr>
+        <p:txBody>
+          <a:bodyPr anchor="ctr" lIns="45720" rIns="45720" tIns="22860" bIns="22860" wrap="square"/>
+          <a:lstStyle/>
+          <a:p>
+            <a:pPr algn="l"/>
+            <a:endParaRPr lang="en-US"/>
+          </a:p>
+        </p:txBody>
+      </p:sp>
+      <p:sp>
+        <p:nvSpPr>
+          <p:cNvPr id="7" name="Footer label"/>
+          <p:cNvSpPr txBox="1"/>
+          <p:nvPr/>
+        </p:nvSpPr>
+        <p:spPr>
+          <a:xfrm>
+            <a:off x="457200" y="6490000"/>
+            <a:ext cx="5200000" cy="220000"/>
+          </a:xfrm>
+          <a:prstGeom prst="rect">
+            <a:avLst/>
+          </a:prstGeom>
+          <a:noFill/>
+          <a:ln w="9525">
+            <a:noFill/>
+          </a:ln>
+        </p:spPr>
+        <p:txBody>
+          <a:bodyPr anchor="ctr" lIns="45720" rIns="45720" tIns="22860" bIns="22860" wrap="square"/>
+          <a:lstStyle/>
+          <a:p>
+            <a:pPr algn="l"/>
+            <a:r>
+              <a:rPr lang="en-US" sz="850">
+                <a:latin typeface="Aptos"/>
+                <a:solidFill>
+                  <a:srgbClr val="64748B"/>
+                </a:solidFill>
+              </a:rPr>
+              <a:t>OPSDESK  /  DEVSECOPS CAPSTONE</a:t>
+            </a:r>
+            <a:endParaRPr lang="en-US"/>
+          </a:p>
+        </p:txBody>
+      </p:sp>
+      <p:sp>
+        <p:nvSpPr>
+          <p:cNvPr id="8" name="Footer number"/>
+          <p:cNvSpPr txBox="1"/>
+          <p:nvPr/>
+        </p:nvSpPr>
+        <p:spPr>
+          <a:xfrm>
+            <a:off x="7900000" y="6490000"/>
+            <a:ext cx="1450000" cy="220000"/>
+          </a:xfrm>
+          <a:prstGeom prst="rect">
+            <a:avLst/>
+          </a:prstGeom>
+          <a:noFill/>
+          <a:ln w="9525">
+            <a:noFill/>
+          </a:ln>
+        </p:spPr>
+        <p:txBody>
+          <a:bodyPr anchor="ctr" lIns="45720" rIns="45720" tIns="22860" bIns="22860" wrap="square"/>
+          <a:lstStyle/>
+          <a:p>
+            <a:pPr algn="r"/>
+            <a:r>
+              <a:rPr lang="en-US" sz="850">
+                <a:latin typeface="Aptos"/>
+                <a:solidFill>
+                  <a:srgbClr val="64748B"/>
+                </a:solidFill>
+              </a:rPr>
+              <a:t>07  /  11</a:t>
+            </a:r>
+            <a:endParaRPr lang="en-US"/>
           </a:p>
         </p:txBody>
       </p:sp>
@@ -4525,8 +8202,16 @@
 </file>
 
 <file path=ppt/slides/slide9.xml><?xml version="1.0" encoding="utf-8"?>
-<p:sld xmlns:a="http://schemas.openxmlformats.org/drawingml/2006/main" xmlns:r="http://schemas.openxmlformats.org/officeDocument/2006/relationships" xmlns:p="http://schemas.openxmlformats.org/presentationml/2006/main">
+<p:sld xmlns:a="http://schemas.openxmlformats.org/drawingml/2006/main" xmlns:p="http://schemas.openxmlformats.org/presentationml/2006/main">
   <p:cSld>
+    <p:bg>
+      <a:bgPr>
+        <a:solidFill>
+          <a:srgbClr val="F8FAFC"/>
+        </a:solidFill>
+        <a:effectLst/>
+      </a:bgPr>
+    </p:bg>
     <p:spTree>
       <p:nvGrpSpPr>
         <p:cNvPr id="1" name=""/>
@@ -4543,6 +8228,61 @@
       </p:grpSpPr>
       <p:sp>
         <p:nvSpPr>
+          <p:cNvPr id="2" name="Title 1"/>
+          <p:cNvSpPr>
+            <a:spLocks noGrp="1"/>
+          </p:cNvSpPr>
+          <p:nvPr>
+            <p:ph type="title"/>
+          </p:nvPr>
+        </p:nvSpPr>
+        <p:spPr/>
+        <p:txBody>
+          <a:bodyPr wrap="square" anchor="t" lIns="91440" rIns="91440" tIns="45720" bIns="45720"/>
+          <a:lstStyle>
+            <a:lvl1pPr>
+              <a:defRPr sz="2500">
+                <a:latin typeface="Aptos Display"/>
+                <a:solidFill>
+                  <a:srgbClr val="0B1220"/>
+                </a:solidFill>
+              </a:defRPr>
+            </a:lvl1pPr>
+            <a:lvl2pPr>
+              <a:defRPr sz="2500">
+                <a:latin typeface="Aptos Display"/>
+                <a:solidFill>
+                  <a:srgbClr val="0B1220"/>
+                </a:solidFill>
+              </a:defRPr>
+            </a:lvl2pPr>
+            <a:lvl3pPr>
+              <a:defRPr sz="2500">
+                <a:latin typeface="Aptos Display"/>
+                <a:solidFill>
+                  <a:srgbClr val="0B1220"/>
+                </a:solidFill>
+              </a:defRPr>
+            </a:lvl3pPr>
+          </a:lstStyle>
+          <a:p>
+            <a:pPr lvl="0" indent="0" marL="0">
+              <a:buNone/>
+            </a:pPr>
+            <a:r>
+              <a:rPr sz="2500" b="1">
+                <a:latin typeface="Aptos Display"/>
+                <a:solidFill>
+                  <a:srgbClr val="0B1220"/>
+                </a:solidFill>
+              </a:rPr>
+              <a:t>Slide 8 — Kubernetes and Helm</a:t>
+            </a:r>
+          </a:p>
+        </p:txBody>
+      </p:sp>
+      <p:sp>
+        <p:nvSpPr>
           <p:cNvPr id="3" name="Content Placeholder 2"/>
           <p:cNvSpPr>
             <a:spLocks noGrp="1"/>
@@ -4553,114 +8293,450 @@
         </p:nvSpPr>
         <p:spPr/>
         <p:txBody>
-          <a:bodyPr/>
-          <a:lstStyle/>
+          <a:bodyPr wrap="square" anchor="t" lIns="91440" rIns="91440" tIns="45720" bIns="45720"/>
+          <a:lstStyle>
+            <a:lvl1pPr>
+              <a:defRPr sz="1550">
+                <a:latin typeface="Aptos"/>
+                <a:solidFill>
+                  <a:srgbClr val="334155"/>
+                </a:solidFill>
+              </a:defRPr>
+            </a:lvl1pPr>
+            <a:lvl2pPr>
+              <a:defRPr sz="1550">
+                <a:latin typeface="Aptos"/>
+                <a:solidFill>
+                  <a:srgbClr val="334155"/>
+                </a:solidFill>
+              </a:defRPr>
+            </a:lvl2pPr>
+            <a:lvl3pPr>
+              <a:defRPr sz="1550">
+                <a:latin typeface="Aptos"/>
+                <a:solidFill>
+                  <a:srgbClr val="334155"/>
+                </a:solidFill>
+              </a:defRPr>
+            </a:lvl3pPr>
+          </a:lstStyle>
+          <a:p>
+            <a:pPr lvl="0"/>
+            <a:r>
+              <a:rPr sz="1550" b="0">
+                <a:latin typeface="Aptos"/>
+                <a:solidFill>
+                  <a:srgbClr val="334155"/>
+                </a:solidFill>
+              </a:rPr>
+              <a:t>k8s/</a:t>
+            </a:r>
+            <a:r>
+              <a:rPr sz="1550" b="0">
+                <a:latin typeface="Aptos"/>
+                <a:solidFill>
+                  <a:srgbClr val="334155"/>
+                </a:solidFill>
+              </a:rPr>
+              <a:t> contains the namespace and </a:t>
+            </a:r>
+            <a:r>
+              <a:rPr sz="1550" b="0">
+                <a:latin typeface="Aptos"/>
+                <a:solidFill>
+                  <a:srgbClr val="334155"/>
+                </a:solidFill>
+              </a:rPr>
+              <a:t>gp3</a:t>
+            </a:r>
+            <a:r>
+              <a:rPr sz="1550" b="0">
+                <a:latin typeface="Aptos"/>
+                <a:solidFill>
+                  <a:srgbClr val="334155"/>
+                </a:solidFill>
+              </a:rPr>
+              <a:t> StorageClass bootstrap manifests; Helm owns the application resources.</a:t>
+            </a:r>
+          </a:p>
+          <a:p>
+            <a:pPr lvl="0"/>
+            <a:r>
+              <a:rPr sz="1550" b="0">
+                <a:latin typeface="Aptos"/>
+                <a:solidFill>
+                  <a:srgbClr val="334155"/>
+                </a:solidFill>
+              </a:rPr>
+              <a:t>helm/taskboard</a:t>
+            </a:r>
+            <a:r>
+              <a:rPr sz="1550" b="0">
+                <a:latin typeface="Aptos"/>
+                <a:solidFill>
+                  <a:srgbClr val="334155"/>
+                </a:solidFill>
+              </a:rPr>
+              <a:t> packages frontend, backend, PostgreSQL/PVC, Ingress, HPA, and ServiceMonitor.</a:t>
+            </a:r>
+          </a:p>
+          <a:p>
+            <a:pPr lvl="0"/>
+            <a:r>
+              <a:rPr sz="1550" b="0">
+                <a:latin typeface="Aptos"/>
+                <a:solidFill>
+                  <a:srgbClr val="334155"/>
+                </a:solidFill>
+              </a:rPr>
+              <a:t>Production deployment is running with 2 backend Pods, 2 frontend Pods, 1 PostgreSQL Pod, a Bound 5 GiB PVC, and an AWS load balancer.</a:t>
+            </a:r>
+          </a:p>
+          <a:p>
+            <a:pPr lvl="0"/>
+            <a:r>
+              <a:rPr sz="1550" b="0">
+                <a:latin typeface="Aptos"/>
+                <a:solidFill>
+                  <a:srgbClr val="334155"/>
+                </a:solidFill>
+              </a:rPr>
+              <a:t>Backend and frontend are exposed internally through ClusterIP Services; the NGINX Ingress routes </a:t>
+            </a:r>
+            <a:r>
+              <a:rPr sz="1550" b="0">
+                <a:latin typeface="Aptos"/>
+                <a:solidFill>
+                  <a:srgbClr val="334155"/>
+                </a:solidFill>
+              </a:rPr>
+              <a:t>/</a:t>
+            </a:r>
+            <a:r>
+              <a:rPr sz="1550" b="0">
+                <a:latin typeface="Aptos"/>
+                <a:solidFill>
+                  <a:srgbClr val="334155"/>
+                </a:solidFill>
+              </a:rPr>
+              <a:t> to frontend and </a:t>
+            </a:r>
+            <a:r>
+              <a:rPr sz="1550" b="0">
+                <a:latin typeface="Aptos"/>
+                <a:solidFill>
+                  <a:srgbClr val="334155"/>
+                </a:solidFill>
+              </a:rPr>
+              <a:t>/api</a:t>
+            </a:r>
+            <a:r>
+              <a:rPr sz="1550" b="0">
+                <a:latin typeface="Aptos"/>
+                <a:solidFill>
+                  <a:srgbClr val="334155"/>
+                </a:solidFill>
+              </a:rPr>
+              <a:t> to backend.</a:t>
+            </a:r>
+          </a:p>
+          <a:p>
+            <a:pPr lvl="0"/>
+            <a:r>
+              <a:rPr sz="1550" b="0">
+                <a:latin typeface="Aptos"/>
+                <a:solidFill>
+                  <a:srgbClr val="334155"/>
+                </a:solidFill>
+              </a:rPr>
+              <a:t>helm upgrade --install</a:t>
+            </a:r>
+            <a:r>
+              <a:rPr sz="1550" b="0">
+                <a:latin typeface="Aptos"/>
+                <a:solidFill>
+                  <a:srgbClr val="334155"/>
+                </a:solidFill>
+              </a:rPr>
+              <a:t> completed successfully and all application Pods reached </a:t>
+            </a:r>
+            <a:r>
+              <a:rPr sz="1550" b="0">
+                <a:latin typeface="Aptos"/>
+                <a:solidFill>
+                  <a:srgbClr val="334155"/>
+                </a:solidFill>
+              </a:rPr>
+              <a:t>Running</a:t>
+            </a:r>
+            <a:r>
+              <a:rPr sz="1550" b="0">
+                <a:latin typeface="Aptos"/>
+                <a:solidFill>
+                  <a:srgbClr val="334155"/>
+                </a:solidFill>
+              </a:rPr>
+              <a:t>.</a:t>
+            </a:r>
+          </a:p>
+          <a:p>
+            <a:pPr lvl="0"/>
+            <a:r>
+              <a:rPr sz="1550" b="0">
+                <a:latin typeface="Aptos"/>
+                <a:solidFill>
+                  <a:srgbClr val="334155"/>
+                </a:solidFill>
+              </a:rPr>
+              <a:t>The PostgreSQL chart sets </a:t>
+            </a:r>
+            <a:r>
+              <a:rPr sz="1550" b="0">
+                <a:latin typeface="Aptos"/>
+                <a:solidFill>
+                  <a:srgbClr val="334155"/>
+                </a:solidFill>
+              </a:rPr>
+              <a:t>PGDATA</a:t>
+            </a:r>
+            <a:r>
+              <a:rPr sz="1550" b="0">
+                <a:latin typeface="Aptos"/>
+                <a:solidFill>
+                  <a:srgbClr val="334155"/>
+                </a:solidFill>
+              </a:rPr>
+              <a:t> below the mounted volume root so a fresh EBS filesystem can initialize correctly.</a:t>
+            </a:r>
+          </a:p>
+          <a:p>
+            <a:pPr lvl="0" indent="0">
+              <a:buNone/>
+            </a:pPr>
+            <a:r>
+              <a:rPr sz="1550" b="0">
+                <a:latin typeface="Aptos"/>
+                <a:solidFill>
+                  <a:srgbClr val="334155"/>
+                </a:solidFill>
+              </a:rPr>
+              <a:t>helm lint ./helm/taskboard</a:t>
+            </a:r>
+            <a:br/>
+            <a:r>
+              <a:rPr sz="1550" b="0">
+                <a:latin typeface="Aptos"/>
+                <a:solidFill>
+                  <a:srgbClr val="334155"/>
+                </a:solidFill>
+              </a:rPr>
+              <a:t>helm template opsdesk ./helm/taskboard </a:t>
+            </a:r>
+            <a:r>
+              <a:rPr sz="1550" b="0">
+                <a:latin typeface="Aptos"/>
+                <a:solidFill>
+                  <a:srgbClr val="334155"/>
+                </a:solidFill>
+              </a:rPr>
+              <a:t>-n</a:t>
+            </a:r>
+            <a:r>
+              <a:rPr sz="1550" b="0">
+                <a:latin typeface="Aptos"/>
+                <a:solidFill>
+                  <a:srgbClr val="334155"/>
+                </a:solidFill>
+              </a:rPr>
+              <a:t> opsdesk</a:t>
+            </a:r>
+          </a:p>
           <a:p>
             <a:pPr lvl="0" indent="0" marL="0">
-              <a:spcBef>
-                <a:spcPts val="3000"/>
-              </a:spcBef>
               <a:buNone/>
             </a:pPr>
             <a:r>
-              <a:rPr b="1"/>
-              <a:t>Slide 8 — Kubernetes and Helm</a:t>
-            </a:r>
-          </a:p>
-          <a:p>
-            <a:pPr lvl="0"/>
-            <a:r>
-              <a:rPr>
-                <a:latin typeface="Courier"/>
-              </a:rPr>
-              <a:t>k8s/</a:t>
-            </a:r>
-            <a:r>
-              <a:rPr/>
-              <a:t> contains the namespace bootstrap manifest; Helm owns the application resources.</a:t>
-            </a:r>
-          </a:p>
-          <a:p>
-            <a:pPr lvl="0"/>
-            <a:r>
-              <a:rPr>
-                <a:latin typeface="Courier"/>
-              </a:rPr>
-              <a:t>helm/taskboard</a:t>
-            </a:r>
-            <a:r>
-              <a:rPr/>
-              <a:t> packages frontend, backend, PostgreSQL/PVC, optional Ingress, HPA, and ServiceMonitor.</a:t>
-            </a:r>
-          </a:p>
-          <a:p>
-            <a:pPr lvl="0"/>
-            <a:r>
-              <a:rPr>
-                <a:latin typeface="Courier"/>
-              </a:rPr>
-              <a:t>values-dev.yaml</a:t>
-            </a:r>
-            <a:r>
-              <a:rPr/>
-              <a:t> enables </a:t>
-            </a:r>
-            <a:r>
-              <a:rPr>
-                <a:latin typeface="Courier"/>
-              </a:rPr>
-              <a:t>opsdesk.local</a:t>
-            </a:r>
-            <a:r>
-              <a:rPr/>
-              <a:t> Ingress and disables HPA.</a:t>
-            </a:r>
-          </a:p>
-          <a:p>
-            <a:pPr lvl="0"/>
-            <a:r>
-              <a:rPr>
-                <a:latin typeface="Courier"/>
-              </a:rPr>
-              <a:t>values-prod.yaml</a:t>
-            </a:r>
-            <a:r>
-              <a:rPr/>
-              <a:t> enables Ingress/HPA but still needs real image names, a real host, and the external database Secret.</a:t>
-            </a:r>
-          </a:p>
-          <a:p>
-            <a:pPr lvl="0" indent="0">
-              <a:buNone/>
-            </a:pPr>
-            <a:r>
-              <a:rPr>
-                <a:latin typeface="Courier"/>
-              </a:rPr>
-              <a:t>helm lint ./helm/taskboard</a:t>
-            </a:r>
-            <a:br/>
-            <a:r>
-              <a:rPr>
-                <a:latin typeface="Courier"/>
-              </a:rPr>
-              <a:t>helm template opsdesk ./helm/taskboard </a:t>
-            </a:r>
-            <a:r>
-              <a:rPr>
-                <a:solidFill>
-                  <a:srgbClr val="7D9029"/>
-                </a:solidFill>
-                <a:latin typeface="Courier"/>
-              </a:rPr>
-              <a:t>-n</a:t>
-            </a:r>
-            <a:r>
-              <a:rPr>
-                <a:latin typeface="Courier"/>
-              </a:rPr>
-              <a:t> opsdesk</a:t>
-            </a:r>
+              <a:rPr b="0" sz="1550">
+                <a:latin typeface="Aptos"/>
+                <a:solidFill>
+                  <a:srgbClr val="334155"/>
+                </a:solidFill>
+              </a:rPr>
+              <a:t>Verified:</a:t>
+            </a:r>
+            <a:r>
+              <a:rPr sz="1550" b="0">
+                <a:latin typeface="Aptos"/>
+                <a:solidFill>
+                  <a:srgbClr val="334155"/>
+                </a:solidFill>
+              </a:rPr>
+              <a:t> Helm lint and production rendering passed.</a:t>
+            </a:r>
+          </a:p>
+        </p:txBody>
+      </p:sp>
+      <p:sp>
+        <p:nvSpPr>
+          <p:cNvPr id="4" name="Top accent"/>
+          <p:cNvSpPr txBox="0"/>
+          <p:nvPr/>
+        </p:nvSpPr>
+        <p:spPr>
+          <a:xfrm>
+            <a:off x="0" y="0"/>
+            <a:ext cx="9144000" cy="76000"/>
+          </a:xfrm>
+          <a:prstGeom prst="rect">
+            <a:avLst/>
+          </a:prstGeom>
+          <a:solidFill>
+            <a:srgbClr val="06B6D4"/>
+          </a:solidFill>
+          <a:ln w="9525">
+            <a:noFill/>
+          </a:ln>
+        </p:spPr>
+        <p:txBody>
+          <a:bodyPr anchor="ctr" lIns="45720" rIns="45720" tIns="22860" bIns="22860" wrap="square"/>
+          <a:lstStyle/>
+          <a:p>
+            <a:pPr algn="l"/>
+            <a:endParaRPr lang="en-US"/>
+          </a:p>
+        </p:txBody>
+      </p:sp>
+      <p:sp>
+        <p:nvSpPr>
+          <p:cNvPr id="5" name="Title accent"/>
+          <p:cNvSpPr txBox="0"/>
+          <p:nvPr/>
+        </p:nvSpPr>
+        <p:spPr>
+          <a:xfrm>
+            <a:off x="457200" y="1010000"/>
+            <a:ext cx="720000" cy="52000"/>
+          </a:xfrm>
+          <a:prstGeom prst="roundRect">
+            <a:avLst/>
+          </a:prstGeom>
+          <a:solidFill>
+            <a:srgbClr val="14B8A6"/>
+          </a:solidFill>
+          <a:ln w="9525">
+            <a:noFill/>
+          </a:ln>
+        </p:spPr>
+        <p:txBody>
+          <a:bodyPr anchor="ctr" lIns="45720" rIns="45720" tIns="22860" bIns="22860" wrap="square"/>
+          <a:lstStyle/>
+          <a:p>
+            <a:pPr algn="l"/>
+            <a:endParaRPr lang="en-US"/>
+          </a:p>
+        </p:txBody>
+      </p:sp>
+      <p:sp>
+        <p:nvSpPr>
+          <p:cNvPr id="6" name="Footer rule"/>
+          <p:cNvSpPr txBox="0"/>
+          <p:nvPr/>
+        </p:nvSpPr>
+        <p:spPr>
+          <a:xfrm>
+            <a:off x="457200" y="6440000"/>
+            <a:ext cx="8229600" cy="14000"/>
+          </a:xfrm>
+          <a:prstGeom prst="rect">
+            <a:avLst/>
+          </a:prstGeom>
+          <a:solidFill>
+            <a:srgbClr val="CBD5E1"/>
+          </a:solidFill>
+          <a:ln w="9525">
+            <a:noFill/>
+          </a:ln>
+        </p:spPr>
+        <p:txBody>
+          <a:bodyPr anchor="ctr" lIns="45720" rIns="45720" tIns="22860" bIns="22860" wrap="square"/>
+          <a:lstStyle/>
+          <a:p>
+            <a:pPr algn="l"/>
+            <a:endParaRPr lang="en-US"/>
+          </a:p>
+        </p:txBody>
+      </p:sp>
+      <p:sp>
+        <p:nvSpPr>
+          <p:cNvPr id="7" name="Footer label"/>
+          <p:cNvSpPr txBox="1"/>
+          <p:nvPr/>
+        </p:nvSpPr>
+        <p:spPr>
+          <a:xfrm>
+            <a:off x="457200" y="6490000"/>
+            <a:ext cx="5200000" cy="220000"/>
+          </a:xfrm>
+          <a:prstGeom prst="rect">
+            <a:avLst/>
+          </a:prstGeom>
+          <a:noFill/>
+          <a:ln w="9525">
+            <a:noFill/>
+          </a:ln>
+        </p:spPr>
+        <p:txBody>
+          <a:bodyPr anchor="ctr" lIns="45720" rIns="45720" tIns="22860" bIns="22860" wrap="square"/>
+          <a:lstStyle/>
+          <a:p>
+            <a:pPr algn="l"/>
+            <a:r>
+              <a:rPr lang="en-US" sz="850">
+                <a:latin typeface="Aptos"/>
+                <a:solidFill>
+                  <a:srgbClr val="64748B"/>
+                </a:solidFill>
+              </a:rPr>
+              <a:t>OPSDESK  /  DEVSECOPS CAPSTONE</a:t>
+            </a:r>
+            <a:endParaRPr lang="en-US"/>
+          </a:p>
+        </p:txBody>
+      </p:sp>
+      <p:sp>
+        <p:nvSpPr>
+          <p:cNvPr id="8" name="Footer number"/>
+          <p:cNvSpPr txBox="1"/>
+          <p:nvPr/>
+        </p:nvSpPr>
+        <p:spPr>
+          <a:xfrm>
+            <a:off x="7900000" y="6490000"/>
+            <a:ext cx="1450000" cy="220000"/>
+          </a:xfrm>
+          <a:prstGeom prst="rect">
+            <a:avLst/>
+          </a:prstGeom>
+          <a:noFill/>
+          <a:ln w="9525">
+            <a:noFill/>
+          </a:ln>
+        </p:spPr>
+        <p:txBody>
+          <a:bodyPr anchor="ctr" lIns="45720" rIns="45720" tIns="22860" bIns="22860" wrap="square"/>
+          <a:lstStyle/>
+          <a:p>
+            <a:pPr algn="r"/>
+            <a:r>
+              <a:rPr lang="en-US" sz="850">
+                <a:latin typeface="Aptos"/>
+                <a:solidFill>
+                  <a:srgbClr val="64748B"/>
+                </a:solidFill>
+              </a:rPr>
+              <a:t>08  /  11</a:t>
+            </a:r>
+            <a:endParaRPr lang="en-US"/>
           </a:p>
         </p:txBody>
       </p:sp>
@@ -4674,45 +8750,45 @@
   <a:themeElements>
     <a:clrScheme name="Office">
       <a:dk1>
-        <a:sysClr val="windowText" lastClr="000000"/>
+        <a:srgbClr val="0B1220"/>
       </a:dk1>
       <a:lt1>
-        <a:sysClr val="window" lastClr="FFFFFF"/>
+        <a:srgbClr val="FFFFFF"/>
       </a:lt1>
       <a:dk2>
-        <a:srgbClr val="1F497D"/>
+        <a:srgbClr val="334155"/>
       </a:dk2>
       <a:lt2>
-        <a:srgbClr val="EEECE1"/>
+        <a:srgbClr val="E2E8F0"/>
       </a:lt2>
       <a:accent1>
-        <a:srgbClr val="4F81BD"/>
+        <a:srgbClr val="06B6D4"/>
       </a:accent1>
       <a:accent2>
-        <a:srgbClr val="C0504D"/>
+        <a:srgbClr val="14B8A6"/>
       </a:accent2>
       <a:accent3>
-        <a:srgbClr val="9BBB59"/>
+        <a:srgbClr val="F59E0B"/>
       </a:accent3>
       <a:accent4>
-        <a:srgbClr val="8064A2"/>
+        <a:srgbClr val="8B5CF6"/>
       </a:accent4>
       <a:accent5>
-        <a:srgbClr val="4BACC6"/>
+        <a:srgbClr val="22C55E"/>
       </a:accent5>
       <a:accent6>
-        <a:srgbClr val="F79646"/>
+        <a:srgbClr val="F43F5E"/>
       </a:accent6>
       <a:hlink>
-        <a:srgbClr val="0000FF"/>
+        <a:srgbClr val="0284C7"/>
       </a:hlink>
       <a:folHlink>
-        <a:srgbClr val="800080"/>
+        <a:srgbClr val="7C3AED"/>
       </a:folHlink>
     </a:clrScheme>
     <a:fontScheme name="Office">
       <a:majorFont>
-        <a:latin typeface="Calibri"/>
+        <a:latin typeface="Aptos Display"/>
         <a:ea typeface=""/>
         <a:cs typeface=""/>
         <a:font script="Jpan" typeface="ＭＳ Ｐゴシック"/>
@@ -4747,7 +8823,7 @@
         <a:font script="Geor" typeface="Sylfaen"/>
       </a:majorFont>
       <a:minorFont>
-        <a:latin typeface="Calibri"/>
+        <a:latin typeface="Aptos"/>
         <a:ea typeface=""/>
         <a:cs typeface=""/>
         <a:font script="Jpan" typeface="ＭＳ Ｐゴシック"/>
